--- a/decks/david-samuel/Extol-x-David-Samuel-Pitch-Style.pptx
+++ b/decks/david-samuel/Extol-x-David-Samuel-Pitch-Style.pptx
@@ -32,9 +32,11 @@
     <p:sldId id="280" r:id="rId26"/>
     <p:sldId id="281" r:id="rId27"/>
     <p:sldId id="282" r:id="rId28"/>
+    <p:sldId id="283" r:id="rId29"/>
+    <p:sldId id="284" r:id="rId30"/>
   </p:sldIdLst>
   <p:notesMasterIdLst>
-    <p:notesMasterId r:id="rId29"/>
+    <p:notesMasterId r:id="rId31"/>
   </p:notesMasterIdLst>
   <p:sldSz cx="12192000" cy="6858000"/>
   <p:notesSz cx="6858000" cy="12192000"/>
@@ -246,7 +248,7 @@
           <c:showBubbleSize val="0"/>
           <c:showLeaderLines val="0"/>
         </c:dLbls>
-        <c:gapWidth val="90"/>
+        <c:gapWidth val="70"/>
         <c:overlap val="0"/>
         <c:axId val="2094734554"/>
         <c:axId val="2094734552"/>
@@ -357,6 +359,461 @@
 </file>
 
 <file path=ppt/charts/chart2.xml><?xml version="1.0" encoding="utf-8"?>
+<c:chartSpace xmlns:c="http://schemas.openxmlformats.org/drawingml/2006/chart" xmlns:a="http://schemas.openxmlformats.org/drawingml/2006/main" xmlns:r="http://schemas.openxmlformats.org/officeDocument/2006/relationships">
+  <c:date1904 val="0"/>
+  <c:roundedCorners val="1"/>
+  <c:chart>
+    <c:autoTitleDeleted val="1"/>
+    <c:plotArea>
+      <c:layout/>
+      <c:doughnutChart>
+        <c:varyColors val="1"/>
+        <c:ser>
+          <c:idx val="0"/>
+          <c:order val="0"/>
+          <c:tx>
+            <c:strRef>
+              <c:f>Sheet1!$B$1</c:f>
+              <c:strCache>
+                <c:ptCount val="1"/>
+                <c:pt idx="0">
+                  <c:v>Comments</c:v>
+                </c:pt>
+              </c:strCache>
+            </c:strRef>
+          </c:tx>
+          <c:spPr>
+            <a:solidFill>
+              <a:schemeClr val="accent1"/>
+            </a:solidFill>
+            <a:ln w="9525" cap="flat">
+              <a:solidFill>
+                <a:srgbClr val="F9F9F9"/>
+              </a:solidFill>
+              <a:prstDash val="solid"/>
+              <a:round/>
+            </a:ln>
+            <a:effectLst/>
+          </c:spPr>
+          <c:dPt>
+            <c:idx val="0"/>
+            <c:bubble3D val="0"/>
+            <c:spPr>
+              <a:solidFill>
+                <a:srgbClr val="000000"/>
+              </a:solidFill>
+              <a:effectLst/>
+            </c:spPr>
+          </c:dPt>
+          <c:dPt>
+            <c:idx val="1"/>
+            <c:bubble3D val="0"/>
+            <c:spPr>
+              <a:solidFill>
+                <a:srgbClr val="BDBDBD"/>
+              </a:solidFill>
+              <a:effectLst/>
+            </c:spPr>
+          </c:dPt>
+          <c:dLbls>
+            <c:dLbl>
+              <c:idx val="0"/>
+              <c:numFmt formatCode="0%" sourceLinked="0"/>
+              <c:spPr/>
+              <c:txPr>
+                <a:bodyPr/>
+                <a:lstStyle/>
+                <a:p>
+                  <a:pPr>
+                    <a:defRPr sz="1300" b="0" i="0" u="none" strike="noStrike">
+                      <a:solidFill>
+                        <a:srgbClr val="FFFFFF"/>
+                      </a:solidFill>
+                      <a:latin typeface="+mn-lt"/>
+                    </a:defRPr>
+                  </a:pPr>
+                </a:p>
+              </c:txPr>
+              <c:showLegendKey val="0"/>
+              <c:showVal val="0"/>
+              <c:showCatName val="0"/>
+              <c:showSerName val="0"/>
+              <c:showPercent val="1"/>
+              <c:showBubbleSize val="0"/>
+            </c:dLbl>
+            <c:dLbl>
+              <c:idx val="1"/>
+              <c:numFmt formatCode="0%" sourceLinked="0"/>
+              <c:spPr/>
+              <c:txPr>
+                <a:bodyPr/>
+                <a:lstStyle/>
+                <a:p>
+                  <a:pPr>
+                    <a:defRPr sz="1300" b="0" i="0" u="none" strike="noStrike">
+                      <a:solidFill>
+                        <a:srgbClr val="FFFFFF"/>
+                      </a:solidFill>
+                      <a:latin typeface="+mn-lt"/>
+                    </a:defRPr>
+                  </a:pPr>
+                </a:p>
+              </c:txPr>
+              <c:showLegendKey val="0"/>
+              <c:showVal val="0"/>
+              <c:showCatName val="0"/>
+              <c:showSerName val="0"/>
+              <c:showPercent val="1"/>
+              <c:showBubbleSize val="0"/>
+            </c:dLbl>
+            <c:numFmt formatCode="0%" sourceLinked="0"/>
+            <c:txPr>
+              <a:bodyPr/>
+              <a:lstStyle/>
+              <a:p>
+                <a:pPr>
+                  <a:defRPr sz="1800" b="0" i="0" u="none" strike="noStrike">
+                    <a:solidFill>
+                      <a:srgbClr val="000000"/>
+                    </a:solidFill>
+                    <a:latin typeface="DM Sans"/>
+                  </a:defRPr>
+                </a:pPr>
+              </a:p>
+            </c:txPr>
+            <c:showLegendKey val="0"/>
+            <c:showVal val="0"/>
+            <c:showCatName val="1"/>
+            <c:showSerName val="0"/>
+            <c:showPercent val="1"/>
+            <c:showBubbleSize val="0"/>
+            <c:showLeaderLines val="0"/>
+          </c:dLbls>
+          <c:cat>
+            <c:strRef>
+              <c:f>Sheet1!$A$2:$A$3</c:f>
+              <c:strCache>
+                <c:ptCount val="2"/>
+                <c:pt idx="0">
+                  <c:v>Just “congrats”</c:v>
+                </c:pt>
+                <c:pt idx="1">
+                  <c:v>Made a real point</c:v>
+                </c:pt>
+              </c:strCache>
+            </c:strRef>
+          </c:cat>
+          <c:val>
+            <c:numRef>
+              <c:f>Sheet1!$B$2:$B$3</c:f>
+              <c:numCache>
+                <c:ptCount val="2"/>
+                <c:pt idx="0">
+                  <c:v>76</c:v>
+                </c:pt>
+                <c:pt idx="1">
+                  <c:v>24</c:v>
+                </c:pt>
+              </c:numCache>
+            </c:numRef>
+          </c:val>
+        </c:ser>
+        <c:firstSliceAng val="0"/>
+        <c:holeSize val="62"/>
+      </c:doughnutChart>
+      <c:spPr>
+        <a:noFill/>
+        <a:ln>
+          <a:noFill/>
+        </a:ln>
+        <a:effectLst/>
+      </c:spPr>
+    </c:plotArea>
+    <c:legend>
+      <c:legendPos val="b"/>
+      <c:overlay val="0"/>
+      <c:txPr>
+        <a:bodyPr/>
+        <a:lstStyle/>
+        <a:p>
+          <a:pPr>
+            <a:defRPr sz="1100">
+              <a:solidFill>
+                <a:srgbClr val="000000"/>
+              </a:solidFill>
+              <a:latin typeface="+mn-lt"/>
+              <a:cs typeface="+mn-lt"/>
+            </a:defRPr>
+          </a:pPr>
+          <a:endParaRPr lang="en-US"/>
+        </a:p>
+      </c:txPr>
+    </c:legend>
+    <c:plotVisOnly val="1"/>
+    <c:dispBlanksAs val="span"/>
+  </c:chart>
+  <c:spPr>
+    <a:noFill/>
+    <a:ln>
+      <a:noFill/>
+    </a:ln>
+    <a:effectLst/>
+  </c:spPr>
+  <c:externalData r:id="rId1">
+    <c:autoUpdate val="0"/>
+  </c:externalData>
+</c:chartSpace>
+</file>
+
+<file path=ppt/charts/chart3.xml><?xml version="1.0" encoding="utf-8"?>
+<c:chartSpace xmlns:c="http://schemas.openxmlformats.org/drawingml/2006/chart" xmlns:a="http://schemas.openxmlformats.org/drawingml/2006/main" xmlns:r="http://schemas.openxmlformats.org/officeDocument/2006/relationships">
+  <c:date1904 val="0"/>
+  <c:roundedCorners val="1"/>
+  <c:chart>
+    <c:autoTitleDeleted val="1"/>
+    <c:plotArea>
+      <c:layout/>
+      <c:doughnutChart>
+        <c:varyColors val="1"/>
+        <c:ser>
+          <c:idx val="0"/>
+          <c:order val="0"/>
+          <c:tx>
+            <c:strRef>
+              <c:f>Sheet1!$B$1</c:f>
+              <c:strCache>
+                <c:ptCount val="1"/>
+                <c:pt idx="0">
+                  <c:v>Minutes</c:v>
+                </c:pt>
+              </c:strCache>
+            </c:strRef>
+          </c:tx>
+          <c:spPr>
+            <a:solidFill>
+              <a:schemeClr val="accent1"/>
+            </a:solidFill>
+            <a:ln w="9525" cap="flat">
+              <a:solidFill>
+                <a:srgbClr val="F9F9F9"/>
+              </a:solidFill>
+              <a:prstDash val="solid"/>
+              <a:round/>
+            </a:ln>
+            <a:effectLst/>
+          </c:spPr>
+          <c:dPt>
+            <c:idx val="0"/>
+            <c:bubble3D val="0"/>
+            <c:spPr>
+              <a:solidFill>
+                <a:srgbClr val="000000"/>
+              </a:solidFill>
+              <a:effectLst/>
+            </c:spPr>
+          </c:dPt>
+          <c:dPt>
+            <c:idx val="1"/>
+            <c:bubble3D val="0"/>
+            <c:spPr>
+              <a:solidFill>
+                <a:srgbClr val="6B6B6B"/>
+              </a:solidFill>
+              <a:effectLst/>
+            </c:spPr>
+          </c:dPt>
+          <c:dPt>
+            <c:idx val="2"/>
+            <c:bubble3D val="0"/>
+            <c:spPr>
+              <a:solidFill>
+                <a:srgbClr val="BDBDBD"/>
+              </a:solidFill>
+              <a:effectLst/>
+            </c:spPr>
+          </c:dPt>
+          <c:dLbls>
+            <c:dLbl>
+              <c:idx val="0"/>
+              <c:numFmt formatCode="General" sourceLinked="0"/>
+              <c:spPr/>
+              <c:txPr>
+                <a:bodyPr/>
+                <a:lstStyle/>
+                <a:p>
+                  <a:pPr>
+                    <a:defRPr sz="1400" b="0" i="0" u="none" strike="noStrike">
+                      <a:solidFill>
+                        <a:srgbClr val="FFFFFF"/>
+                      </a:solidFill>
+                      <a:latin typeface="+mn-lt"/>
+                    </a:defRPr>
+                  </a:pPr>
+                </a:p>
+              </c:txPr>
+              <c:showLegendKey val="0"/>
+              <c:showVal val="1"/>
+              <c:showCatName val="0"/>
+              <c:showSerName val="0"/>
+              <c:showPercent val="0"/>
+              <c:showBubbleSize val="0"/>
+            </c:dLbl>
+            <c:dLbl>
+              <c:idx val="1"/>
+              <c:numFmt formatCode="General" sourceLinked="0"/>
+              <c:spPr/>
+              <c:txPr>
+                <a:bodyPr/>
+                <a:lstStyle/>
+                <a:p>
+                  <a:pPr>
+                    <a:defRPr sz="1400" b="0" i="0" u="none" strike="noStrike">
+                      <a:solidFill>
+                        <a:srgbClr val="FFFFFF"/>
+                      </a:solidFill>
+                      <a:latin typeface="+mn-lt"/>
+                    </a:defRPr>
+                  </a:pPr>
+                </a:p>
+              </c:txPr>
+              <c:showLegendKey val="0"/>
+              <c:showVal val="1"/>
+              <c:showCatName val="0"/>
+              <c:showSerName val="0"/>
+              <c:showPercent val="0"/>
+              <c:showBubbleSize val="0"/>
+            </c:dLbl>
+            <c:dLbl>
+              <c:idx val="2"/>
+              <c:numFmt formatCode="General" sourceLinked="0"/>
+              <c:spPr/>
+              <c:txPr>
+                <a:bodyPr/>
+                <a:lstStyle/>
+                <a:p>
+                  <a:pPr>
+                    <a:defRPr sz="1400" b="0" i="0" u="none" strike="noStrike">
+                      <a:solidFill>
+                        <a:srgbClr val="FFFFFF"/>
+                      </a:solidFill>
+                      <a:latin typeface="+mn-lt"/>
+                    </a:defRPr>
+                  </a:pPr>
+                </a:p>
+              </c:txPr>
+              <c:showLegendKey val="0"/>
+              <c:showVal val="1"/>
+              <c:showCatName val="0"/>
+              <c:showSerName val="0"/>
+              <c:showPercent val="0"/>
+              <c:showBubbleSize val="0"/>
+            </c:dLbl>
+            <c:numFmt formatCode="General" sourceLinked="0"/>
+            <c:txPr>
+              <a:bodyPr/>
+              <a:lstStyle/>
+              <a:p>
+                <a:pPr>
+                  <a:defRPr sz="1800" b="0" i="0" u="none" strike="noStrike">
+                    <a:solidFill>
+                      <a:srgbClr val="000000"/>
+                    </a:solidFill>
+                    <a:latin typeface="DM Sans"/>
+                  </a:defRPr>
+                </a:pPr>
+              </a:p>
+            </c:txPr>
+            <c:showLegendKey val="0"/>
+            <c:showVal val="0"/>
+            <c:showCatName val="1"/>
+            <c:showSerName val="0"/>
+            <c:showPercent val="1"/>
+            <c:showBubbleSize val="0"/>
+            <c:showLeaderLines val="0"/>
+          </c:dLbls>
+          <c:cat>
+            <c:strRef>
+              <c:f>Sheet1!$A$2:$A$4</c:f>
+              <c:strCache>
+                <c:ptCount val="3"/>
+                <c:pt idx="0">
+                  <c:v>Weekly call</c:v>
+                </c:pt>
+                <c:pt idx="1">
+                  <c:v>Approvals</c:v>
+                </c:pt>
+                <c:pt idx="2">
+                  <c:v>Raw note</c:v>
+                </c:pt>
+              </c:strCache>
+            </c:strRef>
+          </c:cat>
+          <c:val>
+            <c:numRef>
+              <c:f>Sheet1!$B$2:$B$4</c:f>
+              <c:numCache>
+                <c:ptCount val="3"/>
+                <c:pt idx="0">
+                  <c:v>60</c:v>
+                </c:pt>
+                <c:pt idx="1">
+                  <c:v>50</c:v>
+                </c:pt>
+                <c:pt idx="2">
+                  <c:v>30</c:v>
+                </c:pt>
+              </c:numCache>
+            </c:numRef>
+          </c:val>
+        </c:ser>
+        <c:firstSliceAng val="0"/>
+        <c:holeSize val="60"/>
+      </c:doughnutChart>
+      <c:spPr>
+        <a:noFill/>
+        <a:ln>
+          <a:noFill/>
+        </a:ln>
+        <a:effectLst/>
+      </c:spPr>
+    </c:plotArea>
+    <c:legend>
+      <c:legendPos val="r"/>
+      <c:overlay val="0"/>
+      <c:txPr>
+        <a:bodyPr/>
+        <a:lstStyle/>
+        <a:p>
+          <a:pPr>
+            <a:defRPr sz="1400">
+              <a:solidFill>
+                <a:srgbClr val="000000"/>
+              </a:solidFill>
+              <a:latin typeface="+mn-lt"/>
+              <a:cs typeface="+mn-lt"/>
+            </a:defRPr>
+          </a:pPr>
+          <a:endParaRPr lang="en-US"/>
+        </a:p>
+      </c:txPr>
+    </c:legend>
+    <c:plotVisOnly val="1"/>
+    <c:dispBlanksAs val="span"/>
+  </c:chart>
+  <c:spPr>
+    <a:noFill/>
+    <a:ln>
+      <a:noFill/>
+    </a:ln>
+    <a:effectLst/>
+  </c:spPr>
+  <c:externalData r:id="rId1">
+    <c:autoUpdate val="0"/>
+  </c:externalData>
+</c:chartSpace>
+</file>
+
+<file path=ppt/charts/chart4.xml><?xml version="1.0" encoding="utf-8"?>
 <c:chartSpace xmlns:c="http://schemas.openxmlformats.org/drawingml/2006/chart" xmlns:a="http://schemas.openxmlformats.org/drawingml/2006/main" xmlns:r="http://schemas.openxmlformats.org/officeDocument/2006/relationships">
   <c:date1904 val="0"/>
   <c:roundedCorners val="1"/>
@@ -591,7 +1048,7 @@
 </c:chartSpace>
 </file>
 
-<file path=ppt/charts/chart3.xml><?xml version="1.0" encoding="utf-8"?>
+<file path=ppt/charts/chart5.xml><?xml version="1.0" encoding="utf-8"?>
 <c:chartSpace xmlns:c="http://schemas.openxmlformats.org/drawingml/2006/chart" xmlns:a="http://schemas.openxmlformats.org/drawingml/2006/main" xmlns:r="http://schemas.openxmlformats.org/officeDocument/2006/relationships">
   <c:date1904 val="0"/>
   <c:roundedCorners val="1"/>
@@ -850,7 +1307,290 @@
 </c:chartSpace>
 </file>
 
-<file path=ppt/charts/chart4.xml><?xml version="1.0" encoding="utf-8"?>
+<file path=ppt/charts/chart6.xml><?xml version="1.0" encoding="utf-8"?>
+<c:chartSpace xmlns:c="http://schemas.openxmlformats.org/drawingml/2006/chart" xmlns:a="http://schemas.openxmlformats.org/drawingml/2006/main" xmlns:r="http://schemas.openxmlformats.org/officeDocument/2006/relationships">
+  <c:date1904 val="0"/>
+  <c:roundedCorners val="1"/>
+  <c:chart>
+    <c:autoTitleDeleted val="1"/>
+    <c:plotArea>
+      <c:layout/>
+      <c:barChart>
+        <c:barDir val="col"/>
+        <c:grouping val="clustered"/>
+        <c:varyColors val="0"/>
+        <c:ser>
+          <c:idx val="0"/>
+          <c:order val="0"/>
+          <c:tx>
+            <c:strRef>
+              <c:f>Sheet1!$B$1</c:f>
+              <c:strCache>
+                <c:ptCount val="1"/>
+                <c:pt idx="0">
+                  <c:v>Cumulative fee</c:v>
+                </c:pt>
+              </c:strCache>
+            </c:strRef>
+          </c:tx>
+          <c:spPr>
+            <a:solidFill>
+              <a:srgbClr val="000000"/>
+            </a:solidFill>
+            <a:effectLst/>
+          </c:spPr>
+          <c:invertIfNegative val="0"/>
+          <c:dLbls>
+            <c:numFmt formatCode="0.0" sourceLinked="0"/>
+            <c:txPr>
+              <a:bodyPr/>
+              <a:lstStyle/>
+              <a:p>
+                <a:pPr>
+                  <a:defRPr b="0" i="0" strike="noStrike" sz="1100" u="none">
+                    <a:solidFill>
+                      <a:srgbClr val="000000"/>
+                    </a:solidFill>
+                    <a:latin typeface="+mn-lt"/>
+                  </a:defRPr>
+                </a:pPr>
+              </a:p>
+            </c:txPr>
+            <c:showLegendKey val="0"/>
+            <c:showVal val="1"/>
+            <c:showCatName val="0"/>
+            <c:showSerName val="0"/>
+            <c:showPercent val="0"/>
+            <c:showBubbleSize val="0"/>
+            <c:showLeaderLines val="0"/>
+          </c:dLbls>
+          <c:cat>
+            <c:multiLvlStrRef>
+              <c:f>Sheet1!$A$2:$A$13</c:f>
+              <c:multiLvlStrCache>
+                <c:ptCount val="12"/>
+                <c:lvl>
+                  <c:pt idx="0">
+                    <c:v>M1</c:v>
+                  </c:pt>
+                  <c:pt idx="1">
+                    <c:v>M2</c:v>
+                  </c:pt>
+                  <c:pt idx="2">
+                    <c:v>M3</c:v>
+                  </c:pt>
+                  <c:pt idx="3">
+                    <c:v>M4</c:v>
+                  </c:pt>
+                  <c:pt idx="4">
+                    <c:v>M5</c:v>
+                  </c:pt>
+                  <c:pt idx="5">
+                    <c:v>M6</c:v>
+                  </c:pt>
+                  <c:pt idx="6">
+                    <c:v>M7</c:v>
+                  </c:pt>
+                  <c:pt idx="7">
+                    <c:v>M8</c:v>
+                  </c:pt>
+                  <c:pt idx="8">
+                    <c:v>M9</c:v>
+                  </c:pt>
+                  <c:pt idx="9">
+                    <c:v>M10</c:v>
+                  </c:pt>
+                  <c:pt idx="10">
+                    <c:v>M11</c:v>
+                  </c:pt>
+                  <c:pt idx="11">
+                    <c:v>M12</c:v>
+                  </c:pt>
+                </c:lvl>
+              </c:multiLvlStrCache>
+            </c:multiLvlStrRef>
+          </c:cat>
+          <c:val>
+            <c:numRef>
+              <c:f>Sheet1!$B$2:$B$13</c:f>
+              <c:numCache>
+                <c:formatCode>General</c:formatCode>
+                <c:ptCount val="12"/>
+                <c:pt idx="0">
+                  <c:v>1.5</c:v>
+                </c:pt>
+                <c:pt idx="1">
+                  <c:v>2.7</c:v>
+                </c:pt>
+                <c:pt idx="2">
+                  <c:v>3.9</c:v>
+                </c:pt>
+                <c:pt idx="3">
+                  <c:v>6.4</c:v>
+                </c:pt>
+                <c:pt idx="4">
+                  <c:v>8.9</c:v>
+                </c:pt>
+                <c:pt idx="5">
+                  <c:v>11.4</c:v>
+                </c:pt>
+                <c:pt idx="6">
+                  <c:v>13.9</c:v>
+                </c:pt>
+                <c:pt idx="7">
+                  <c:v>16.4</c:v>
+                </c:pt>
+                <c:pt idx="8">
+                  <c:v>18.9</c:v>
+                </c:pt>
+                <c:pt idx="9">
+                  <c:v>21.4</c:v>
+                </c:pt>
+                <c:pt idx="10">
+                  <c:v>23.9</c:v>
+                </c:pt>
+                <c:pt idx="11">
+                  <c:v>26.4</c:v>
+                </c:pt>
+              </c:numCache>
+            </c:numRef>
+          </c:val>
+        </c:ser>
+        <c:dLbls>
+          <c:numFmt formatCode="0.0" sourceLinked="0"/>
+          <c:txPr>
+            <a:bodyPr/>
+            <a:lstStyle/>
+            <a:p>
+              <a:pPr>
+                <a:defRPr b="0" i="0" strike="noStrike" sz="1100" u="none">
+                  <a:solidFill>
+                    <a:srgbClr val="000000"/>
+                  </a:solidFill>
+                  <a:latin typeface="+mn-lt"/>
+                </a:defRPr>
+              </a:pPr>
+            </a:p>
+          </c:txPr>
+          <c:showLegendKey val="0"/>
+          <c:showVal val="1"/>
+          <c:showCatName val="0"/>
+          <c:showSerName val="0"/>
+          <c:showPercent val="0"/>
+          <c:showBubbleSize val="0"/>
+          <c:showLeaderLines val="0"/>
+        </c:dLbls>
+        <c:gapWidth val="45"/>
+        <c:overlap val="0"/>
+        <c:axId val="2094734554"/>
+        <c:axId val="2094734552"/>
+        <c:axId val="2094734556"/>
+      </c:barChart>
+      <c:catAx>
+        <c:axId val="2094734554"/>
+        <c:scaling>
+          <c:orientation val="minMax"/>
+        </c:scaling>
+        <c:delete val="0"/>
+        <c:axPos val="b"/>
+        <c:numFmt formatCode="General" sourceLinked="1"/>
+        <c:majorTickMark val="out"/>
+        <c:minorTickMark val="none"/>
+        <c:tickLblPos val="low"/>
+        <c:spPr>
+          <a:ln w="12700" cap="flat">
+            <a:solidFill>
+              <a:srgbClr val="888888"/>
+            </a:solidFill>
+            <a:prstDash val="solid"/>
+            <a:round/>
+          </a:ln>
+        </c:spPr>
+        <c:txPr>
+          <a:bodyPr/>
+          <a:lstStyle/>
+          <a:p>
+            <a:pPr>
+              <a:defRPr sz="1300" b="0" i="0" u="none" strike="noStrike">
+                <a:solidFill>
+                  <a:srgbClr val="000000"/>
+                </a:solidFill>
+                <a:latin typeface="+mn-lt"/>
+              </a:defRPr>
+            </a:pPr>
+            <a:endParaRPr lang="en-US"/>
+          </a:p>
+        </c:txPr>
+        <c:crossAx val="2094734552"/>
+        <c:crosses val="autoZero"/>
+        <c:auto val="1"/>
+        <c:lblAlgn val="ctr"/>
+        <c:noMultiLvlLbl val="1"/>
+      </c:catAx>
+      <c:valAx>
+        <c:axId val="2094734552"/>
+        <c:scaling>
+          <c:orientation val="minMax"/>
+        </c:scaling>
+        <c:delete val="1"/>
+        <c:axPos val="l"/>
+        <c:numFmt formatCode="General" sourceLinked="0"/>
+        <c:majorTickMark val="out"/>
+        <c:minorTickMark val="none"/>
+        <c:tickLblPos val="nextTo"/>
+        <c:spPr>
+          <a:ln w="12700" cap="flat">
+            <a:solidFill>
+              <a:srgbClr val="888888"/>
+            </a:solidFill>
+            <a:prstDash val="solid"/>
+            <a:round/>
+          </a:ln>
+        </c:spPr>
+        <c:txPr>
+          <a:bodyPr/>
+          <a:lstStyle/>
+          <a:p>
+            <a:pPr>
+              <a:defRPr sz="1200" b="0" i="0" u="none" strike="noStrike">
+                <a:solidFill>
+                  <a:srgbClr val="000000"/>
+                </a:solidFill>
+                <a:latin typeface="+mn-lt"/>
+              </a:defRPr>
+            </a:pPr>
+            <a:endParaRPr lang="en-US"/>
+          </a:p>
+        </c:txPr>
+        <c:crossAx val="2094734554"/>
+        <c:crosses val="autoZero"/>
+        <c:crossBetween val="between"/>
+      </c:valAx>
+      <c:spPr>
+        <a:noFill/>
+        <a:ln>
+          <a:noFill/>
+        </a:ln>
+        <a:effectLst/>
+      </c:spPr>
+    </c:plotArea>
+    <c:plotVisOnly val="1"/>
+    <c:dispBlanksAs val="span"/>
+  </c:chart>
+  <c:spPr>
+    <a:noFill/>
+    <a:ln>
+      <a:noFill/>
+    </a:ln>
+    <a:effectLst/>
+  </c:spPr>
+  <c:externalData r:id="rId1">
+    <c:autoUpdate val="0"/>
+  </c:externalData>
+</c:chartSpace>
+</file>
+
+<file path=ppt/charts/chart7.xml><?xml version="1.0" encoding="utf-8"?>
 <c:chartSpace xmlns:c="http://schemas.openxmlformats.org/drawingml/2006/chart" xmlns:a="http://schemas.openxmlformats.org/drawingml/2006/main" xmlns:r="http://schemas.openxmlformats.org/officeDocument/2006/relationships">
   <c:date1904 val="0"/>
   <c:roundedCorners val="1"/>
@@ -2536,7 +3276,7 @@
           <a:p>
             <a:r>
               <a:rPr lang="en-US" dirty="0"/>
-              <a:t>Founding-client price. Prices exclude VAT.</a:t>
+              <a:t/>
             </a:r>
             <a:endParaRPr lang="en-US" dirty="0"/>
           </a:p>
@@ -2624,7 +3364,7 @@
           <a:p>
             <a:r>
               <a:rPr lang="en-US" dirty="0"/>
-              <a:t/>
+              <a:t>Founding-client price. Prices exclude VAT.</a:t>
             </a:r>
             <a:endParaRPr lang="en-US" dirty="0"/>
           </a:p>
@@ -2800,7 +3540,7 @@
           <a:p>
             <a:r>
               <a:rPr lang="en-US" dirty="0"/>
-              <a:t>Ask David which of the three he wants to lead with.</a:t>
+              <a:t/>
             </a:r>
             <a:endParaRPr lang="en-US" dirty="0"/>
           </a:p>
@@ -2888,7 +3628,7 @@
           <a:p>
             <a:r>
               <a:rPr lang="en-US" dirty="0"/>
-              <a:t>Being honest about our gaps gets better advice.</a:t>
+              <a:t/>
             </a:r>
             <a:endParaRPr lang="en-US" dirty="0"/>
           </a:p>
@@ -2976,7 +3716,7 @@
           <a:p>
             <a:r>
               <a:rPr lang="en-US" dirty="0"/>
-              <a:t>Terms deliberately left open to agree in the meeting. Decide our walk-away numbers beforehand.</a:t>
+              <a:t>Ask David which of the three he wants to lead with.</a:t>
             </a:r>
             <a:endParaRPr lang="en-US" dirty="0"/>
           </a:p>
@@ -3064,7 +3804,7 @@
           <a:p>
             <a:r>
               <a:rPr lang="en-US" dirty="0"/>
-              <a:t>Close by asking: which market do you know best, and who comes to mind first?</a:t>
+              <a:t>Being honest about our gaps gets better advice.</a:t>
             </a:r>
             <a:endParaRPr lang="en-US" dirty="0"/>
           </a:p>
@@ -3152,7 +3892,7 @@
           <a:p>
             <a:r>
               <a:rPr lang="en-US" dirty="0"/>
-              <a:t/>
+              <a:t>Terms deliberately left open to agree in the meeting. Decide our walk-away numbers beforehand.</a:t>
             </a:r>
             <a:endParaRPr lang="en-US" dirty="0"/>
           </a:p>
@@ -3176,6 +3916,182 @@
             <a:fld id="{F7021451-1387-4CA6-816F-3879F97B5CBC}" type="slidenum">
               <a:rPr lang="en-US"/>
               <a:t>27</a:t>
+            </a:fld>
+            <a:endParaRPr lang="en-US"/>
+          </a:p>
+        </p:txBody>
+      </p:sp>
+    </p:spTree>
+    <p:extLst>
+      <p:ext uri="{BB962C8B-B14F-4D97-AF65-F5344CB8AC3E}">
+        <p14:creationId xmlns:p14="http://schemas.microsoft.com/office/powerpoint/2010/main" val="1024086991"/>
+      </p:ext>
+    </p:extLst>
+  </p:cSld>
+  <p:clrMapOvr>
+    <a:masterClrMapping/>
+  </p:clrMapOvr>
+</p:notes>
+</file>
+
+<file path=ppt/notesSlides/notesSlide28.xml><?xml version="1.0" encoding="utf-8"?>
+<p:notes xmlns:a="http://schemas.openxmlformats.org/drawingml/2006/main" xmlns:r="http://schemas.openxmlformats.org/officeDocument/2006/relationships" xmlns:p="http://schemas.openxmlformats.org/presentationml/2006/main">
+  <p:cSld>
+    <p:spTree>
+      <p:nvGrpSpPr>
+        <p:cNvPr id="1" name=""/>
+        <p:cNvGrpSpPr/>
+        <p:nvPr/>
+      </p:nvGrpSpPr>
+      <p:grpSpPr>
+        <a:xfrm>
+          <a:off x="0" y="0"/>
+          <a:ext cx="0" cy="0"/>
+          <a:chOff x="0" y="0"/>
+          <a:chExt cx="0" cy="0"/>
+        </a:xfrm>
+      </p:grpSpPr>
+      <p:sp>
+        <p:nvSpPr>
+          <p:cNvPr id="2" name="Slide Image Placeholder 1"/>
+          <p:cNvSpPr>
+            <a:spLocks noGrp="1" noRot="1" noChangeAspect="1"/>
+          </p:cNvSpPr>
+          <p:nvPr>
+            <p:ph type="sldImg"/>
+          </p:nvPr>
+        </p:nvSpPr>
+        <p:spPr/>
+      </p:sp>
+      <p:sp>
+        <p:nvSpPr>
+          <p:cNvPr id="3" name="Notes Placeholder 2"/>
+          <p:cNvSpPr>
+            <a:spLocks noGrp="1"/>
+          </p:cNvSpPr>
+          <p:nvPr>
+            <p:ph type="body" idx="1"/>
+          </p:nvPr>
+        </p:nvSpPr>
+        <p:spPr/>
+        <p:txBody>
+          <a:bodyPr/>
+          <a:lstStyle/>
+          <a:p>
+            <a:r>
+              <a:rPr lang="en-US" dirty="0"/>
+              <a:t>Close by asking: which market do you know best, and who comes to mind first?</a:t>
+            </a:r>
+            <a:endParaRPr lang="en-US" dirty="0"/>
+          </a:p>
+        </p:txBody>
+      </p:sp>
+      <p:sp>
+        <p:nvSpPr>
+          <p:cNvPr id="4" name="Slide Number Placeholder 3"/>
+          <p:cNvSpPr>
+            <a:spLocks noGrp="1"/>
+          </p:cNvSpPr>
+          <p:nvPr>
+            <p:ph type="sldNum" sz="quarter" idx="10"/>
+          </p:nvPr>
+        </p:nvSpPr>
+        <p:spPr/>
+        <p:txBody>
+          <a:bodyPr/>
+          <a:lstStyle/>
+          <a:p>
+            <a:fld id="{F7021451-1387-4CA6-816F-3879F97B5CBC}" type="slidenum">
+              <a:rPr lang="en-US"/>
+              <a:t>28</a:t>
+            </a:fld>
+            <a:endParaRPr lang="en-US"/>
+          </a:p>
+        </p:txBody>
+      </p:sp>
+    </p:spTree>
+    <p:extLst>
+      <p:ext uri="{BB962C8B-B14F-4D97-AF65-F5344CB8AC3E}">
+        <p14:creationId xmlns:p14="http://schemas.microsoft.com/office/powerpoint/2010/main" val="1024086991"/>
+      </p:ext>
+    </p:extLst>
+  </p:cSld>
+  <p:clrMapOvr>
+    <a:masterClrMapping/>
+  </p:clrMapOvr>
+</p:notes>
+</file>
+
+<file path=ppt/notesSlides/notesSlide29.xml><?xml version="1.0" encoding="utf-8"?>
+<p:notes xmlns:a="http://schemas.openxmlformats.org/drawingml/2006/main" xmlns:r="http://schemas.openxmlformats.org/officeDocument/2006/relationships" xmlns:p="http://schemas.openxmlformats.org/presentationml/2006/main">
+  <p:cSld>
+    <p:spTree>
+      <p:nvGrpSpPr>
+        <p:cNvPr id="1" name=""/>
+        <p:cNvGrpSpPr/>
+        <p:nvPr/>
+      </p:nvGrpSpPr>
+      <p:grpSpPr>
+        <a:xfrm>
+          <a:off x="0" y="0"/>
+          <a:ext cx="0" cy="0"/>
+          <a:chOff x="0" y="0"/>
+          <a:chExt cx="0" cy="0"/>
+        </a:xfrm>
+      </p:grpSpPr>
+      <p:sp>
+        <p:nvSpPr>
+          <p:cNvPr id="2" name="Slide Image Placeholder 1"/>
+          <p:cNvSpPr>
+            <a:spLocks noGrp="1" noRot="1" noChangeAspect="1"/>
+          </p:cNvSpPr>
+          <p:nvPr>
+            <p:ph type="sldImg"/>
+          </p:nvPr>
+        </p:nvSpPr>
+        <p:spPr/>
+      </p:sp>
+      <p:sp>
+        <p:nvSpPr>
+          <p:cNvPr id="3" name="Notes Placeholder 2"/>
+          <p:cNvSpPr>
+            <a:spLocks noGrp="1"/>
+          </p:cNvSpPr>
+          <p:nvPr>
+            <p:ph type="body" idx="1"/>
+          </p:nvPr>
+        </p:nvSpPr>
+        <p:spPr/>
+        <p:txBody>
+          <a:bodyPr/>
+          <a:lstStyle/>
+          <a:p>
+            <a:r>
+              <a:rPr lang="en-US" dirty="0"/>
+              <a:t/>
+            </a:r>
+            <a:endParaRPr lang="en-US" dirty="0"/>
+          </a:p>
+        </p:txBody>
+      </p:sp>
+      <p:sp>
+        <p:nvSpPr>
+          <p:cNvPr id="4" name="Slide Number Placeholder 3"/>
+          <p:cNvSpPr>
+            <a:spLocks noGrp="1"/>
+          </p:cNvSpPr>
+          <p:nvPr>
+            <p:ph type="sldNum" sz="quarter" idx="10"/>
+          </p:nvPr>
+        </p:nvSpPr>
+        <p:spPr/>
+        <p:txBody>
+          <a:bodyPr/>
+          <a:lstStyle/>
+          <a:p>
+            <a:fld id="{F7021451-1387-4CA6-816F-3879F97B5CBC}" type="slidenum">
+              <a:rPr lang="en-US"/>
+              <a:t>29</a:t>
             </a:fld>
             <a:endParaRPr lang="en-US"/>
           </a:p>
@@ -4440,7 +5356,7 @@
       </p:grpSpPr>
       <p:sp>
         <p:nvSpPr>
-          <p:cNvPr id="2" name="text-65"/>
+          <p:cNvPr id="2" name="text-66"/>
           <p:cNvSpPr txBox="1"/>
           <p:nvPr/>
         </p:nvSpPr>
@@ -4479,7 +5395,7 @@
       </p:sp>
       <p:sp>
         <p:nvSpPr>
-          <p:cNvPr id="3" name="text-66"/>
+          <p:cNvPr id="3" name="text-67"/>
           <p:cNvSpPr txBox="1"/>
           <p:nvPr/>
         </p:nvSpPr>
@@ -4518,7 +5434,7 @@
       </p:sp>
       <p:sp>
         <p:nvSpPr>
-          <p:cNvPr id="4" name="text-67"/>
+          <p:cNvPr id="4" name="text-68"/>
           <p:cNvSpPr txBox="1"/>
           <p:nvPr/>
         </p:nvSpPr>
@@ -4557,7 +5473,7 @@
       </p:sp>
       <p:sp>
         <p:nvSpPr>
-          <p:cNvPr id="5" name="text-68"/>
+          <p:cNvPr id="5" name="text-69"/>
           <p:cNvSpPr txBox="1"/>
           <p:nvPr/>
         </p:nvSpPr>
@@ -4619,7 +5535,7 @@
       </p:sp>
       <p:sp>
         <p:nvSpPr>
-          <p:cNvPr id="6" name="arrow-69"/>
+          <p:cNvPr id="6" name="arrow-70"/>
           <p:cNvSpPr/>
           <p:nvPr/>
         </p:nvSpPr>
@@ -4668,7 +5584,7 @@
       </p:grpSpPr>
       <p:sp>
         <p:nvSpPr>
-          <p:cNvPr id="3" name="text-70"/>
+          <p:cNvPr id="3" name="text-71"/>
           <p:cNvSpPr txBox="1"/>
           <p:nvPr/>
         </p:nvSpPr>
@@ -4707,7 +5623,7 @@
       </p:sp>
       <p:sp>
         <p:nvSpPr>
-          <p:cNvPr id="4" name="text-71"/>
+          <p:cNvPr id="4" name="text-72"/>
           <p:cNvSpPr txBox="1"/>
           <p:nvPr/>
         </p:nvSpPr>
@@ -4746,7 +5662,7 @@
       </p:sp>
       <p:sp>
         <p:nvSpPr>
-          <p:cNvPr id="5" name="text-72"/>
+          <p:cNvPr id="5" name="text-73"/>
           <p:cNvSpPr txBox="1"/>
           <p:nvPr/>
         </p:nvSpPr>
@@ -4788,7 +5704,7 @@
       </p:sp>
       <p:sp>
         <p:nvSpPr>
-          <p:cNvPr id="6" name="rule-73"/>
+          <p:cNvPr id="6" name="rule-74"/>
           <p:cNvSpPr/>
           <p:nvPr/>
         </p:nvSpPr>
@@ -4811,7 +5727,7 @@
       </p:sp>
       <p:sp>
         <p:nvSpPr>
-          <p:cNvPr id="7" name="text-74"/>
+          <p:cNvPr id="7" name="text-75"/>
           <p:cNvSpPr txBox="1"/>
           <p:nvPr/>
         </p:nvSpPr>
@@ -4850,7 +5766,7 @@
       </p:sp>
       <p:sp>
         <p:nvSpPr>
-          <p:cNvPr id="8" name="text-75"/>
+          <p:cNvPr id="8" name="text-76"/>
           <p:cNvSpPr txBox="1"/>
           <p:nvPr/>
         </p:nvSpPr>
@@ -4889,7 +5805,7 @@
       </p:sp>
       <p:sp>
         <p:nvSpPr>
-          <p:cNvPr id="9" name="text-76"/>
+          <p:cNvPr id="9" name="text-77"/>
           <p:cNvSpPr txBox="1"/>
           <p:nvPr/>
         </p:nvSpPr>
@@ -4928,7 +5844,7 @@
       </p:sp>
       <p:sp>
         <p:nvSpPr>
-          <p:cNvPr id="10" name="rule-77"/>
+          <p:cNvPr id="10" name="rule-78"/>
           <p:cNvSpPr/>
           <p:nvPr/>
         </p:nvSpPr>
@@ -4951,7 +5867,7 @@
       </p:sp>
       <p:sp>
         <p:nvSpPr>
-          <p:cNvPr id="11" name="text-78"/>
+          <p:cNvPr id="11" name="text-79"/>
           <p:cNvSpPr txBox="1"/>
           <p:nvPr/>
         </p:nvSpPr>
@@ -4990,7 +5906,7 @@
       </p:sp>
       <p:sp>
         <p:nvSpPr>
-          <p:cNvPr id="12" name="text-79"/>
+          <p:cNvPr id="12" name="text-80"/>
           <p:cNvSpPr txBox="1"/>
           <p:nvPr/>
         </p:nvSpPr>
@@ -5029,7 +5945,7 @@
       </p:sp>
       <p:sp>
         <p:nvSpPr>
-          <p:cNvPr id="13" name="text-80"/>
+          <p:cNvPr id="13" name="text-81"/>
           <p:cNvSpPr txBox="1"/>
           <p:nvPr/>
         </p:nvSpPr>
@@ -5068,7 +5984,7 @@
       </p:sp>
       <p:sp>
         <p:nvSpPr>
-          <p:cNvPr id="14" name="rule-81"/>
+          <p:cNvPr id="14" name="rule-82"/>
           <p:cNvSpPr/>
           <p:nvPr/>
         </p:nvSpPr>
@@ -5091,7 +6007,7 @@
       </p:sp>
       <p:sp>
         <p:nvSpPr>
-          <p:cNvPr id="15" name="text-82"/>
+          <p:cNvPr id="15" name="text-83"/>
           <p:cNvSpPr txBox="1"/>
           <p:nvPr/>
         </p:nvSpPr>
@@ -5130,7 +6046,7 @@
       </p:sp>
       <p:sp>
         <p:nvSpPr>
-          <p:cNvPr id="16" name="text-83"/>
+          <p:cNvPr id="16" name="text-84"/>
           <p:cNvSpPr txBox="1"/>
           <p:nvPr/>
         </p:nvSpPr>
@@ -5169,7 +6085,7 @@
       </p:sp>
       <p:sp>
         <p:nvSpPr>
-          <p:cNvPr id="17" name="text-84"/>
+          <p:cNvPr id="17" name="text-85"/>
           <p:cNvSpPr txBox="1"/>
           <p:nvPr/>
         </p:nvSpPr>
@@ -5208,7 +6124,7 @@
       </p:sp>
       <p:sp>
         <p:nvSpPr>
-          <p:cNvPr id="18" name="text-85"/>
+          <p:cNvPr id="18" name="text-86"/>
           <p:cNvSpPr txBox="1"/>
           <p:nvPr/>
         </p:nvSpPr>
@@ -5272,7 +6188,7 @@
       </p:grpSpPr>
       <p:sp>
         <p:nvSpPr>
-          <p:cNvPr id="2" name="text-86"/>
+          <p:cNvPr id="2" name="text-87"/>
           <p:cNvSpPr txBox="1"/>
           <p:nvPr/>
         </p:nvSpPr>
@@ -5311,7 +6227,7 @@
       </p:sp>
       <p:sp>
         <p:nvSpPr>
-          <p:cNvPr id="3" name="text-87"/>
+          <p:cNvPr id="3" name="text-88"/>
           <p:cNvSpPr txBox="1"/>
           <p:nvPr/>
         </p:nvSpPr>
@@ -5350,7 +6266,7 @@
       </p:sp>
       <p:sp>
         <p:nvSpPr>
-          <p:cNvPr id="4" name="text-88"/>
+          <p:cNvPr id="4" name="text-89"/>
           <p:cNvSpPr txBox="1"/>
           <p:nvPr/>
         </p:nvSpPr>
@@ -5392,7 +6308,7 @@
       </p:sp>
       <p:sp>
         <p:nvSpPr>
-          <p:cNvPr id="5" name="rule-89"/>
+          <p:cNvPr id="5" name="rule-90"/>
           <p:cNvSpPr/>
           <p:nvPr/>
         </p:nvSpPr>
@@ -5415,7 +6331,7 @@
       </p:sp>
       <p:sp>
         <p:nvSpPr>
-          <p:cNvPr id="6" name="text-90"/>
+          <p:cNvPr id="6" name="text-91"/>
           <p:cNvSpPr txBox="1"/>
           <p:nvPr/>
         </p:nvSpPr>
@@ -5454,7 +6370,7 @@
       </p:sp>
       <p:sp>
         <p:nvSpPr>
-          <p:cNvPr id="7" name="text-91"/>
+          <p:cNvPr id="7" name="text-92"/>
           <p:cNvSpPr txBox="1"/>
           <p:nvPr/>
         </p:nvSpPr>
@@ -5493,7 +6409,7 @@
       </p:sp>
       <p:sp>
         <p:nvSpPr>
-          <p:cNvPr id="8" name="text-92"/>
+          <p:cNvPr id="8" name="text-93"/>
           <p:cNvSpPr txBox="1"/>
           <p:nvPr/>
         </p:nvSpPr>
@@ -5532,7 +6448,7 @@
       </p:sp>
       <p:sp>
         <p:nvSpPr>
-          <p:cNvPr id="9" name="rule-93"/>
+          <p:cNvPr id="9" name="rule-94"/>
           <p:cNvSpPr/>
           <p:nvPr/>
         </p:nvSpPr>
@@ -5555,7 +6471,7 @@
       </p:sp>
       <p:sp>
         <p:nvSpPr>
-          <p:cNvPr id="10" name="text-94"/>
+          <p:cNvPr id="10" name="text-95"/>
           <p:cNvSpPr txBox="1"/>
           <p:nvPr/>
         </p:nvSpPr>
@@ -5594,7 +6510,7 @@
       </p:sp>
       <p:sp>
         <p:nvSpPr>
-          <p:cNvPr id="11" name="text-95"/>
+          <p:cNvPr id="11" name="text-96"/>
           <p:cNvSpPr txBox="1"/>
           <p:nvPr/>
         </p:nvSpPr>
@@ -5633,7 +6549,7 @@
       </p:sp>
       <p:sp>
         <p:nvSpPr>
-          <p:cNvPr id="12" name="text-96"/>
+          <p:cNvPr id="12" name="text-97"/>
           <p:cNvSpPr txBox="1"/>
           <p:nvPr/>
         </p:nvSpPr>
@@ -5672,7 +6588,7 @@
       </p:sp>
       <p:sp>
         <p:nvSpPr>
-          <p:cNvPr id="13" name="rule-97"/>
+          <p:cNvPr id="13" name="rule-98"/>
           <p:cNvSpPr/>
           <p:nvPr/>
         </p:nvSpPr>
@@ -5695,7 +6611,7 @@
       </p:sp>
       <p:sp>
         <p:nvSpPr>
-          <p:cNvPr id="14" name="text-98"/>
+          <p:cNvPr id="14" name="text-99"/>
           <p:cNvSpPr txBox="1"/>
           <p:nvPr/>
         </p:nvSpPr>
@@ -5734,7 +6650,7 @@
       </p:sp>
       <p:sp>
         <p:nvSpPr>
-          <p:cNvPr id="15" name="text-99"/>
+          <p:cNvPr id="15" name="text-100"/>
           <p:cNvSpPr txBox="1"/>
           <p:nvPr/>
         </p:nvSpPr>
@@ -5773,7 +6689,7 @@
       </p:sp>
       <p:sp>
         <p:nvSpPr>
-          <p:cNvPr id="16" name="text-100"/>
+          <p:cNvPr id="16" name="text-101"/>
           <p:cNvSpPr txBox="1"/>
           <p:nvPr/>
         </p:nvSpPr>
@@ -5812,7 +6728,7 @@
       </p:sp>
       <p:sp>
         <p:nvSpPr>
-          <p:cNvPr id="17" name="rule-101"/>
+          <p:cNvPr id="17" name="rule-102"/>
           <p:cNvSpPr/>
           <p:nvPr/>
         </p:nvSpPr>
@@ -5835,7 +6751,7 @@
       </p:sp>
       <p:sp>
         <p:nvSpPr>
-          <p:cNvPr id="18" name="text-102"/>
+          <p:cNvPr id="18" name="text-103"/>
           <p:cNvSpPr txBox="1"/>
           <p:nvPr/>
         </p:nvSpPr>
@@ -5874,7 +6790,7 @@
       </p:sp>
       <p:sp>
         <p:nvSpPr>
-          <p:cNvPr id="19" name="text-103"/>
+          <p:cNvPr id="19" name="text-104"/>
           <p:cNvSpPr txBox="1"/>
           <p:nvPr/>
         </p:nvSpPr>
@@ -5913,7 +6829,7 @@
       </p:sp>
       <p:sp>
         <p:nvSpPr>
-          <p:cNvPr id="20" name="text-104"/>
+          <p:cNvPr id="20" name="text-105"/>
           <p:cNvSpPr txBox="1"/>
           <p:nvPr/>
         </p:nvSpPr>
@@ -5952,7 +6868,7 @@
       </p:sp>
       <p:sp>
         <p:nvSpPr>
-          <p:cNvPr id="21" name="rule-105"/>
+          <p:cNvPr id="21" name="rule-106"/>
           <p:cNvSpPr/>
           <p:nvPr/>
         </p:nvSpPr>
@@ -5975,7 +6891,7 @@
       </p:sp>
       <p:sp>
         <p:nvSpPr>
-          <p:cNvPr id="22" name="text-106"/>
+          <p:cNvPr id="22" name="text-107"/>
           <p:cNvSpPr txBox="1"/>
           <p:nvPr/>
         </p:nvSpPr>
@@ -6014,7 +6930,7 @@
       </p:sp>
       <p:sp>
         <p:nvSpPr>
-          <p:cNvPr id="23" name="text-107"/>
+          <p:cNvPr id="23" name="text-108"/>
           <p:cNvSpPr txBox="1"/>
           <p:nvPr/>
         </p:nvSpPr>
@@ -6053,7 +6969,7 @@
       </p:sp>
       <p:sp>
         <p:nvSpPr>
-          <p:cNvPr id="24" name="text-108"/>
+          <p:cNvPr id="24" name="text-109"/>
           <p:cNvSpPr txBox="1"/>
           <p:nvPr/>
         </p:nvSpPr>
@@ -6092,7 +7008,7 @@
       </p:sp>
       <p:sp>
         <p:nvSpPr>
-          <p:cNvPr id="25" name="rule-109"/>
+          <p:cNvPr id="25" name="rule-110"/>
           <p:cNvSpPr/>
           <p:nvPr/>
         </p:nvSpPr>
@@ -6115,7 +7031,7 @@
       </p:sp>
       <p:sp>
         <p:nvSpPr>
-          <p:cNvPr id="26" name="text-110"/>
+          <p:cNvPr id="26" name="text-111"/>
           <p:cNvSpPr txBox="1"/>
           <p:nvPr/>
         </p:nvSpPr>
@@ -6154,7 +7070,7 @@
       </p:sp>
       <p:sp>
         <p:nvSpPr>
-          <p:cNvPr id="27" name="text-111"/>
+          <p:cNvPr id="27" name="text-112"/>
           <p:cNvSpPr txBox="1"/>
           <p:nvPr/>
         </p:nvSpPr>
@@ -6193,7 +7109,7 @@
       </p:sp>
       <p:sp>
         <p:nvSpPr>
-          <p:cNvPr id="28" name="text-112"/>
+          <p:cNvPr id="28" name="text-113"/>
           <p:cNvSpPr txBox="1"/>
           <p:nvPr/>
         </p:nvSpPr>
@@ -6257,7 +7173,7 @@
       </p:grpSpPr>
       <p:sp>
         <p:nvSpPr>
-          <p:cNvPr id="3" name="text-113"/>
+          <p:cNvPr id="3" name="text-114"/>
           <p:cNvSpPr txBox="1"/>
           <p:nvPr/>
         </p:nvSpPr>
@@ -6296,7 +7212,7 @@
       </p:sp>
       <p:sp>
         <p:nvSpPr>
-          <p:cNvPr id="4" name="text-114"/>
+          <p:cNvPr id="4" name="text-115"/>
           <p:cNvSpPr txBox="1"/>
           <p:nvPr/>
         </p:nvSpPr>
@@ -6335,7 +7251,7 @@
       </p:sp>
       <p:sp>
         <p:nvSpPr>
-          <p:cNvPr id="5" name="text-115"/>
+          <p:cNvPr id="5" name="text-116"/>
           <p:cNvSpPr txBox="1"/>
           <p:nvPr/>
         </p:nvSpPr>
@@ -6377,7 +7293,7 @@
       </p:sp>
       <p:sp>
         <p:nvSpPr>
-          <p:cNvPr id="6" name="spoke-116"/>
+          <p:cNvPr id="6" name="spoke-117"/>
           <p:cNvSpPr/>
           <p:nvPr/>
         </p:nvSpPr>
@@ -6400,7 +7316,7 @@
       </p:sp>
       <p:sp>
         <p:nvSpPr>
-          <p:cNvPr id="7" name="spoke-117"/>
+          <p:cNvPr id="7" name="spoke-118"/>
           <p:cNvSpPr/>
           <p:nvPr/>
         </p:nvSpPr>
@@ -6423,7 +7339,7 @@
       </p:sp>
       <p:sp>
         <p:nvSpPr>
-          <p:cNvPr id="8" name="spoke-118"/>
+          <p:cNvPr id="8" name="spoke-119"/>
           <p:cNvSpPr/>
           <p:nvPr/>
         </p:nvSpPr>
@@ -6446,7 +7362,7 @@
       </p:sp>
       <p:sp>
         <p:nvSpPr>
-          <p:cNvPr id="9" name="spoke-119"/>
+          <p:cNvPr id="9" name="spoke-120"/>
           <p:cNvSpPr/>
           <p:nvPr/>
         </p:nvSpPr>
@@ -6469,7 +7385,7 @@
       </p:sp>
       <p:sp>
         <p:nvSpPr>
-          <p:cNvPr id="10" name="spoke-120"/>
+          <p:cNvPr id="10" name="spoke-121"/>
           <p:cNvSpPr/>
           <p:nvPr/>
         </p:nvSpPr>
@@ -6492,7 +7408,7 @@
       </p:sp>
       <p:sp>
         <p:nvSpPr>
-          <p:cNvPr id="11" name="spoke-121"/>
+          <p:cNvPr id="11" name="spoke-122"/>
           <p:cNvSpPr/>
           <p:nvPr/>
         </p:nvSpPr>
@@ -6515,7 +7431,7 @@
       </p:sp>
       <p:sp>
         <p:nvSpPr>
-          <p:cNvPr id="12" name="sat-122"/>
+          <p:cNvPr id="12" name="sat-123"/>
           <p:cNvSpPr/>
           <p:nvPr/>
         </p:nvSpPr>
@@ -6540,7 +7456,7 @@
       </p:sp>
       <p:sp>
         <p:nvSpPr>
-          <p:cNvPr id="13" name="text-123"/>
+          <p:cNvPr id="13" name="text-124"/>
           <p:cNvSpPr txBox="1"/>
           <p:nvPr/>
         </p:nvSpPr>
@@ -6579,7 +7495,7 @@
       </p:sp>
       <p:sp>
         <p:nvSpPr>
-          <p:cNvPr id="14" name="text-124"/>
+          <p:cNvPr id="14" name="text-125"/>
           <p:cNvSpPr txBox="1"/>
           <p:nvPr/>
         </p:nvSpPr>
@@ -6618,7 +7534,7 @@
       </p:sp>
       <p:sp>
         <p:nvSpPr>
-          <p:cNvPr id="15" name="sat-125"/>
+          <p:cNvPr id="15" name="sat-126"/>
           <p:cNvSpPr/>
           <p:nvPr/>
         </p:nvSpPr>
@@ -6643,7 +7559,7 @@
       </p:sp>
       <p:sp>
         <p:nvSpPr>
-          <p:cNvPr id="16" name="text-126"/>
+          <p:cNvPr id="16" name="text-127"/>
           <p:cNvSpPr txBox="1"/>
           <p:nvPr/>
         </p:nvSpPr>
@@ -6682,7 +7598,7 @@
       </p:sp>
       <p:sp>
         <p:nvSpPr>
-          <p:cNvPr id="17" name="text-127"/>
+          <p:cNvPr id="17" name="text-128"/>
           <p:cNvSpPr txBox="1"/>
           <p:nvPr/>
         </p:nvSpPr>
@@ -6721,7 +7637,7 @@
       </p:sp>
       <p:sp>
         <p:nvSpPr>
-          <p:cNvPr id="18" name="sat-128"/>
+          <p:cNvPr id="18" name="sat-129"/>
           <p:cNvSpPr/>
           <p:nvPr/>
         </p:nvSpPr>
@@ -6746,7 +7662,7 @@
       </p:sp>
       <p:sp>
         <p:nvSpPr>
-          <p:cNvPr id="19" name="text-129"/>
+          <p:cNvPr id="19" name="text-130"/>
           <p:cNvSpPr txBox="1"/>
           <p:nvPr/>
         </p:nvSpPr>
@@ -6785,7 +7701,7 @@
       </p:sp>
       <p:sp>
         <p:nvSpPr>
-          <p:cNvPr id="20" name="text-130"/>
+          <p:cNvPr id="20" name="text-131"/>
           <p:cNvSpPr txBox="1"/>
           <p:nvPr/>
         </p:nvSpPr>
@@ -6824,7 +7740,7 @@
       </p:sp>
       <p:sp>
         <p:nvSpPr>
-          <p:cNvPr id="21" name="sat-131"/>
+          <p:cNvPr id="21" name="sat-132"/>
           <p:cNvSpPr/>
           <p:nvPr/>
         </p:nvSpPr>
@@ -6849,7 +7765,7 @@
       </p:sp>
       <p:sp>
         <p:nvSpPr>
-          <p:cNvPr id="22" name="text-132"/>
+          <p:cNvPr id="22" name="text-133"/>
           <p:cNvSpPr txBox="1"/>
           <p:nvPr/>
         </p:nvSpPr>
@@ -6888,7 +7804,7 @@
       </p:sp>
       <p:sp>
         <p:nvSpPr>
-          <p:cNvPr id="23" name="text-133"/>
+          <p:cNvPr id="23" name="text-134"/>
           <p:cNvSpPr txBox="1"/>
           <p:nvPr/>
         </p:nvSpPr>
@@ -6927,7 +7843,7 @@
       </p:sp>
       <p:sp>
         <p:nvSpPr>
-          <p:cNvPr id="24" name="sat-134"/>
+          <p:cNvPr id="24" name="sat-135"/>
           <p:cNvSpPr/>
           <p:nvPr/>
         </p:nvSpPr>
@@ -6952,7 +7868,7 @@
       </p:sp>
       <p:sp>
         <p:nvSpPr>
-          <p:cNvPr id="25" name="text-135"/>
+          <p:cNvPr id="25" name="text-136"/>
           <p:cNvSpPr txBox="1"/>
           <p:nvPr/>
         </p:nvSpPr>
@@ -6991,7 +7907,7 @@
       </p:sp>
       <p:sp>
         <p:nvSpPr>
-          <p:cNvPr id="26" name="text-136"/>
+          <p:cNvPr id="26" name="text-137"/>
           <p:cNvSpPr txBox="1"/>
           <p:nvPr/>
         </p:nvSpPr>
@@ -7030,7 +7946,7 @@
       </p:sp>
       <p:sp>
         <p:nvSpPr>
-          <p:cNvPr id="27" name="sat-137"/>
+          <p:cNvPr id="27" name="sat-138"/>
           <p:cNvSpPr/>
           <p:nvPr/>
         </p:nvSpPr>
@@ -7055,7 +7971,7 @@
       </p:sp>
       <p:sp>
         <p:nvSpPr>
-          <p:cNvPr id="28" name="text-138"/>
+          <p:cNvPr id="28" name="text-139"/>
           <p:cNvSpPr txBox="1"/>
           <p:nvPr/>
         </p:nvSpPr>
@@ -7094,7 +8010,7 @@
       </p:sp>
       <p:sp>
         <p:nvSpPr>
-          <p:cNvPr id="29" name="text-139"/>
+          <p:cNvPr id="29" name="text-140"/>
           <p:cNvSpPr txBox="1"/>
           <p:nvPr/>
         </p:nvSpPr>
@@ -7133,7 +8049,7 @@
       </p:sp>
       <p:sp>
         <p:nvSpPr>
-          <p:cNvPr id="30" name="hub-140"/>
+          <p:cNvPr id="30" name="hub-141"/>
           <p:cNvSpPr/>
           <p:nvPr/>
         </p:nvSpPr>
@@ -7158,7 +8074,7 @@
       </p:sp>
       <p:sp>
         <p:nvSpPr>
-          <p:cNvPr id="31" name="text-141"/>
+          <p:cNvPr id="31" name="text-142"/>
           <p:cNvSpPr txBox="1"/>
           <p:nvPr/>
         </p:nvSpPr>
@@ -7214,7 +8130,7 @@
       </p:sp>
       <p:sp>
         <p:nvSpPr>
-          <p:cNvPr id="32" name="text-142"/>
+          <p:cNvPr id="32" name="text-143"/>
           <p:cNvSpPr txBox="1"/>
           <p:nvPr/>
         </p:nvSpPr>
@@ -7253,7 +8169,7 @@
       </p:sp>
       <p:sp>
         <p:nvSpPr>
-          <p:cNvPr id="33" name="rule-143"/>
+          <p:cNvPr id="33" name="rule-144"/>
           <p:cNvSpPr/>
           <p:nvPr/>
         </p:nvSpPr>
@@ -7276,7 +8192,7 @@
       </p:sp>
       <p:sp>
         <p:nvSpPr>
-          <p:cNvPr id="34" name="text-144"/>
+          <p:cNvPr id="34" name="text-145"/>
           <p:cNvSpPr txBox="1"/>
           <p:nvPr/>
         </p:nvSpPr>
@@ -7315,7 +8231,7 @@
       </p:sp>
       <p:sp>
         <p:nvSpPr>
-          <p:cNvPr id="35" name="text-145"/>
+          <p:cNvPr id="35" name="text-146"/>
           <p:cNvSpPr txBox="1"/>
           <p:nvPr/>
         </p:nvSpPr>
@@ -7379,7 +8295,7 @@
       </p:grpSpPr>
       <p:sp>
         <p:nvSpPr>
-          <p:cNvPr id="3" name="text-146"/>
+          <p:cNvPr id="3" name="text-147"/>
           <p:cNvSpPr txBox="1"/>
           <p:nvPr/>
         </p:nvSpPr>
@@ -7418,7 +8334,7 @@
       </p:sp>
       <p:sp>
         <p:nvSpPr>
-          <p:cNvPr id="4" name="text-147"/>
+          <p:cNvPr id="4" name="text-148"/>
           <p:cNvSpPr txBox="1"/>
           <p:nvPr/>
         </p:nvSpPr>
@@ -7457,7 +8373,7 @@
       </p:sp>
       <p:sp>
         <p:nvSpPr>
-          <p:cNvPr id="5" name="text-148"/>
+          <p:cNvPr id="5" name="text-149"/>
           <p:cNvSpPr txBox="1"/>
           <p:nvPr/>
         </p:nvSpPr>
@@ -7499,7 +8415,7 @@
       </p:sp>
       <p:sp>
         <p:nvSpPr>
-          <p:cNvPr id="6" name="spoke-149"/>
+          <p:cNvPr id="6" name="spoke-150"/>
           <p:cNvSpPr/>
           <p:nvPr/>
         </p:nvSpPr>
@@ -7522,7 +8438,7 @@
       </p:sp>
       <p:sp>
         <p:nvSpPr>
-          <p:cNvPr id="7" name="spoke-150"/>
+          <p:cNvPr id="7" name="spoke-151"/>
           <p:cNvSpPr/>
           <p:nvPr/>
         </p:nvSpPr>
@@ -7545,7 +8461,7 @@
       </p:sp>
       <p:sp>
         <p:nvSpPr>
-          <p:cNvPr id="8" name="spoke-151"/>
+          <p:cNvPr id="8" name="spoke-152"/>
           <p:cNvSpPr/>
           <p:nvPr/>
         </p:nvSpPr>
@@ -7568,7 +8484,7 @@
       </p:sp>
       <p:sp>
         <p:nvSpPr>
-          <p:cNvPr id="9" name="spoke-152"/>
+          <p:cNvPr id="9" name="spoke-153"/>
           <p:cNvSpPr/>
           <p:nvPr/>
         </p:nvSpPr>
@@ -7591,7 +8507,7 @@
       </p:sp>
       <p:sp>
         <p:nvSpPr>
-          <p:cNvPr id="10" name="spoke-153"/>
+          <p:cNvPr id="10" name="spoke-154"/>
           <p:cNvSpPr/>
           <p:nvPr/>
         </p:nvSpPr>
@@ -7614,7 +8530,7 @@
       </p:sp>
       <p:sp>
         <p:nvSpPr>
-          <p:cNvPr id="11" name="spoke-154"/>
+          <p:cNvPr id="11" name="spoke-155"/>
           <p:cNvSpPr/>
           <p:nvPr/>
         </p:nvSpPr>
@@ -7637,7 +8553,7 @@
       </p:sp>
       <p:sp>
         <p:nvSpPr>
-          <p:cNvPr id="12" name="sat-155"/>
+          <p:cNvPr id="12" name="sat-156"/>
           <p:cNvSpPr/>
           <p:nvPr/>
         </p:nvSpPr>
@@ -7662,7 +8578,7 @@
       </p:sp>
       <p:sp>
         <p:nvSpPr>
-          <p:cNvPr id="13" name="text-156"/>
+          <p:cNvPr id="13" name="text-157"/>
           <p:cNvSpPr txBox="1"/>
           <p:nvPr/>
         </p:nvSpPr>
@@ -7701,7 +8617,7 @@
       </p:sp>
       <p:sp>
         <p:nvSpPr>
-          <p:cNvPr id="14" name="text-157"/>
+          <p:cNvPr id="14" name="text-158"/>
           <p:cNvSpPr txBox="1"/>
           <p:nvPr/>
         </p:nvSpPr>
@@ -7740,7 +8656,7 @@
       </p:sp>
       <p:sp>
         <p:nvSpPr>
-          <p:cNvPr id="15" name="sat-158"/>
+          <p:cNvPr id="15" name="sat-159"/>
           <p:cNvSpPr/>
           <p:nvPr/>
         </p:nvSpPr>
@@ -7765,7 +8681,7 @@
       </p:sp>
       <p:sp>
         <p:nvSpPr>
-          <p:cNvPr id="16" name="text-159"/>
+          <p:cNvPr id="16" name="text-160"/>
           <p:cNvSpPr txBox="1"/>
           <p:nvPr/>
         </p:nvSpPr>
@@ -7804,7 +8720,7 @@
       </p:sp>
       <p:sp>
         <p:nvSpPr>
-          <p:cNvPr id="17" name="text-160"/>
+          <p:cNvPr id="17" name="text-161"/>
           <p:cNvSpPr txBox="1"/>
           <p:nvPr/>
         </p:nvSpPr>
@@ -7843,7 +8759,7 @@
       </p:sp>
       <p:sp>
         <p:nvSpPr>
-          <p:cNvPr id="18" name="sat-161"/>
+          <p:cNvPr id="18" name="sat-162"/>
           <p:cNvSpPr/>
           <p:nvPr/>
         </p:nvSpPr>
@@ -7868,7 +8784,7 @@
       </p:sp>
       <p:sp>
         <p:nvSpPr>
-          <p:cNvPr id="19" name="text-162"/>
+          <p:cNvPr id="19" name="text-163"/>
           <p:cNvSpPr txBox="1"/>
           <p:nvPr/>
         </p:nvSpPr>
@@ -7907,7 +8823,7 @@
       </p:sp>
       <p:sp>
         <p:nvSpPr>
-          <p:cNvPr id="20" name="text-163"/>
+          <p:cNvPr id="20" name="text-164"/>
           <p:cNvSpPr txBox="1"/>
           <p:nvPr/>
         </p:nvSpPr>
@@ -7946,7 +8862,7 @@
       </p:sp>
       <p:sp>
         <p:nvSpPr>
-          <p:cNvPr id="21" name="sat-164"/>
+          <p:cNvPr id="21" name="sat-165"/>
           <p:cNvSpPr/>
           <p:nvPr/>
         </p:nvSpPr>
@@ -7971,7 +8887,7 @@
       </p:sp>
       <p:sp>
         <p:nvSpPr>
-          <p:cNvPr id="22" name="text-165"/>
+          <p:cNvPr id="22" name="text-166"/>
           <p:cNvSpPr txBox="1"/>
           <p:nvPr/>
         </p:nvSpPr>
@@ -8010,7 +8926,7 @@
       </p:sp>
       <p:sp>
         <p:nvSpPr>
-          <p:cNvPr id="23" name="text-166"/>
+          <p:cNvPr id="23" name="text-167"/>
           <p:cNvSpPr txBox="1"/>
           <p:nvPr/>
         </p:nvSpPr>
@@ -8049,7 +8965,7 @@
       </p:sp>
       <p:sp>
         <p:nvSpPr>
-          <p:cNvPr id="24" name="sat-167"/>
+          <p:cNvPr id="24" name="sat-168"/>
           <p:cNvSpPr/>
           <p:nvPr/>
         </p:nvSpPr>
@@ -8074,7 +8990,7 @@
       </p:sp>
       <p:sp>
         <p:nvSpPr>
-          <p:cNvPr id="25" name="text-168"/>
+          <p:cNvPr id="25" name="text-169"/>
           <p:cNvSpPr txBox="1"/>
           <p:nvPr/>
         </p:nvSpPr>
@@ -8113,7 +9029,7 @@
       </p:sp>
       <p:sp>
         <p:nvSpPr>
-          <p:cNvPr id="26" name="text-169"/>
+          <p:cNvPr id="26" name="text-170"/>
           <p:cNvSpPr txBox="1"/>
           <p:nvPr/>
         </p:nvSpPr>
@@ -8152,7 +9068,7 @@
       </p:sp>
       <p:sp>
         <p:nvSpPr>
-          <p:cNvPr id="27" name="sat-170"/>
+          <p:cNvPr id="27" name="sat-171"/>
           <p:cNvSpPr/>
           <p:nvPr/>
         </p:nvSpPr>
@@ -8177,7 +9093,7 @@
       </p:sp>
       <p:sp>
         <p:nvSpPr>
-          <p:cNvPr id="28" name="text-171"/>
+          <p:cNvPr id="28" name="text-172"/>
           <p:cNvSpPr txBox="1"/>
           <p:nvPr/>
         </p:nvSpPr>
@@ -8216,7 +9132,7 @@
       </p:sp>
       <p:sp>
         <p:nvSpPr>
-          <p:cNvPr id="29" name="text-172"/>
+          <p:cNvPr id="29" name="text-173"/>
           <p:cNvSpPr txBox="1"/>
           <p:nvPr/>
         </p:nvSpPr>
@@ -8255,7 +9171,7 @@
       </p:sp>
       <p:sp>
         <p:nvSpPr>
-          <p:cNvPr id="30" name="hub-173"/>
+          <p:cNvPr id="30" name="hub-174"/>
           <p:cNvSpPr/>
           <p:nvPr/>
         </p:nvSpPr>
@@ -8280,7 +9196,7 @@
       </p:sp>
       <p:sp>
         <p:nvSpPr>
-          <p:cNvPr id="31" name="text-174"/>
+          <p:cNvPr id="31" name="text-175"/>
           <p:cNvSpPr txBox="1"/>
           <p:nvPr/>
         </p:nvSpPr>
@@ -8336,7 +9252,7 @@
       </p:sp>
       <p:sp>
         <p:nvSpPr>
-          <p:cNvPr id="32" name="text-175"/>
+          <p:cNvPr id="32" name="text-176"/>
           <p:cNvSpPr txBox="1"/>
           <p:nvPr/>
         </p:nvSpPr>
@@ -8375,7 +9291,7 @@
       </p:sp>
       <p:sp>
         <p:nvSpPr>
-          <p:cNvPr id="33" name="rule-176"/>
+          <p:cNvPr id="33" name="rule-177"/>
           <p:cNvSpPr/>
           <p:nvPr/>
         </p:nvSpPr>
@@ -8398,7 +9314,7 @@
       </p:sp>
       <p:sp>
         <p:nvSpPr>
-          <p:cNvPr id="34" name="text-177"/>
+          <p:cNvPr id="34" name="text-178"/>
           <p:cNvSpPr txBox="1"/>
           <p:nvPr/>
         </p:nvSpPr>
@@ -8437,7 +9353,7 @@
       </p:sp>
       <p:sp>
         <p:nvSpPr>
-          <p:cNvPr id="35" name="text-178"/>
+          <p:cNvPr id="35" name="text-179"/>
           <p:cNvSpPr txBox="1"/>
           <p:nvPr/>
         </p:nvSpPr>
@@ -8501,7 +9417,7 @@
       </p:grpSpPr>
       <p:sp>
         <p:nvSpPr>
-          <p:cNvPr id="3" name="text-179"/>
+          <p:cNvPr id="3" name="text-180"/>
           <p:cNvSpPr txBox="1"/>
           <p:nvPr/>
         </p:nvSpPr>
@@ -8540,7 +9456,7 @@
       </p:sp>
       <p:sp>
         <p:nvSpPr>
-          <p:cNvPr id="4" name="text-180"/>
+          <p:cNvPr id="4" name="text-181"/>
           <p:cNvSpPr txBox="1"/>
           <p:nvPr/>
         </p:nvSpPr>
@@ -8579,7 +9495,7 @@
       </p:sp>
       <p:sp>
         <p:nvSpPr>
-          <p:cNvPr id="5" name="text-181"/>
+          <p:cNvPr id="5" name="text-182"/>
           <p:cNvSpPr txBox="1"/>
           <p:nvPr/>
         </p:nvSpPr>
@@ -8621,7 +9537,7 @@
       </p:sp>
       <p:sp>
         <p:nvSpPr>
-          <p:cNvPr id="6" name="rule-182"/>
+          <p:cNvPr id="6" name="rule-183"/>
           <p:cNvSpPr/>
           <p:nvPr/>
         </p:nvSpPr>
@@ -8644,7 +9560,7 @@
       </p:sp>
       <p:sp>
         <p:nvSpPr>
-          <p:cNvPr id="7" name="text-183"/>
+          <p:cNvPr id="7" name="text-184"/>
           <p:cNvSpPr txBox="1"/>
           <p:nvPr/>
         </p:nvSpPr>
@@ -8683,7 +9599,7 @@
       </p:sp>
       <p:sp>
         <p:nvSpPr>
-          <p:cNvPr id="8" name="text-184"/>
+          <p:cNvPr id="8" name="text-185"/>
           <p:cNvSpPr txBox="1"/>
           <p:nvPr/>
         </p:nvSpPr>
@@ -8722,7 +9638,7 @@
       </p:sp>
       <p:sp>
         <p:nvSpPr>
-          <p:cNvPr id="9" name="text-185"/>
+          <p:cNvPr id="9" name="text-186"/>
           <p:cNvSpPr txBox="1"/>
           <p:nvPr/>
         </p:nvSpPr>
@@ -8761,7 +9677,7 @@
       </p:sp>
       <p:sp>
         <p:nvSpPr>
-          <p:cNvPr id="10" name="rule-186"/>
+          <p:cNvPr id="10" name="rule-187"/>
           <p:cNvSpPr/>
           <p:nvPr/>
         </p:nvSpPr>
@@ -8784,7 +9700,7 @@
       </p:sp>
       <p:sp>
         <p:nvSpPr>
-          <p:cNvPr id="11" name="text-187"/>
+          <p:cNvPr id="11" name="text-188"/>
           <p:cNvSpPr txBox="1"/>
           <p:nvPr/>
         </p:nvSpPr>
@@ -8823,7 +9739,7 @@
       </p:sp>
       <p:sp>
         <p:nvSpPr>
-          <p:cNvPr id="12" name="text-188"/>
+          <p:cNvPr id="12" name="text-189"/>
           <p:cNvSpPr txBox="1"/>
           <p:nvPr/>
         </p:nvSpPr>
@@ -8862,7 +9778,7 @@
       </p:sp>
       <p:sp>
         <p:nvSpPr>
-          <p:cNvPr id="13" name="text-189"/>
+          <p:cNvPr id="13" name="text-190"/>
           <p:cNvSpPr txBox="1"/>
           <p:nvPr/>
         </p:nvSpPr>
@@ -8901,7 +9817,7 @@
       </p:sp>
       <p:sp>
         <p:nvSpPr>
-          <p:cNvPr id="14" name="rule-190"/>
+          <p:cNvPr id="14" name="rule-191"/>
           <p:cNvSpPr/>
           <p:nvPr/>
         </p:nvSpPr>
@@ -8924,7 +9840,7 @@
       </p:sp>
       <p:sp>
         <p:nvSpPr>
-          <p:cNvPr id="15" name="text-191"/>
+          <p:cNvPr id="15" name="text-192"/>
           <p:cNvSpPr txBox="1"/>
           <p:nvPr/>
         </p:nvSpPr>
@@ -8963,7 +9879,7 @@
       </p:sp>
       <p:sp>
         <p:nvSpPr>
-          <p:cNvPr id="16" name="text-192"/>
+          <p:cNvPr id="16" name="text-193"/>
           <p:cNvSpPr txBox="1"/>
           <p:nvPr/>
         </p:nvSpPr>
@@ -9002,7 +9918,7 @@
       </p:sp>
       <p:sp>
         <p:nvSpPr>
-          <p:cNvPr id="17" name="text-193"/>
+          <p:cNvPr id="17" name="text-194"/>
           <p:cNvSpPr txBox="1"/>
           <p:nvPr/>
         </p:nvSpPr>
@@ -9066,7 +9982,7 @@
       </p:grpSpPr>
       <p:sp>
         <p:nvSpPr>
-          <p:cNvPr id="3" name="text-194"/>
+          <p:cNvPr id="3" name="text-195"/>
           <p:cNvSpPr txBox="1"/>
           <p:nvPr/>
         </p:nvSpPr>
@@ -9105,7 +10021,7 @@
       </p:sp>
       <p:sp>
         <p:nvSpPr>
-          <p:cNvPr id="4" name="text-195"/>
+          <p:cNvPr id="4" name="text-196"/>
           <p:cNvSpPr txBox="1"/>
           <p:nvPr/>
         </p:nvSpPr>
@@ -9144,7 +10060,7 @@
       </p:sp>
       <p:sp>
         <p:nvSpPr>
-          <p:cNvPr id="5" name="text-196"/>
+          <p:cNvPr id="5" name="text-197"/>
           <p:cNvSpPr txBox="1"/>
           <p:nvPr/>
         </p:nvSpPr>
@@ -9186,7 +10102,7 @@
       </p:sp>
       <p:sp>
         <p:nvSpPr>
-          <p:cNvPr id="6" name="text-197"/>
+          <p:cNvPr id="6" name="text-198"/>
           <p:cNvSpPr txBox="1"/>
           <p:nvPr/>
         </p:nvSpPr>
@@ -9225,7 +10141,7 @@
       </p:sp>
       <p:sp>
         <p:nvSpPr>
-          <p:cNvPr id="7" name="text-198"/>
+          <p:cNvPr id="7" name="text-199"/>
           <p:cNvSpPr txBox="1"/>
           <p:nvPr/>
         </p:nvSpPr>
@@ -9264,7 +10180,7 @@
       </p:sp>
       <p:sp>
         <p:nvSpPr>
-          <p:cNvPr id="8" name="rule-199"/>
+          <p:cNvPr id="8" name="rule-200"/>
           <p:cNvSpPr/>
           <p:nvPr/>
         </p:nvSpPr>
@@ -9287,7 +10203,7 @@
       </p:sp>
       <p:sp>
         <p:nvSpPr>
-          <p:cNvPr id="9" name="text-200"/>
+          <p:cNvPr id="9" name="text-201"/>
           <p:cNvSpPr txBox="1"/>
           <p:nvPr/>
         </p:nvSpPr>
@@ -9326,7 +10242,7 @@
       </p:sp>
       <p:sp>
         <p:nvSpPr>
-          <p:cNvPr id="10" name="text-201"/>
+          <p:cNvPr id="10" name="text-202"/>
           <p:cNvSpPr txBox="1"/>
           <p:nvPr/>
         </p:nvSpPr>
@@ -9365,7 +10281,7 @@
       </p:sp>
       <p:sp>
         <p:nvSpPr>
-          <p:cNvPr id="11" name="text-202"/>
+          <p:cNvPr id="11" name="text-203"/>
           <p:cNvSpPr txBox="1"/>
           <p:nvPr/>
         </p:nvSpPr>
@@ -9404,7 +10320,7 @@
       </p:sp>
       <p:sp>
         <p:nvSpPr>
-          <p:cNvPr id="12" name="rule-203"/>
+          <p:cNvPr id="12" name="rule-204"/>
           <p:cNvSpPr/>
           <p:nvPr/>
         </p:nvSpPr>
@@ -9427,7 +10343,7 @@
       </p:sp>
       <p:sp>
         <p:nvSpPr>
-          <p:cNvPr id="13" name="text-204"/>
+          <p:cNvPr id="13" name="text-205"/>
           <p:cNvSpPr txBox="1"/>
           <p:nvPr/>
         </p:nvSpPr>
@@ -9466,7 +10382,7 @@
       </p:sp>
       <p:sp>
         <p:nvSpPr>
-          <p:cNvPr id="14" name="text-205"/>
+          <p:cNvPr id="14" name="text-206"/>
           <p:cNvSpPr txBox="1"/>
           <p:nvPr/>
         </p:nvSpPr>
@@ -9505,7 +10421,7 @@
       </p:sp>
       <p:sp>
         <p:nvSpPr>
-          <p:cNvPr id="15" name="text-206"/>
+          <p:cNvPr id="15" name="text-207"/>
           <p:cNvSpPr txBox="1"/>
           <p:nvPr/>
         </p:nvSpPr>
@@ -9544,7 +10460,7 @@
       </p:sp>
       <p:sp>
         <p:nvSpPr>
-          <p:cNvPr id="16" name="rule-207"/>
+          <p:cNvPr id="16" name="rule-208"/>
           <p:cNvSpPr/>
           <p:nvPr/>
         </p:nvSpPr>
@@ -9567,7 +10483,7 @@
       </p:sp>
       <p:sp>
         <p:nvSpPr>
-          <p:cNvPr id="17" name="text-208"/>
+          <p:cNvPr id="17" name="text-209"/>
           <p:cNvSpPr txBox="1"/>
           <p:nvPr/>
         </p:nvSpPr>
@@ -9606,7 +10522,7 @@
       </p:sp>
       <p:sp>
         <p:nvSpPr>
-          <p:cNvPr id="18" name="text-209"/>
+          <p:cNvPr id="18" name="text-210"/>
           <p:cNvSpPr txBox="1"/>
           <p:nvPr/>
         </p:nvSpPr>
@@ -9645,7 +10561,7 @@
       </p:sp>
       <p:sp>
         <p:nvSpPr>
-          <p:cNvPr id="19" name="text-210"/>
+          <p:cNvPr id="19" name="text-211"/>
           <p:cNvSpPr txBox="1"/>
           <p:nvPr/>
         </p:nvSpPr>
@@ -9709,7 +10625,7 @@
       </p:grpSpPr>
       <p:sp>
         <p:nvSpPr>
-          <p:cNvPr id="3" name="text-211"/>
+          <p:cNvPr id="3" name="text-212"/>
           <p:cNvSpPr txBox="1"/>
           <p:nvPr/>
         </p:nvSpPr>
@@ -9748,7 +10664,7 @@
       </p:sp>
       <p:sp>
         <p:nvSpPr>
-          <p:cNvPr id="4" name="text-212"/>
+          <p:cNvPr id="4" name="text-213"/>
           <p:cNvSpPr txBox="1"/>
           <p:nvPr/>
         </p:nvSpPr>
@@ -9787,7 +10703,7 @@
       </p:sp>
       <p:sp>
         <p:nvSpPr>
-          <p:cNvPr id="5" name="text-213"/>
+          <p:cNvPr id="5" name="text-214"/>
           <p:cNvSpPr txBox="1"/>
           <p:nvPr/>
         </p:nvSpPr>
@@ -9829,7 +10745,7 @@
       </p:sp>
       <p:sp>
         <p:nvSpPr>
-          <p:cNvPr id="6" name="rule-214"/>
+          <p:cNvPr id="6" name="rule-215"/>
           <p:cNvSpPr/>
           <p:nvPr/>
         </p:nvSpPr>
@@ -9852,7 +10768,7 @@
       </p:sp>
       <p:sp>
         <p:nvSpPr>
-          <p:cNvPr id="7" name="text-215"/>
+          <p:cNvPr id="7" name="text-216"/>
           <p:cNvSpPr txBox="1"/>
           <p:nvPr/>
         </p:nvSpPr>
@@ -9891,7 +10807,7 @@
       </p:sp>
       <p:sp>
         <p:nvSpPr>
-          <p:cNvPr id="8" name="text-216"/>
+          <p:cNvPr id="8" name="text-217"/>
           <p:cNvSpPr txBox="1"/>
           <p:nvPr/>
         </p:nvSpPr>
@@ -9930,7 +10846,7 @@
       </p:sp>
       <p:sp>
         <p:nvSpPr>
-          <p:cNvPr id="9" name="text-217"/>
+          <p:cNvPr id="9" name="text-218"/>
           <p:cNvSpPr txBox="1"/>
           <p:nvPr/>
         </p:nvSpPr>
@@ -9969,7 +10885,7 @@
       </p:sp>
       <p:sp>
         <p:nvSpPr>
-          <p:cNvPr id="10" name="rule-218"/>
+          <p:cNvPr id="10" name="rule-219"/>
           <p:cNvSpPr/>
           <p:nvPr/>
         </p:nvSpPr>
@@ -9992,7 +10908,7 @@
       </p:sp>
       <p:sp>
         <p:nvSpPr>
-          <p:cNvPr id="11" name="text-219"/>
+          <p:cNvPr id="11" name="text-220"/>
           <p:cNvSpPr txBox="1"/>
           <p:nvPr/>
         </p:nvSpPr>
@@ -10031,7 +10947,7 @@
       </p:sp>
       <p:sp>
         <p:nvSpPr>
-          <p:cNvPr id="12" name="text-220"/>
+          <p:cNvPr id="12" name="text-221"/>
           <p:cNvSpPr txBox="1"/>
           <p:nvPr/>
         </p:nvSpPr>
@@ -10070,7 +10986,7 @@
       </p:sp>
       <p:sp>
         <p:nvSpPr>
-          <p:cNvPr id="13" name="text-221"/>
+          <p:cNvPr id="13" name="text-222"/>
           <p:cNvSpPr txBox="1"/>
           <p:nvPr/>
         </p:nvSpPr>
@@ -10109,7 +11025,7 @@
       </p:sp>
       <p:sp>
         <p:nvSpPr>
-          <p:cNvPr id="14" name="rule-222"/>
+          <p:cNvPr id="14" name="rule-223"/>
           <p:cNvSpPr/>
           <p:nvPr/>
         </p:nvSpPr>
@@ -10132,7 +11048,7 @@
       </p:sp>
       <p:sp>
         <p:nvSpPr>
-          <p:cNvPr id="15" name="text-223"/>
+          <p:cNvPr id="15" name="text-224"/>
           <p:cNvSpPr txBox="1"/>
           <p:nvPr/>
         </p:nvSpPr>
@@ -10171,7 +11087,7 @@
       </p:sp>
       <p:sp>
         <p:nvSpPr>
-          <p:cNvPr id="16" name="text-224"/>
+          <p:cNvPr id="16" name="text-225"/>
           <p:cNvSpPr txBox="1"/>
           <p:nvPr/>
         </p:nvSpPr>
@@ -10210,7 +11126,7 @@
       </p:sp>
       <p:sp>
         <p:nvSpPr>
-          <p:cNvPr id="17" name="text-225"/>
+          <p:cNvPr id="17" name="text-226"/>
           <p:cNvSpPr txBox="1"/>
           <p:nvPr/>
         </p:nvSpPr>
@@ -10249,7 +11165,7 @@
       </p:sp>
       <p:sp>
         <p:nvSpPr>
-          <p:cNvPr id="18" name="rule-226"/>
+          <p:cNvPr id="18" name="rule-227"/>
           <p:cNvSpPr/>
           <p:nvPr/>
         </p:nvSpPr>
@@ -10272,7 +11188,7 @@
       </p:sp>
       <p:sp>
         <p:nvSpPr>
-          <p:cNvPr id="19" name="text-227"/>
+          <p:cNvPr id="19" name="text-228"/>
           <p:cNvSpPr txBox="1"/>
           <p:nvPr/>
         </p:nvSpPr>
@@ -10311,7 +11227,7 @@
       </p:sp>
       <p:sp>
         <p:nvSpPr>
-          <p:cNvPr id="20" name="text-228"/>
+          <p:cNvPr id="20" name="text-229"/>
           <p:cNvSpPr txBox="1"/>
           <p:nvPr/>
         </p:nvSpPr>
@@ -10350,7 +11266,7 @@
       </p:sp>
       <p:sp>
         <p:nvSpPr>
-          <p:cNvPr id="21" name="text-229"/>
+          <p:cNvPr id="21" name="text-230"/>
           <p:cNvSpPr txBox="1"/>
           <p:nvPr/>
         </p:nvSpPr>
@@ -10389,7 +11305,7 @@
       </p:sp>
       <p:sp>
         <p:nvSpPr>
-          <p:cNvPr id="22" name="text-230"/>
+          <p:cNvPr id="22" name="text-231"/>
           <p:cNvSpPr txBox="1"/>
           <p:nvPr/>
         </p:nvSpPr>
@@ -10453,7 +11369,7 @@
       </p:grpSpPr>
       <p:sp>
         <p:nvSpPr>
-          <p:cNvPr id="2" name="text-231"/>
+          <p:cNvPr id="2" name="text-232"/>
           <p:cNvSpPr txBox="1"/>
           <p:nvPr/>
         </p:nvSpPr>
@@ -10492,7 +11408,7 @@
       </p:sp>
       <p:sp>
         <p:nvSpPr>
-          <p:cNvPr id="3" name="text-232"/>
+          <p:cNvPr id="3" name="text-233"/>
           <p:cNvSpPr txBox="1"/>
           <p:nvPr/>
         </p:nvSpPr>
@@ -10531,7 +11447,7 @@
       </p:sp>
       <p:sp>
         <p:nvSpPr>
-          <p:cNvPr id="4" name="text-233"/>
+          <p:cNvPr id="4" name="text-234"/>
           <p:cNvSpPr txBox="1"/>
           <p:nvPr/>
         </p:nvSpPr>
@@ -10565,7 +11481,7 @@
                 <a:ea typeface="DM Sans" pitchFamily="34" charset="-122"/>
                 <a:cs typeface="DM Sans" pitchFamily="34" charset="-120"/>
               </a:rPr>
-              <a:t>What we expect outreach to produce each month</a:t>
+              <a:t>Where the client’s 2½ hours a week go</a:t>
             </a:r>
             <a:endParaRPr lang="en-US" sz="4000" dirty="0"/>
           </a:p>
@@ -10573,7 +11489,7 @@
       </p:sp>
       <p:sp>
         <p:nvSpPr>
-          <p:cNvPr id="5" name="text-234"/>
+          <p:cNvPr id="5" name="text-235"/>
           <p:cNvSpPr txBox="1"/>
           <p:nvPr/>
         </p:nvSpPr>
@@ -10612,7 +11528,7 @@
       </p:sp>
       <p:sp>
         <p:nvSpPr>
-          <p:cNvPr id="6" name="rule-235"/>
+          <p:cNvPr id="6" name="rule-236"/>
           <p:cNvSpPr/>
           <p:nvPr/>
         </p:nvSpPr>
@@ -10635,7 +11551,7 @@
       </p:sp>
       <p:sp>
         <p:nvSpPr>
-          <p:cNvPr id="7" name="text-236"/>
+          <p:cNvPr id="7" name="text-237"/>
           <p:cNvSpPr txBox="1"/>
           <p:nvPr/>
         </p:nvSpPr>
@@ -10666,7 +11582,7 @@
                 <a:ea typeface="DM Sans" pitchFamily="34" charset="-122"/>
                 <a:cs typeface="DM Sans" pitchFamily="34" charset="-120"/>
               </a:rPr>
-              <a:t>At full pace: 20 connection requests a day.</a:t>
+              <a:t>Writing is gone from the client’s week. What’s left is thinking, deciding and one conversation with us.</a:t>
             </a:r>
             <a:endParaRPr lang="en-US" sz="1500" dirty="0"/>
           </a:p>
@@ -10689,7 +11605,7 @@
                 <a:ea typeface="DM Sans" pitchFamily="34" charset="-122"/>
                 <a:cs typeface="DM Sans" pitchFamily="34" charset="-120"/>
               </a:rPr>
-              <a:t>37% accepted.</a:t>
+              <a:t>Raw note: 30 minutes.</a:t>
             </a:r>
             <a:endParaRPr lang="en-US" sz="1500" dirty="0"/>
           </a:p>
@@ -10706,7 +11622,7 @@
                 <a:ea typeface="DM Sans" pitchFamily="34" charset="-122"/>
                 <a:cs typeface="DM Sans" pitchFamily="34" charset="-120"/>
               </a:rPr>
-              <a:t>18% of those reply.</a:t>
+              <a:t>Approvals: about 10 minutes a day.</a:t>
             </a:r>
             <a:endParaRPr lang="en-US" sz="1500" dirty="0"/>
           </a:p>
@@ -10723,7 +11639,7 @@
                 <a:ea typeface="DM Sans" pitchFamily="34" charset="-122"/>
                 <a:cs typeface="DM Sans" pitchFamily="34" charset="-120"/>
               </a:rPr>
-              <a:t>30% of replies book a call.</a:t>
+              <a:t>Weekly call: 1 hour.</a:t>
             </a:r>
             <a:endParaRPr lang="en-US" sz="1500" dirty="0"/>
           </a:p>
@@ -10731,7 +11647,7 @@
       </p:sp>
       <p:sp>
         <p:nvSpPr>
-          <p:cNvPr id="8" name="text-237"/>
+          <p:cNvPr id="8" name="text-238"/>
           <p:cNvSpPr txBox="1"/>
           <p:nvPr/>
         </p:nvSpPr>
@@ -10762,7 +11678,7 @@
                 <a:ea typeface="DM Mono" pitchFamily="34" charset="-122"/>
                 <a:cs typeface="DM Mono" pitchFamily="34" charset="-120"/>
               </a:rPr>
-              <a:t>Outreach in one month (estimate)</a:t>
+              <a:t>Client time per week (minutes)</a:t>
             </a:r>
             <a:endParaRPr lang="en-US" sz="1300" dirty="0"/>
           </a:p>
@@ -10770,7 +11686,7 @@
       </p:sp>
       <p:graphicFrame>
         <p:nvGraphicFramePr>
-          <p:cNvPr id="9" name="funnel-chart" descr=""/>
+          <p:cNvPr id="9" name="time-chart" descr=""/>
           <p:cNvGraphicFramePr/>
           <p:nvPr/>
         </p:nvGraphicFramePr>
@@ -10786,7 +11702,7 @@
       </p:graphicFrame>
       <p:sp>
         <p:nvSpPr>
-          <p:cNvPr id="10" name="text-238"/>
+          <p:cNvPr id="10" name="text-239"/>
           <p:cNvSpPr txBox="1"/>
           <p:nvPr/>
         </p:nvSpPr>
@@ -10817,7 +11733,7 @@
                 <a:ea typeface="DM Mono" pitchFamily="34" charset="-122"/>
                 <a:cs typeface="DM Mono" pitchFamily="34" charset="-120"/>
               </a:rPr>
-              <a:t>Planning estimates from our consultancy client’s plan, not yet proven results</a:t>
+              <a:t>From the consultancy plan: raw note 30 min, approvals about 10 min a day, weekly call 1 hour</a:t>
             </a:r>
             <a:endParaRPr lang="en-US" sz="1000" dirty="0"/>
           </a:p>
@@ -10850,7 +11766,7 @@
       </p:grpSpPr>
       <p:sp>
         <p:nvSpPr>
-          <p:cNvPr id="2" name="text-239"/>
+          <p:cNvPr id="2" name="text-240"/>
           <p:cNvSpPr txBox="1"/>
           <p:nvPr/>
         </p:nvSpPr>
@@ -10889,7 +11805,7 @@
       </p:sp>
       <p:sp>
         <p:nvSpPr>
-          <p:cNvPr id="3" name="text-240"/>
+          <p:cNvPr id="3" name="text-241"/>
           <p:cNvSpPr txBox="1"/>
           <p:nvPr/>
         </p:nvSpPr>
@@ -10928,7 +11844,7 @@
       </p:sp>
       <p:sp>
         <p:nvSpPr>
-          <p:cNvPr id="4" name="text-241"/>
+          <p:cNvPr id="4" name="text-242"/>
           <p:cNvSpPr txBox="1"/>
           <p:nvPr/>
         </p:nvSpPr>
@@ -10962,7 +11878,7 @@
                 <a:ea typeface="DM Sans" pitchFamily="34" charset="-122"/>
                 <a:cs typeface="DM Sans" pitchFamily="34" charset="-120"/>
               </a:rPr>
-              <a:t>Leads should build up month by month</a:t>
+              <a:t>What we expect outreach to produce each month</a:t>
             </a:r>
             <a:endParaRPr lang="en-US" sz="4000" dirty="0"/>
           </a:p>
@@ -10970,7 +11886,7 @@
       </p:sp>
       <p:sp>
         <p:nvSpPr>
-          <p:cNvPr id="5" name="text-242"/>
+          <p:cNvPr id="5" name="text-243"/>
           <p:cNvSpPr txBox="1"/>
           <p:nvPr/>
         </p:nvSpPr>
@@ -11009,7 +11925,7 @@
       </p:sp>
       <p:sp>
         <p:nvSpPr>
-          <p:cNvPr id="6" name="rule-243"/>
+          <p:cNvPr id="6" name="rule-244"/>
           <p:cNvSpPr/>
           <p:nvPr/>
         </p:nvSpPr>
@@ -11032,7 +11948,7 @@
       </p:sp>
       <p:sp>
         <p:nvSpPr>
-          <p:cNvPr id="7" name="text-244"/>
+          <p:cNvPr id="7" name="text-245"/>
           <p:cNvSpPr txBox="1"/>
           <p:nvPr/>
         </p:nvSpPr>
@@ -11063,7 +11979,7 @@
                 <a:ea typeface="DM Sans" pitchFamily="34" charset="-122"/>
                 <a:cs typeface="DM Sans" pitchFamily="34" charset="-120"/>
               </a:rPr>
-              <a:t>By month 6: 100 qualified leads a month, 10 real sales calls, 2–3 new clients.</a:t>
+              <a:t>At full pace: 20 connection requests a day.</a:t>
             </a:r>
             <a:endParaRPr lang="en-US" sz="1500" dirty="0"/>
           </a:p>
@@ -11086,14 +12002,8 @@
                 <a:ea typeface="DM Sans" pitchFamily="34" charset="-122"/>
                 <a:cs typeface="DM Sans" pitchFamily="34" charset="-120"/>
               </a:rPr>
-              <a:t>A qualified lead replies, books or signs up. Likes don’t count.</a:t>
-            </a:r>
-            <a:endParaRPr lang="en-US" sz="1500" dirty="0"/>
-          </a:p>
-          <a:p>
-            <a:pPr indent="0" marL="0">
-              <a:buNone/>
-            </a:pPr>
+              <a:t>37% accepted.</a:t>
+            </a:r>
             <a:endParaRPr lang="en-US" sz="1500" dirty="0"/>
           </a:p>
           <a:p>
@@ -11109,15 +12019,32 @@
                 <a:ea typeface="DM Sans" pitchFamily="34" charset="-122"/>
                 <a:cs typeface="DM Sans" pitchFamily="34" charset="-120"/>
               </a:rPr>
-              <a:t>Big contracts take 6–12 months to close.</a:t>
+              <a:t>18% of those reply.</a:t>
             </a:r>
             <a:endParaRPr lang="en-US" sz="1500" dirty="0"/>
           </a:p>
-        </p:txBody>
-      </p:sp>
-      <p:sp>
-        <p:nvSpPr>
-          <p:cNvPr id="8" name="text-245"/>
+          <a:p>
+            <a:pPr indent="0" marL="0">
+              <a:buNone/>
+            </a:pPr>
+            <a:r>
+              <a:rPr lang="en-US" sz="1500" dirty="0">
+                <a:solidFill>
+                  <a:schemeClr val="accent5"/>
+                </a:solidFill>
+                <a:latin typeface="DM Sans" pitchFamily="34" charset="0"/>
+                <a:ea typeface="DM Sans" pitchFamily="34" charset="-122"/>
+                <a:cs typeface="DM Sans" pitchFamily="34" charset="-120"/>
+              </a:rPr>
+              <a:t>30% of replies book a call.</a:t>
+            </a:r>
+            <a:endParaRPr lang="en-US" sz="1500" dirty="0"/>
+          </a:p>
+        </p:txBody>
+      </p:sp>
+      <p:sp>
+        <p:nvSpPr>
+          <p:cNvPr id="8" name="text-246"/>
           <p:cNvSpPr txBox="1"/>
           <p:nvPr/>
         </p:nvSpPr>
@@ -11148,7 +12075,7 @@
                 <a:ea typeface="DM Mono" pitchFamily="34" charset="-122"/>
                 <a:cs typeface="DM Mono" pitchFamily="34" charset="-120"/>
               </a:rPr>
-              <a:t>Qualified leads per month (forecast)</a:t>
+              <a:t>Outreach in one month (estimate)</a:t>
             </a:r>
             <a:endParaRPr lang="en-US" sz="1300" dirty="0"/>
           </a:p>
@@ -11156,7 +12083,7 @@
       </p:sp>
       <p:graphicFrame>
         <p:nvGraphicFramePr>
-          <p:cNvPr id="9" name="leads-chart" descr=""/>
+          <p:cNvPr id="9" name="funnel-chart" descr=""/>
           <p:cNvGraphicFramePr/>
           <p:nvPr/>
         </p:nvGraphicFramePr>
@@ -11172,7 +12099,7 @@
       </p:graphicFrame>
       <p:sp>
         <p:nvSpPr>
-          <p:cNvPr id="10" name="text-246"/>
+          <p:cNvPr id="10" name="text-247"/>
           <p:cNvSpPr txBox="1"/>
           <p:nvPr/>
         </p:nvSpPr>
@@ -11203,7 +12130,7 @@
                 <a:ea typeface="DM Mono" pitchFamily="34" charset="-122"/>
                 <a:cs typeface="DM Mono" pitchFamily="34" charset="-120"/>
               </a:rPr>
-              <a:t>Forecast mid-points from our consultancy client’s plan, not yet proven</a:t>
+              <a:t>Planning estimates from our consultancy client’s plan, not yet proven results</a:t>
             </a:r>
             <a:endParaRPr lang="en-US" sz="1000" dirty="0"/>
           </a:p>
@@ -11456,7 +12383,7 @@
       </p:grpSpPr>
       <p:sp>
         <p:nvSpPr>
-          <p:cNvPr id="3" name="text-247"/>
+          <p:cNvPr id="2" name="text-248"/>
           <p:cNvSpPr txBox="1"/>
           <p:nvPr/>
         </p:nvSpPr>
@@ -11495,7 +12422,7 @@
       </p:sp>
       <p:sp>
         <p:nvSpPr>
-          <p:cNvPr id="4" name="text-248"/>
+          <p:cNvPr id="3" name="text-249"/>
           <p:cNvSpPr txBox="1"/>
           <p:nvPr/>
         </p:nvSpPr>
@@ -11534,7 +12461,7 @@
       </p:sp>
       <p:sp>
         <p:nvSpPr>
-          <p:cNvPr id="5" name="text-249"/>
+          <p:cNvPr id="4" name="text-250"/>
           <p:cNvSpPr txBox="1"/>
           <p:nvPr/>
         </p:nvSpPr>
@@ -11568,7 +12495,7 @@
                 <a:ea typeface="DM Sans" pitchFamily="34" charset="-122"/>
                 <a:cs typeface="DM Sans" pitchFamily="34" charset="-120"/>
               </a:rPr>
-              <a:t>What it costs: one fee, every tool included</a:t>
+              <a:t>Leads should build up month by month</a:t>
             </a:r>
             <a:endParaRPr lang="en-US" sz="4000" dirty="0"/>
           </a:p>
@@ -11576,65 +12503,26 @@
       </p:sp>
       <p:sp>
         <p:nvSpPr>
-          <p:cNvPr id="6" name="text-250"/>
-          <p:cNvSpPr txBox="1"/>
-          <p:nvPr/>
-        </p:nvSpPr>
-        <p:spPr>
-          <a:xfrm>
-            <a:off x="685800" y="2514600"/>
-            <a:ext cx="3657600" cy="1188720"/>
-          </a:xfrm>
-          <a:prstGeom prst="rect">
-            <a:avLst/>
-          </a:prstGeom>
-          <a:noFill/>
-          <a:ln/>
-        </p:spPr>
-        <p:txBody>
-          <a:bodyPr wrap="square" lIns="0" tIns="0" rIns="0" bIns="0" rtlCol="0" anchor="b"/>
-          <a:lstStyle/>
-          <a:p>
-            <a:pPr algn="ctr" indent="0" marL="0">
-              <a:buNone/>
-            </a:pPr>
-            <a:r>
-              <a:rPr lang="en-US" sz="7200" dirty="0">
-                <a:solidFill>
-                  <a:schemeClr val="tx1"/>
-                </a:solidFill>
-                <a:latin typeface="DM Sans" pitchFamily="34" charset="0"/>
-                <a:ea typeface="DM Sans" pitchFamily="34" charset="-122"/>
-                <a:cs typeface="DM Sans" pitchFamily="34" charset="-120"/>
-              </a:rPr>
-              <a:t>£1,500</a:t>
-            </a:r>
-            <a:endParaRPr lang="en-US" sz="7200" dirty="0"/>
-          </a:p>
-        </p:txBody>
-      </p:sp>
-      <p:sp>
-        <p:nvSpPr>
-          <p:cNvPr id="7" name="text-251"/>
-          <p:cNvSpPr txBox="1"/>
-          <p:nvPr/>
-        </p:nvSpPr>
-        <p:spPr>
-          <a:xfrm>
-            <a:off x="685800" y="3794760"/>
-            <a:ext cx="3657600" cy="274320"/>
-          </a:xfrm>
-          <a:prstGeom prst="rect">
-            <a:avLst/>
-          </a:prstGeom>
-          <a:noFill/>
-          <a:ln/>
-        </p:spPr>
-        <p:txBody>
-          <a:bodyPr wrap="square" lIns="0" tIns="0" rIns="0" bIns="0" rtlCol="0" anchor="t"/>
-          <a:lstStyle/>
-          <a:p>
-            <a:pPr algn="ctr" indent="0" marL="0">
+          <p:cNvPr id="5" name="text-251"/>
+          <p:cNvSpPr txBox="1"/>
+          <p:nvPr/>
+        </p:nvSpPr>
+        <p:spPr>
+          <a:xfrm>
+            <a:off x="585216" y="2651760"/>
+            <a:ext cx="3291840" cy="274320"/>
+          </a:xfrm>
+          <a:prstGeom prst="rect">
+            <a:avLst/>
+          </a:prstGeom>
+          <a:noFill/>
+          <a:ln/>
+        </p:spPr>
+        <p:txBody>
+          <a:bodyPr wrap="square" lIns="0" tIns="0" rIns="0" bIns="0" rtlCol="0" anchor="t"/>
+          <a:lstStyle/>
+          <a:p>
+            <a:pPr indent="0" marL="0">
               <a:buNone/>
             </a:pPr>
             <a:r>
@@ -11646,7 +12534,7 @@
                 <a:ea typeface="DM Mono" pitchFamily="34" charset="-122"/>
                 <a:cs typeface="DM Mono" pitchFamily="34" charset="-120"/>
               </a:rPr>
-              <a:t>Month 1</a:t>
+              <a:t>Insights</a:t>
             </a:r>
             <a:endParaRPr lang="en-US" sz="1300" dirty="0"/>
           </a:p>
@@ -11654,287 +12542,14 @@
       </p:sp>
       <p:sp>
         <p:nvSpPr>
-          <p:cNvPr id="8" name="text-252"/>
-          <p:cNvSpPr txBox="1"/>
-          <p:nvPr/>
-        </p:nvSpPr>
-        <p:spPr>
-          <a:xfrm>
-            <a:off x="1051560" y="4160520"/>
-            <a:ext cx="2926080" cy="731520"/>
-          </a:xfrm>
-          <a:prstGeom prst="rect">
-            <a:avLst/>
-          </a:prstGeom>
-          <a:noFill/>
-          <a:ln/>
-        </p:spPr>
-        <p:txBody>
-          <a:bodyPr wrap="square" lIns="0" tIns="0" rIns="0" bIns="0" rtlCol="0" anchor="t"/>
-          <a:lstStyle/>
-          <a:p>
-            <a:pPr algn="ctr" indent="0" marL="0">
-              <a:buNone/>
-            </a:pPr>
-            <a:r>
-              <a:rPr lang="en-US" sz="1500" dirty="0">
-                <a:solidFill>
-                  <a:schemeClr val="accent5"/>
-                </a:solidFill>
-                <a:latin typeface="DM Sans" pitchFamily="34" charset="0"/>
-                <a:ea typeface="DM Sans" pitchFamily="34" charset="-122"/>
-                <a:cs typeface="DM Sans" pitchFamily="34" charset="-120"/>
-              </a:rPr>
-              <a:t>Set-up, voice interview and website build</a:t>
-            </a:r>
-            <a:endParaRPr lang="en-US" sz="1500" dirty="0"/>
-          </a:p>
-        </p:txBody>
-      </p:sp>
-      <p:sp>
-        <p:nvSpPr>
-          <p:cNvPr id="9" name="text-253"/>
-          <p:cNvSpPr txBox="1"/>
-          <p:nvPr/>
-        </p:nvSpPr>
-        <p:spPr>
-          <a:xfrm>
-            <a:off x="4343400" y="2514600"/>
-            <a:ext cx="3657600" cy="1188720"/>
-          </a:xfrm>
-          <a:prstGeom prst="rect">
-            <a:avLst/>
-          </a:prstGeom>
-          <a:noFill/>
-          <a:ln/>
-        </p:spPr>
-        <p:txBody>
-          <a:bodyPr wrap="square" lIns="0" tIns="0" rIns="0" bIns="0" rtlCol="0" anchor="b"/>
-          <a:lstStyle/>
-          <a:p>
-            <a:pPr algn="ctr" indent="0" marL="0">
-              <a:buNone/>
-            </a:pPr>
-            <a:r>
-              <a:rPr lang="en-US" sz="7200" dirty="0">
-                <a:solidFill>
-                  <a:schemeClr val="tx1"/>
-                </a:solidFill>
-                <a:latin typeface="DM Sans" pitchFamily="34" charset="0"/>
-                <a:ea typeface="DM Sans" pitchFamily="34" charset="-122"/>
-                <a:cs typeface="DM Sans" pitchFamily="34" charset="-120"/>
-              </a:rPr>
-              <a:t>£1,200</a:t>
-            </a:r>
-            <a:endParaRPr lang="en-US" sz="7200" dirty="0"/>
-          </a:p>
-        </p:txBody>
-      </p:sp>
-      <p:sp>
-        <p:nvSpPr>
-          <p:cNvPr id="10" name="text-254"/>
-          <p:cNvSpPr txBox="1"/>
-          <p:nvPr/>
-        </p:nvSpPr>
-        <p:spPr>
-          <a:xfrm>
-            <a:off x="4343400" y="3794760"/>
-            <a:ext cx="3657600" cy="274320"/>
-          </a:xfrm>
-          <a:prstGeom prst="rect">
-            <a:avLst/>
-          </a:prstGeom>
-          <a:noFill/>
-          <a:ln/>
-        </p:spPr>
-        <p:txBody>
-          <a:bodyPr wrap="square" lIns="0" tIns="0" rIns="0" bIns="0" rtlCol="0" anchor="t"/>
-          <a:lstStyle/>
-          <a:p>
-            <a:pPr algn="ctr" indent="0" marL="0">
-              <a:buNone/>
-            </a:pPr>
-            <a:r>
-              <a:rPr lang="en-US" sz="1300" dirty="0">
-                <a:solidFill>
-                  <a:schemeClr val="tx1"/>
-                </a:solidFill>
-                <a:latin typeface="DM Mono" pitchFamily="34" charset="0"/>
-                <a:ea typeface="DM Mono" pitchFamily="34" charset="-122"/>
-                <a:cs typeface="DM Mono" pitchFamily="34" charset="-120"/>
-              </a:rPr>
-              <a:t>Months 2–3</a:t>
-            </a:r>
-            <a:endParaRPr lang="en-US" sz="1300" dirty="0"/>
-          </a:p>
-        </p:txBody>
-      </p:sp>
-      <p:sp>
-        <p:nvSpPr>
-          <p:cNvPr id="11" name="text-255"/>
-          <p:cNvSpPr txBox="1"/>
-          <p:nvPr/>
-        </p:nvSpPr>
-        <p:spPr>
-          <a:xfrm>
-            <a:off x="4709160" y="4160520"/>
-            <a:ext cx="2926080" cy="731520"/>
-          </a:xfrm>
-          <a:prstGeom prst="rect">
-            <a:avLst/>
-          </a:prstGeom>
-          <a:noFill/>
-          <a:ln/>
-        </p:spPr>
-        <p:txBody>
-          <a:bodyPr wrap="square" lIns="0" tIns="0" rIns="0" bIns="0" rtlCol="0" anchor="t"/>
-          <a:lstStyle/>
-          <a:p>
-            <a:pPr algn="ctr" indent="0" marL="0">
-              <a:buNone/>
-            </a:pPr>
-            <a:r>
-              <a:rPr lang="en-US" sz="1500" dirty="0">
-                <a:solidFill>
-                  <a:schemeClr val="accent5"/>
-                </a:solidFill>
-                <a:latin typeface="DM Sans" pitchFamily="34" charset="0"/>
-                <a:ea typeface="DM Sans" pitchFamily="34" charset="-122"/>
-                <a:cs typeface="DM Sans" pitchFamily="34" charset="-120"/>
-              </a:rPr>
-              <a:t>Founding price, full delivery</a:t>
-            </a:r>
-            <a:endParaRPr lang="en-US" sz="1500" dirty="0"/>
-          </a:p>
-        </p:txBody>
-      </p:sp>
-      <p:sp>
-        <p:nvSpPr>
-          <p:cNvPr id="12" name="text-256"/>
-          <p:cNvSpPr txBox="1"/>
-          <p:nvPr/>
-        </p:nvSpPr>
-        <p:spPr>
-          <a:xfrm>
-            <a:off x="8001000" y="2514600"/>
-            <a:ext cx="3657600" cy="1188720"/>
-          </a:xfrm>
-          <a:prstGeom prst="rect">
-            <a:avLst/>
-          </a:prstGeom>
-          <a:noFill/>
-          <a:ln/>
-        </p:spPr>
-        <p:txBody>
-          <a:bodyPr wrap="square" lIns="0" tIns="0" rIns="0" bIns="0" rtlCol="0" anchor="b"/>
-          <a:lstStyle/>
-          <a:p>
-            <a:pPr algn="ctr" indent="0" marL="0">
-              <a:buNone/>
-            </a:pPr>
-            <a:r>
-              <a:rPr lang="en-US" sz="7200" dirty="0">
-                <a:solidFill>
-                  <a:schemeClr val="tx1"/>
-                </a:solidFill>
-                <a:latin typeface="DM Sans" pitchFamily="34" charset="0"/>
-                <a:ea typeface="DM Sans" pitchFamily="34" charset="-122"/>
-                <a:cs typeface="DM Sans" pitchFamily="34" charset="-120"/>
-              </a:rPr>
-              <a:t>£2,500</a:t>
-            </a:r>
-            <a:endParaRPr lang="en-US" sz="7200" dirty="0"/>
-          </a:p>
-        </p:txBody>
-      </p:sp>
-      <p:sp>
-        <p:nvSpPr>
-          <p:cNvPr id="13" name="text-257"/>
-          <p:cNvSpPr txBox="1"/>
-          <p:nvPr/>
-        </p:nvSpPr>
-        <p:spPr>
-          <a:xfrm>
-            <a:off x="8001000" y="3794760"/>
-            <a:ext cx="3657600" cy="274320"/>
-          </a:xfrm>
-          <a:prstGeom prst="rect">
-            <a:avLst/>
-          </a:prstGeom>
-          <a:noFill/>
-          <a:ln/>
-        </p:spPr>
-        <p:txBody>
-          <a:bodyPr wrap="square" lIns="0" tIns="0" rIns="0" bIns="0" rtlCol="0" anchor="t"/>
-          <a:lstStyle/>
-          <a:p>
-            <a:pPr algn="ctr" indent="0" marL="0">
-              <a:buNone/>
-            </a:pPr>
-            <a:r>
-              <a:rPr lang="en-US" sz="1300" dirty="0">
-                <a:solidFill>
-                  <a:schemeClr val="tx1"/>
-                </a:solidFill>
-                <a:latin typeface="DM Mono" pitchFamily="34" charset="0"/>
-                <a:ea typeface="DM Mono" pitchFamily="34" charset="-122"/>
-                <a:cs typeface="DM Mono" pitchFamily="34" charset="-120"/>
-              </a:rPr>
-              <a:t>Month 4 onwards</a:t>
-            </a:r>
-            <a:endParaRPr lang="en-US" sz="1300" dirty="0"/>
-          </a:p>
-        </p:txBody>
-      </p:sp>
-      <p:sp>
-        <p:nvSpPr>
-          <p:cNvPr id="14" name="text-258"/>
-          <p:cNvSpPr txBox="1"/>
-          <p:nvPr/>
-        </p:nvSpPr>
-        <p:spPr>
-          <a:xfrm>
-            <a:off x="8366760" y="4160520"/>
-            <a:ext cx="2926080" cy="731520"/>
-          </a:xfrm>
-          <a:prstGeom prst="rect">
-            <a:avLst/>
-          </a:prstGeom>
-          <a:noFill/>
-          <a:ln/>
-        </p:spPr>
-        <p:txBody>
-          <a:bodyPr wrap="square" lIns="0" tIns="0" rIns="0" bIns="0" rtlCol="0" anchor="t"/>
-          <a:lstStyle/>
-          <a:p>
-            <a:pPr algn="ctr" indent="0" marL="0">
-              <a:buNone/>
-            </a:pPr>
-            <a:r>
-              <a:rPr lang="en-US" sz="1500" dirty="0">
-                <a:solidFill>
-                  <a:schemeClr val="accent5"/>
-                </a:solidFill>
-                <a:latin typeface="DM Sans" pitchFamily="34" charset="0"/>
-                <a:ea typeface="DM Sans" pitchFamily="34" charset="-122"/>
-                <a:cs typeface="DM Sans" pitchFamily="34" charset="-120"/>
-              </a:rPr>
-              <a:t>Every platform, agent, Skool and webinar tool</a:t>
-            </a:r>
-            <a:endParaRPr lang="en-US" sz="1500" dirty="0"/>
-          </a:p>
-        </p:txBody>
-      </p:sp>
-      <p:sp>
-        <p:nvSpPr>
-          <p:cNvPr id="15" name="rule-259"/>
+          <p:cNvPr id="6" name="rule-252"/>
           <p:cNvSpPr/>
           <p:nvPr/>
         </p:nvSpPr>
         <p:spPr>
           <a:xfrm>
-            <a:off x="585216" y="5257800"/>
-            <a:ext cx="11018520" cy="0"/>
+            <a:off x="585216" y="3017520"/>
+            <a:ext cx="3291840" cy="0"/>
           </a:xfrm>
           <a:prstGeom prst="line">
             <a:avLst/>
@@ -11950,40 +12565,180 @@
       </p:sp>
       <p:sp>
         <p:nvSpPr>
-          <p:cNvPr id="16" name="text-260"/>
-          <p:cNvSpPr txBox="1"/>
-          <p:nvPr/>
-        </p:nvSpPr>
-        <p:spPr>
-          <a:xfrm>
-            <a:off x="585216" y="5440680"/>
-            <a:ext cx="11018520" cy="640080"/>
-          </a:xfrm>
-          <a:prstGeom prst="rect">
-            <a:avLst/>
-          </a:prstGeom>
-          <a:noFill/>
-          <a:ln/>
-        </p:spPr>
-        <p:txBody>
-          <a:bodyPr wrap="square" lIns="0" tIns="0" rIns="0" bIns="0" rtlCol="0" anchor="t"/>
-          <a:lstStyle/>
-          <a:p>
-            <a:pPr indent="0" marL="0">
-              <a:buNone/>
-            </a:pPr>
-            <a:r>
-              <a:rPr lang="en-US" sz="1600" dirty="0">
-                <a:solidFill>
-                  <a:schemeClr val="tx1"/>
+          <p:cNvPr id="7" name="text-253"/>
+          <p:cNvSpPr txBox="1"/>
+          <p:nvPr/>
+        </p:nvSpPr>
+        <p:spPr>
+          <a:xfrm>
+            <a:off x="585216" y="3200400"/>
+            <a:ext cx="3291840" cy="2834640"/>
+          </a:xfrm>
+          <a:prstGeom prst="rect">
+            <a:avLst/>
+          </a:prstGeom>
+          <a:noFill/>
+          <a:ln/>
+        </p:spPr>
+        <p:txBody>
+          <a:bodyPr wrap="square" lIns="0" tIns="0" rIns="0" bIns="0" rtlCol="0" anchor="t"/>
+          <a:lstStyle/>
+          <a:p>
+            <a:pPr indent="0" marL="0">
+              <a:buNone/>
+            </a:pPr>
+            <a:r>
+              <a:rPr lang="en-US" sz="1500" dirty="0">
+                <a:solidFill>
+                  <a:schemeClr val="accent5"/>
                 </a:solidFill>
                 <a:latin typeface="DM Sans" pitchFamily="34" charset="0"/>
                 <a:ea typeface="DM Sans" pitchFamily="34" charset="-122"/>
                 <a:cs typeface="DM Sans" pitchFamily="34" charset="-120"/>
               </a:rPr>
-              <a:t>Our promise: at day 60 we review the results together. If we’re behind plan, we fix it in writing, or the client can leave.</a:t>
-            </a:r>
-            <a:endParaRPr lang="en-US" sz="1600" dirty="0"/>
+              <a:t>By month 6: 100 qualified leads a month, 10 real sales calls, 2–3 new clients.</a:t>
+            </a:r>
+            <a:endParaRPr lang="en-US" sz="1500" dirty="0"/>
+          </a:p>
+          <a:p>
+            <a:pPr indent="0" marL="0">
+              <a:buNone/>
+            </a:pPr>
+            <a:endParaRPr lang="en-US" sz="1500" dirty="0"/>
+          </a:p>
+          <a:p>
+            <a:pPr indent="0" marL="0">
+              <a:buNone/>
+            </a:pPr>
+            <a:r>
+              <a:rPr lang="en-US" sz="1500" dirty="0">
+                <a:solidFill>
+                  <a:schemeClr val="accent5"/>
+                </a:solidFill>
+                <a:latin typeface="DM Sans" pitchFamily="34" charset="0"/>
+                <a:ea typeface="DM Sans" pitchFamily="34" charset="-122"/>
+                <a:cs typeface="DM Sans" pitchFamily="34" charset="-120"/>
+              </a:rPr>
+              <a:t>A qualified lead replies, books or signs up. Likes don’t count.</a:t>
+            </a:r>
+            <a:endParaRPr lang="en-US" sz="1500" dirty="0"/>
+          </a:p>
+          <a:p>
+            <a:pPr indent="0" marL="0">
+              <a:buNone/>
+            </a:pPr>
+            <a:endParaRPr lang="en-US" sz="1500" dirty="0"/>
+          </a:p>
+          <a:p>
+            <a:pPr indent="0" marL="0">
+              <a:buNone/>
+            </a:pPr>
+            <a:r>
+              <a:rPr lang="en-US" sz="1500" dirty="0">
+                <a:solidFill>
+                  <a:schemeClr val="accent5"/>
+                </a:solidFill>
+                <a:latin typeface="DM Sans" pitchFamily="34" charset="0"/>
+                <a:ea typeface="DM Sans" pitchFamily="34" charset="-122"/>
+                <a:cs typeface="DM Sans" pitchFamily="34" charset="-120"/>
+              </a:rPr>
+              <a:t>Big contracts take 6–12 months to close.</a:t>
+            </a:r>
+            <a:endParaRPr lang="en-US" sz="1500" dirty="0"/>
+          </a:p>
+        </p:txBody>
+      </p:sp>
+      <p:sp>
+        <p:nvSpPr>
+          <p:cNvPr id="8" name="text-254"/>
+          <p:cNvSpPr txBox="1"/>
+          <p:nvPr/>
+        </p:nvSpPr>
+        <p:spPr>
+          <a:xfrm>
+            <a:off x="4480560" y="2651760"/>
+            <a:ext cx="7132320" cy="274320"/>
+          </a:xfrm>
+          <a:prstGeom prst="rect">
+            <a:avLst/>
+          </a:prstGeom>
+          <a:noFill/>
+          <a:ln/>
+        </p:spPr>
+        <p:txBody>
+          <a:bodyPr wrap="square" lIns="0" tIns="0" rIns="0" bIns="0" rtlCol="0" anchor="t"/>
+          <a:lstStyle/>
+          <a:p>
+            <a:pPr indent="0" marL="0">
+              <a:buNone/>
+            </a:pPr>
+            <a:r>
+              <a:rPr lang="en-US" sz="1300" dirty="0">
+                <a:solidFill>
+                  <a:schemeClr val="tx1"/>
+                </a:solidFill>
+                <a:latin typeface="DM Mono" pitchFamily="34" charset="0"/>
+                <a:ea typeface="DM Mono" pitchFamily="34" charset="-122"/>
+                <a:cs typeface="DM Mono" pitchFamily="34" charset="-120"/>
+              </a:rPr>
+              <a:t>Qualified leads per month (forecast)</a:t>
+            </a:r>
+            <a:endParaRPr lang="en-US" sz="1300" dirty="0"/>
+          </a:p>
+        </p:txBody>
+      </p:sp>
+      <p:graphicFrame>
+        <p:nvGraphicFramePr>
+          <p:cNvPr id="9" name="leads-chart" descr=""/>
+          <p:cNvGraphicFramePr/>
+          <p:nvPr/>
+        </p:nvGraphicFramePr>
+        <p:xfrm>
+          <a:off x="4480560" y="2971800"/>
+          <a:ext cx="7132320" cy="3063240"/>
+        </p:xfrm>
+        <a:graphic xmlns:a="http://schemas.openxmlformats.org/drawingml/2006/main">
+          <a:graphicData uri="http://schemas.openxmlformats.org/drawingml/2006/chart">
+            <c:chart xmlns:c="http://schemas.openxmlformats.org/drawingml/2006/chart" r:id="rId1"/>
+          </a:graphicData>
+        </a:graphic>
+      </p:graphicFrame>
+      <p:sp>
+        <p:nvSpPr>
+          <p:cNvPr id="10" name="text-255"/>
+          <p:cNvSpPr txBox="1"/>
+          <p:nvPr/>
+        </p:nvSpPr>
+        <p:spPr>
+          <a:xfrm>
+            <a:off x="4480560" y="6172200"/>
+            <a:ext cx="7132320" cy="274320"/>
+          </a:xfrm>
+          <a:prstGeom prst="rect">
+            <a:avLst/>
+          </a:prstGeom>
+          <a:noFill/>
+          <a:ln/>
+        </p:spPr>
+        <p:txBody>
+          <a:bodyPr wrap="square" lIns="0" tIns="0" rIns="0" bIns="0" rtlCol="0" anchor="t"/>
+          <a:lstStyle/>
+          <a:p>
+            <a:pPr indent="0" marL="0">
+              <a:buNone/>
+            </a:pPr>
+            <a:r>
+              <a:rPr lang="en-US" sz="1000" dirty="0">
+                <a:solidFill>
+                  <a:schemeClr val="accent2"/>
+                </a:solidFill>
+                <a:latin typeface="DM Mono" pitchFamily="34" charset="0"/>
+                <a:ea typeface="DM Mono" pitchFamily="34" charset="-122"/>
+                <a:cs typeface="DM Mono" pitchFamily="34" charset="-120"/>
+              </a:rPr>
+              <a:t>Forecast mid-points from our consultancy client’s plan, not yet proven</a:t>
+            </a:r>
+            <a:endParaRPr lang="en-US" sz="1000" dirty="0"/>
           </a:p>
         </p:txBody>
       </p:sp>
@@ -12014,7 +12769,7 @@
       </p:grpSpPr>
       <p:sp>
         <p:nvSpPr>
-          <p:cNvPr id="2" name="text-261"/>
+          <p:cNvPr id="3" name="text-256"/>
           <p:cNvSpPr txBox="1"/>
           <p:nvPr/>
         </p:nvSpPr>
@@ -12053,7 +12808,7 @@
       </p:sp>
       <p:sp>
         <p:nvSpPr>
-          <p:cNvPr id="3" name="text-262"/>
+          <p:cNvPr id="4" name="text-257"/>
           <p:cNvSpPr txBox="1"/>
           <p:nvPr/>
         </p:nvSpPr>
@@ -12092,7 +12847,7 @@
       </p:sp>
       <p:sp>
         <p:nvSpPr>
-          <p:cNvPr id="4" name="text-263"/>
+          <p:cNvPr id="5" name="text-258"/>
           <p:cNvSpPr txBox="1"/>
           <p:nvPr/>
         </p:nvSpPr>
@@ -12126,7 +12881,7 @@
                 <a:ea typeface="DM Sans" pitchFamily="34" charset="-122"/>
                 <a:cs typeface="DM Sans" pitchFamily="34" charset="-120"/>
               </a:rPr>
-              <a:t>One client win can pay for the whole year</a:t>
+              <a:t>What it costs: one fee, every tool included</a:t>
             </a:r>
             <a:endParaRPr lang="en-US" sz="4000" dirty="0"/>
           </a:p>
@@ -12134,26 +12889,65 @@
       </p:sp>
       <p:sp>
         <p:nvSpPr>
-          <p:cNvPr id="5" name="text-264"/>
-          <p:cNvSpPr txBox="1"/>
-          <p:nvPr/>
-        </p:nvSpPr>
-        <p:spPr>
-          <a:xfrm>
-            <a:off x="585216" y="2651760"/>
-            <a:ext cx="3291840" cy="274320"/>
-          </a:xfrm>
-          <a:prstGeom prst="rect">
-            <a:avLst/>
-          </a:prstGeom>
-          <a:noFill/>
-          <a:ln/>
-        </p:spPr>
-        <p:txBody>
-          <a:bodyPr wrap="square" lIns="0" tIns="0" rIns="0" bIns="0" rtlCol="0" anchor="t"/>
-          <a:lstStyle/>
-          <a:p>
-            <a:pPr indent="0" marL="0">
+          <p:cNvPr id="6" name="text-259"/>
+          <p:cNvSpPr txBox="1"/>
+          <p:nvPr/>
+        </p:nvSpPr>
+        <p:spPr>
+          <a:xfrm>
+            <a:off x="685800" y="2514600"/>
+            <a:ext cx="3657600" cy="1188720"/>
+          </a:xfrm>
+          <a:prstGeom prst="rect">
+            <a:avLst/>
+          </a:prstGeom>
+          <a:noFill/>
+          <a:ln/>
+        </p:spPr>
+        <p:txBody>
+          <a:bodyPr wrap="square" lIns="0" tIns="0" rIns="0" bIns="0" rtlCol="0" anchor="b"/>
+          <a:lstStyle/>
+          <a:p>
+            <a:pPr algn="ctr" indent="0" marL="0">
+              <a:buNone/>
+            </a:pPr>
+            <a:r>
+              <a:rPr lang="en-US" sz="7200" dirty="0">
+                <a:solidFill>
+                  <a:schemeClr val="tx1"/>
+                </a:solidFill>
+                <a:latin typeface="DM Sans" pitchFamily="34" charset="0"/>
+                <a:ea typeface="DM Sans" pitchFamily="34" charset="-122"/>
+                <a:cs typeface="DM Sans" pitchFamily="34" charset="-120"/>
+              </a:rPr>
+              <a:t>£1,500</a:t>
+            </a:r>
+            <a:endParaRPr lang="en-US" sz="7200" dirty="0"/>
+          </a:p>
+        </p:txBody>
+      </p:sp>
+      <p:sp>
+        <p:nvSpPr>
+          <p:cNvPr id="7" name="text-260"/>
+          <p:cNvSpPr txBox="1"/>
+          <p:nvPr/>
+        </p:nvSpPr>
+        <p:spPr>
+          <a:xfrm>
+            <a:off x="685800" y="3794760"/>
+            <a:ext cx="3657600" cy="274320"/>
+          </a:xfrm>
+          <a:prstGeom prst="rect">
+            <a:avLst/>
+          </a:prstGeom>
+          <a:noFill/>
+          <a:ln/>
+        </p:spPr>
+        <p:txBody>
+          <a:bodyPr wrap="square" lIns="0" tIns="0" rIns="0" bIns="0" rtlCol="0" anchor="t"/>
+          <a:lstStyle/>
+          <a:p>
+            <a:pPr algn="ctr" indent="0" marL="0">
               <a:buNone/>
             </a:pPr>
             <a:r>
@@ -12165,7 +12959,7 @@
                 <a:ea typeface="DM Mono" pitchFamily="34" charset="-122"/>
                 <a:cs typeface="DM Mono" pitchFamily="34" charset="-120"/>
               </a:rPr>
-              <a:t>Insights</a:t>
+              <a:t>Month 1</a:t>
             </a:r>
             <a:endParaRPr lang="en-US" sz="1300" dirty="0"/>
           </a:p>
@@ -12173,14 +12967,287 @@
       </p:sp>
       <p:sp>
         <p:nvSpPr>
-          <p:cNvPr id="6" name="rule-265"/>
+          <p:cNvPr id="8" name="text-261"/>
+          <p:cNvSpPr txBox="1"/>
+          <p:nvPr/>
+        </p:nvSpPr>
+        <p:spPr>
+          <a:xfrm>
+            <a:off x="1051560" y="4160520"/>
+            <a:ext cx="2926080" cy="731520"/>
+          </a:xfrm>
+          <a:prstGeom prst="rect">
+            <a:avLst/>
+          </a:prstGeom>
+          <a:noFill/>
+          <a:ln/>
+        </p:spPr>
+        <p:txBody>
+          <a:bodyPr wrap="square" lIns="0" tIns="0" rIns="0" bIns="0" rtlCol="0" anchor="t"/>
+          <a:lstStyle/>
+          <a:p>
+            <a:pPr algn="ctr" indent="0" marL="0">
+              <a:buNone/>
+            </a:pPr>
+            <a:r>
+              <a:rPr lang="en-US" sz="1500" dirty="0">
+                <a:solidFill>
+                  <a:schemeClr val="accent5"/>
+                </a:solidFill>
+                <a:latin typeface="DM Sans" pitchFamily="34" charset="0"/>
+                <a:ea typeface="DM Sans" pitchFamily="34" charset="-122"/>
+                <a:cs typeface="DM Sans" pitchFamily="34" charset="-120"/>
+              </a:rPr>
+              <a:t>Set-up, voice interview and website build</a:t>
+            </a:r>
+            <a:endParaRPr lang="en-US" sz="1500" dirty="0"/>
+          </a:p>
+        </p:txBody>
+      </p:sp>
+      <p:sp>
+        <p:nvSpPr>
+          <p:cNvPr id="9" name="text-262"/>
+          <p:cNvSpPr txBox="1"/>
+          <p:nvPr/>
+        </p:nvSpPr>
+        <p:spPr>
+          <a:xfrm>
+            <a:off x="4343400" y="2514600"/>
+            <a:ext cx="3657600" cy="1188720"/>
+          </a:xfrm>
+          <a:prstGeom prst="rect">
+            <a:avLst/>
+          </a:prstGeom>
+          <a:noFill/>
+          <a:ln/>
+        </p:spPr>
+        <p:txBody>
+          <a:bodyPr wrap="square" lIns="0" tIns="0" rIns="0" bIns="0" rtlCol="0" anchor="b"/>
+          <a:lstStyle/>
+          <a:p>
+            <a:pPr algn="ctr" indent="0" marL="0">
+              <a:buNone/>
+            </a:pPr>
+            <a:r>
+              <a:rPr lang="en-US" sz="7200" dirty="0">
+                <a:solidFill>
+                  <a:schemeClr val="tx1"/>
+                </a:solidFill>
+                <a:latin typeface="DM Sans" pitchFamily="34" charset="0"/>
+                <a:ea typeface="DM Sans" pitchFamily="34" charset="-122"/>
+                <a:cs typeface="DM Sans" pitchFamily="34" charset="-120"/>
+              </a:rPr>
+              <a:t>£1,200</a:t>
+            </a:r>
+            <a:endParaRPr lang="en-US" sz="7200" dirty="0"/>
+          </a:p>
+        </p:txBody>
+      </p:sp>
+      <p:sp>
+        <p:nvSpPr>
+          <p:cNvPr id="10" name="text-263"/>
+          <p:cNvSpPr txBox="1"/>
+          <p:nvPr/>
+        </p:nvSpPr>
+        <p:spPr>
+          <a:xfrm>
+            <a:off x="4343400" y="3794760"/>
+            <a:ext cx="3657600" cy="274320"/>
+          </a:xfrm>
+          <a:prstGeom prst="rect">
+            <a:avLst/>
+          </a:prstGeom>
+          <a:noFill/>
+          <a:ln/>
+        </p:spPr>
+        <p:txBody>
+          <a:bodyPr wrap="square" lIns="0" tIns="0" rIns="0" bIns="0" rtlCol="0" anchor="t"/>
+          <a:lstStyle/>
+          <a:p>
+            <a:pPr algn="ctr" indent="0" marL="0">
+              <a:buNone/>
+            </a:pPr>
+            <a:r>
+              <a:rPr lang="en-US" sz="1300" dirty="0">
+                <a:solidFill>
+                  <a:schemeClr val="tx1"/>
+                </a:solidFill>
+                <a:latin typeface="DM Mono" pitchFamily="34" charset="0"/>
+                <a:ea typeface="DM Mono" pitchFamily="34" charset="-122"/>
+                <a:cs typeface="DM Mono" pitchFamily="34" charset="-120"/>
+              </a:rPr>
+              <a:t>Months 2–3</a:t>
+            </a:r>
+            <a:endParaRPr lang="en-US" sz="1300" dirty="0"/>
+          </a:p>
+        </p:txBody>
+      </p:sp>
+      <p:sp>
+        <p:nvSpPr>
+          <p:cNvPr id="11" name="text-264"/>
+          <p:cNvSpPr txBox="1"/>
+          <p:nvPr/>
+        </p:nvSpPr>
+        <p:spPr>
+          <a:xfrm>
+            <a:off x="4709160" y="4160520"/>
+            <a:ext cx="2926080" cy="731520"/>
+          </a:xfrm>
+          <a:prstGeom prst="rect">
+            <a:avLst/>
+          </a:prstGeom>
+          <a:noFill/>
+          <a:ln/>
+        </p:spPr>
+        <p:txBody>
+          <a:bodyPr wrap="square" lIns="0" tIns="0" rIns="0" bIns="0" rtlCol="0" anchor="t"/>
+          <a:lstStyle/>
+          <a:p>
+            <a:pPr algn="ctr" indent="0" marL="0">
+              <a:buNone/>
+            </a:pPr>
+            <a:r>
+              <a:rPr lang="en-US" sz="1500" dirty="0">
+                <a:solidFill>
+                  <a:schemeClr val="accent5"/>
+                </a:solidFill>
+                <a:latin typeface="DM Sans" pitchFamily="34" charset="0"/>
+                <a:ea typeface="DM Sans" pitchFamily="34" charset="-122"/>
+                <a:cs typeface="DM Sans" pitchFamily="34" charset="-120"/>
+              </a:rPr>
+              <a:t>Founding price, full delivery</a:t>
+            </a:r>
+            <a:endParaRPr lang="en-US" sz="1500" dirty="0"/>
+          </a:p>
+        </p:txBody>
+      </p:sp>
+      <p:sp>
+        <p:nvSpPr>
+          <p:cNvPr id="12" name="text-265"/>
+          <p:cNvSpPr txBox="1"/>
+          <p:nvPr/>
+        </p:nvSpPr>
+        <p:spPr>
+          <a:xfrm>
+            <a:off x="8001000" y="2514600"/>
+            <a:ext cx="3657600" cy="1188720"/>
+          </a:xfrm>
+          <a:prstGeom prst="rect">
+            <a:avLst/>
+          </a:prstGeom>
+          <a:noFill/>
+          <a:ln/>
+        </p:spPr>
+        <p:txBody>
+          <a:bodyPr wrap="square" lIns="0" tIns="0" rIns="0" bIns="0" rtlCol="0" anchor="b"/>
+          <a:lstStyle/>
+          <a:p>
+            <a:pPr algn="ctr" indent="0" marL="0">
+              <a:buNone/>
+            </a:pPr>
+            <a:r>
+              <a:rPr lang="en-US" sz="7200" dirty="0">
+                <a:solidFill>
+                  <a:schemeClr val="tx1"/>
+                </a:solidFill>
+                <a:latin typeface="DM Sans" pitchFamily="34" charset="0"/>
+                <a:ea typeface="DM Sans" pitchFamily="34" charset="-122"/>
+                <a:cs typeface="DM Sans" pitchFamily="34" charset="-120"/>
+              </a:rPr>
+              <a:t>£2,500</a:t>
+            </a:r>
+            <a:endParaRPr lang="en-US" sz="7200" dirty="0"/>
+          </a:p>
+        </p:txBody>
+      </p:sp>
+      <p:sp>
+        <p:nvSpPr>
+          <p:cNvPr id="13" name="text-266"/>
+          <p:cNvSpPr txBox="1"/>
+          <p:nvPr/>
+        </p:nvSpPr>
+        <p:spPr>
+          <a:xfrm>
+            <a:off x="8001000" y="3794760"/>
+            <a:ext cx="3657600" cy="274320"/>
+          </a:xfrm>
+          <a:prstGeom prst="rect">
+            <a:avLst/>
+          </a:prstGeom>
+          <a:noFill/>
+          <a:ln/>
+        </p:spPr>
+        <p:txBody>
+          <a:bodyPr wrap="square" lIns="0" tIns="0" rIns="0" bIns="0" rtlCol="0" anchor="t"/>
+          <a:lstStyle/>
+          <a:p>
+            <a:pPr algn="ctr" indent="0" marL="0">
+              <a:buNone/>
+            </a:pPr>
+            <a:r>
+              <a:rPr lang="en-US" sz="1300" dirty="0">
+                <a:solidFill>
+                  <a:schemeClr val="tx1"/>
+                </a:solidFill>
+                <a:latin typeface="DM Mono" pitchFamily="34" charset="0"/>
+                <a:ea typeface="DM Mono" pitchFamily="34" charset="-122"/>
+                <a:cs typeface="DM Mono" pitchFamily="34" charset="-120"/>
+              </a:rPr>
+              <a:t>Month 4 onwards</a:t>
+            </a:r>
+            <a:endParaRPr lang="en-US" sz="1300" dirty="0"/>
+          </a:p>
+        </p:txBody>
+      </p:sp>
+      <p:sp>
+        <p:nvSpPr>
+          <p:cNvPr id="14" name="text-267"/>
+          <p:cNvSpPr txBox="1"/>
+          <p:nvPr/>
+        </p:nvSpPr>
+        <p:spPr>
+          <a:xfrm>
+            <a:off x="8366760" y="4160520"/>
+            <a:ext cx="2926080" cy="731520"/>
+          </a:xfrm>
+          <a:prstGeom prst="rect">
+            <a:avLst/>
+          </a:prstGeom>
+          <a:noFill/>
+          <a:ln/>
+        </p:spPr>
+        <p:txBody>
+          <a:bodyPr wrap="square" lIns="0" tIns="0" rIns="0" bIns="0" rtlCol="0" anchor="t"/>
+          <a:lstStyle/>
+          <a:p>
+            <a:pPr algn="ctr" indent="0" marL="0">
+              <a:buNone/>
+            </a:pPr>
+            <a:r>
+              <a:rPr lang="en-US" sz="1500" dirty="0">
+                <a:solidFill>
+                  <a:schemeClr val="accent5"/>
+                </a:solidFill>
+                <a:latin typeface="DM Sans" pitchFamily="34" charset="0"/>
+                <a:ea typeface="DM Sans" pitchFamily="34" charset="-122"/>
+                <a:cs typeface="DM Sans" pitchFamily="34" charset="-120"/>
+              </a:rPr>
+              <a:t>Every platform, agent, Skool and webinar tool</a:t>
+            </a:r>
+            <a:endParaRPr lang="en-US" sz="1500" dirty="0"/>
+          </a:p>
+        </p:txBody>
+      </p:sp>
+      <p:sp>
+        <p:nvSpPr>
+          <p:cNvPr id="15" name="rule-268"/>
           <p:cNvSpPr/>
           <p:nvPr/>
         </p:nvSpPr>
         <p:spPr>
           <a:xfrm>
-            <a:off x="585216" y="3017520"/>
-            <a:ext cx="3291840" cy="0"/>
+            <a:off x="585216" y="5257800"/>
+            <a:ext cx="11018520" cy="0"/>
           </a:xfrm>
           <a:prstGeom prst="line">
             <a:avLst/>
@@ -12196,208 +13263,40 @@
       </p:sp>
       <p:sp>
         <p:nvSpPr>
-          <p:cNvPr id="7" name="text-266"/>
-          <p:cNvSpPr txBox="1"/>
-          <p:nvPr/>
-        </p:nvSpPr>
-        <p:spPr>
-          <a:xfrm>
-            <a:off x="585216" y="3200400"/>
-            <a:ext cx="3291840" cy="2834640"/>
-          </a:xfrm>
-          <a:prstGeom prst="rect">
-            <a:avLst/>
-          </a:prstGeom>
-          <a:noFill/>
-          <a:ln/>
-        </p:spPr>
-        <p:txBody>
-          <a:bodyPr wrap="square" lIns="0" tIns="0" rIns="0" bIns="0" rtlCol="0" anchor="t"/>
-          <a:lstStyle/>
-          <a:p>
-            <a:pPr indent="0" marL="0">
-              <a:buNone/>
-            </a:pPr>
-            <a:r>
-              <a:rPr lang="en-US" sz="1500" dirty="0">
-                <a:solidFill>
-                  <a:schemeClr val="accent5"/>
+          <p:cNvPr id="16" name="text-269"/>
+          <p:cNvSpPr txBox="1"/>
+          <p:nvPr/>
+        </p:nvSpPr>
+        <p:spPr>
+          <a:xfrm>
+            <a:off x="585216" y="5440680"/>
+            <a:ext cx="11018520" cy="640080"/>
+          </a:xfrm>
+          <a:prstGeom prst="rect">
+            <a:avLst/>
+          </a:prstGeom>
+          <a:noFill/>
+          <a:ln/>
+        </p:spPr>
+        <p:txBody>
+          <a:bodyPr wrap="square" lIns="0" tIns="0" rIns="0" bIns="0" rtlCol="0" anchor="t"/>
+          <a:lstStyle/>
+          <a:p>
+            <a:pPr indent="0" marL="0">
+              <a:buNone/>
+            </a:pPr>
+            <a:r>
+              <a:rPr lang="en-US" sz="1600" dirty="0">
+                <a:solidFill>
+                  <a:schemeClr val="tx1"/>
                 </a:solidFill>
                 <a:latin typeface="DM Sans" pitchFamily="34" charset="0"/>
                 <a:ea typeface="DM Sans" pitchFamily="34" charset="-122"/>
                 <a:cs typeface="DM Sans" pitchFamily="34" charset="-120"/>
               </a:rPr>
-              <a:t>Year-one fee: £26,400.</a:t>
-            </a:r>
-            <a:endParaRPr lang="en-US" sz="1500" dirty="0"/>
-          </a:p>
-          <a:p>
-            <a:pPr indent="0" marL="0">
-              <a:buNone/>
-            </a:pPr>
-            <a:endParaRPr lang="en-US" sz="1500" dirty="0"/>
-          </a:p>
-          <a:p>
-            <a:pPr indent="0" marL="0">
-              <a:buNone/>
-            </a:pPr>
-            <a:r>
-              <a:rPr lang="en-US" sz="1500" dirty="0">
-                <a:solidFill>
-                  <a:schemeClr val="accent5"/>
-                </a:solidFill>
-                <a:latin typeface="DM Sans" pitchFamily="34" charset="0"/>
-                <a:ea typeface="DM Sans" pitchFamily="34" charset="-122"/>
-                <a:cs typeface="DM Sans" pitchFamily="34" charset="-120"/>
-              </a:rPr>
-              <a:t>Return on the fee, on profit at a 50% margin:</a:t>
-            </a:r>
-            <a:endParaRPr lang="en-US" sz="1500" dirty="0"/>
-          </a:p>
-          <a:p>
-            <a:pPr indent="0" marL="0">
-              <a:buNone/>
-            </a:pPr>
-            <a:r>
-              <a:rPr lang="en-US" sz="1500" dirty="0">
-                <a:solidFill>
-                  <a:schemeClr val="accent5"/>
-                </a:solidFill>
-                <a:latin typeface="DM Sans" pitchFamily="34" charset="0"/>
-                <a:ea typeface="DM Sans" pitchFamily="34" charset="-122"/>
-                <a:cs typeface="DM Sans" pitchFamily="34" charset="-120"/>
-              </a:rPr>
-              <a:t>0.9× one small piece</a:t>
-            </a:r>
-            <a:endParaRPr lang="en-US" sz="1500" dirty="0"/>
-          </a:p>
-          <a:p>
-            <a:pPr indent="0" marL="0">
-              <a:buNone/>
-            </a:pPr>
-            <a:r>
-              <a:rPr lang="en-US" sz="1500" dirty="0">
-                <a:solidFill>
-                  <a:schemeClr val="accent5"/>
-                </a:solidFill>
-                <a:latin typeface="DM Sans" pitchFamily="34" charset="0"/>
-                <a:ea typeface="DM Sans" pitchFamily="34" charset="-122"/>
-                <a:cs typeface="DM Sans" pitchFamily="34" charset="-120"/>
-              </a:rPr>
-              <a:t>2.8× one mid-size engagement</a:t>
-            </a:r>
-            <a:endParaRPr lang="en-US" sz="1500" dirty="0"/>
-          </a:p>
-          <a:p>
-            <a:pPr indent="0" marL="0">
-              <a:buNone/>
-            </a:pPr>
-            <a:r>
-              <a:rPr lang="en-US" sz="1500" dirty="0">
-                <a:solidFill>
-                  <a:schemeClr val="accent5"/>
-                </a:solidFill>
-                <a:latin typeface="DM Sans" pitchFamily="34" charset="0"/>
-                <a:ea typeface="DM Sans" pitchFamily="34" charset="-122"/>
-                <a:cs typeface="DM Sans" pitchFamily="34" charset="-120"/>
-              </a:rPr>
-              <a:t>9.5× two engagements</a:t>
-            </a:r>
-            <a:endParaRPr lang="en-US" sz="1500" dirty="0"/>
-          </a:p>
-        </p:txBody>
-      </p:sp>
-      <p:sp>
-        <p:nvSpPr>
-          <p:cNvPr id="8" name="text-267"/>
-          <p:cNvSpPr txBox="1"/>
-          <p:nvPr/>
-        </p:nvSpPr>
-        <p:spPr>
-          <a:xfrm>
-            <a:off x="4480560" y="2651760"/>
-            <a:ext cx="7132320" cy="274320"/>
-          </a:xfrm>
-          <a:prstGeom prst="rect">
-            <a:avLst/>
-          </a:prstGeom>
-          <a:noFill/>
-          <a:ln/>
-        </p:spPr>
-        <p:txBody>
-          <a:bodyPr wrap="square" lIns="0" tIns="0" rIns="0" bIns="0" rtlCol="0" anchor="t"/>
-          <a:lstStyle/>
-          <a:p>
-            <a:pPr indent="0" marL="0">
-              <a:buNone/>
-            </a:pPr>
-            <a:r>
-              <a:rPr lang="en-US" sz="1300" dirty="0">
-                <a:solidFill>
-                  <a:schemeClr val="tx1"/>
-                </a:solidFill>
-                <a:latin typeface="DM Mono" pitchFamily="34" charset="0"/>
-                <a:ea typeface="DM Mono" pitchFamily="34" charset="-122"/>
-                <a:cs typeface="DM Mono" pitchFamily="34" charset="-120"/>
-              </a:rPr>
-              <a:t>Year-one fee vs. value of a client win (£)</a:t>
-            </a:r>
-            <a:endParaRPr lang="en-US" sz="1300" dirty="0"/>
-          </a:p>
-        </p:txBody>
-      </p:sp>
-      <p:graphicFrame>
-        <p:nvGraphicFramePr>
-          <p:cNvPr id="9" name="payback-chart" descr=""/>
-          <p:cNvGraphicFramePr/>
-          <p:nvPr/>
-        </p:nvGraphicFramePr>
-        <p:xfrm>
-          <a:off x="4480560" y="2971800"/>
-          <a:ext cx="7132320" cy="3063240"/>
-        </p:xfrm>
-        <a:graphic xmlns:a="http://schemas.openxmlformats.org/drawingml/2006/main">
-          <a:graphicData uri="http://schemas.openxmlformats.org/drawingml/2006/chart">
-            <c:chart xmlns:c="http://schemas.openxmlformats.org/drawingml/2006/chart" r:id="rId1"/>
-          </a:graphicData>
-        </a:graphic>
-      </p:graphicFrame>
-      <p:sp>
-        <p:nvSpPr>
-          <p:cNvPr id="10" name="text-268"/>
-          <p:cNvSpPr txBox="1"/>
-          <p:nvPr/>
-        </p:nvSpPr>
-        <p:spPr>
-          <a:xfrm>
-            <a:off x="4480560" y="6172200"/>
-            <a:ext cx="7132320" cy="274320"/>
-          </a:xfrm>
-          <a:prstGeom prst="rect">
-            <a:avLst/>
-          </a:prstGeom>
-          <a:noFill/>
-          <a:ln/>
-        </p:spPr>
-        <p:txBody>
-          <a:bodyPr wrap="square" lIns="0" tIns="0" rIns="0" bIns="0" rtlCol="0" anchor="t"/>
-          <a:lstStyle/>
-          <a:p>
-            <a:pPr indent="0" marL="0">
-              <a:buNone/>
-            </a:pPr>
-            <a:r>
-              <a:rPr lang="en-US" sz="1000" dirty="0">
-                <a:solidFill>
-                  <a:schemeClr val="accent2"/>
-                </a:solidFill>
-                <a:latin typeface="DM Mono" pitchFamily="34" charset="0"/>
-                <a:ea typeface="DM Mono" pitchFamily="34" charset="-122"/>
-                <a:cs typeface="DM Mono" pitchFamily="34" charset="-120"/>
-              </a:rPr>
-              <a:t>Illustrative figures from the consultancy plan, not results</a:t>
-            </a:r>
-            <a:endParaRPr lang="en-US" sz="1000" dirty="0"/>
+              <a:t>Our promise: at day 60 we review the results together. If we’re behind plan, we fix it in writing, or the client can leave.</a:t>
+            </a:r>
+            <a:endParaRPr lang="en-US" sz="1600" dirty="0"/>
           </a:p>
         </p:txBody>
       </p:sp>
@@ -12428,7 +13327,7 @@
       </p:grpSpPr>
       <p:sp>
         <p:nvSpPr>
-          <p:cNvPr id="2" name="text-269"/>
+          <p:cNvPr id="2" name="text-270"/>
           <p:cNvSpPr txBox="1"/>
           <p:nvPr/>
         </p:nvSpPr>
@@ -12467,26 +13366,26 @@
       </p:sp>
       <p:sp>
         <p:nvSpPr>
-          <p:cNvPr id="3" name="text-270"/>
-          <p:cNvSpPr txBox="1"/>
-          <p:nvPr/>
-        </p:nvSpPr>
-        <p:spPr>
-          <a:xfrm>
-            <a:off x="7406640" y="658368"/>
-            <a:ext cx="2286000" cy="274320"/>
-          </a:xfrm>
-          <a:prstGeom prst="rect">
-            <a:avLst/>
-          </a:prstGeom>
-          <a:noFill/>
-          <a:ln/>
-        </p:spPr>
-        <p:txBody>
-          <a:bodyPr wrap="square" lIns="0" tIns="0" rIns="0" bIns="0" rtlCol="0" anchor="t"/>
-          <a:lstStyle/>
-          <a:p>
-            <a:pPr indent="0" marL="0">
+          <p:cNvPr id="3" name="text-271"/>
+          <p:cNvSpPr txBox="1"/>
+          <p:nvPr/>
+        </p:nvSpPr>
+        <p:spPr>
+          <a:xfrm>
+            <a:off x="6117336" y="658368"/>
+            <a:ext cx="5486400" cy="274320"/>
+          </a:xfrm>
+          <a:prstGeom prst="rect">
+            <a:avLst/>
+          </a:prstGeom>
+          <a:noFill/>
+          <a:ln/>
+        </p:spPr>
+        <p:txBody>
+          <a:bodyPr wrap="square" lIns="0" tIns="0" rIns="0" bIns="0" rtlCol="0" anchor="t"/>
+          <a:lstStyle/>
+          <a:p>
+            <a:pPr algn="r" indent="0" marL="0">
               <a:buNone/>
             </a:pPr>
             <a:r>
@@ -12498,7 +13397,7 @@
                 <a:ea typeface="DM Mono" pitchFamily="34" charset="-122"/>
                 <a:cs typeface="DM Mono" pitchFamily="34" charset="-120"/>
               </a:rPr>
-              <a:t>October 2026</a:t>
+              <a:t>What we offer</a:t>
             </a:r>
             <a:endParaRPr lang="en-US" sz="1300" dirty="0"/>
           </a:p>
@@ -12506,26 +13405,68 @@
       </p:sp>
       <p:sp>
         <p:nvSpPr>
-          <p:cNvPr id="4" name="text-271"/>
-          <p:cNvSpPr txBox="1"/>
-          <p:nvPr/>
-        </p:nvSpPr>
-        <p:spPr>
-          <a:xfrm>
-            <a:off x="9317736" y="658368"/>
-            <a:ext cx="2286000" cy="274320"/>
-          </a:xfrm>
-          <a:prstGeom prst="rect">
-            <a:avLst/>
-          </a:prstGeom>
-          <a:noFill/>
-          <a:ln/>
-        </p:spPr>
-        <p:txBody>
-          <a:bodyPr wrap="square" lIns="0" tIns="0" rIns="0" bIns="0" rtlCol="0" anchor="t"/>
-          <a:lstStyle/>
-          <a:p>
-            <a:pPr algn="r" indent="0" marL="0">
+          <p:cNvPr id="4" name="text-272"/>
+          <p:cNvSpPr txBox="1"/>
+          <p:nvPr/>
+        </p:nvSpPr>
+        <p:spPr>
+          <a:xfrm>
+            <a:off x="566928" y="1097280"/>
+            <a:ext cx="11018520" cy="1188720"/>
+          </a:xfrm>
+          <a:prstGeom prst="rect">
+            <a:avLst/>
+          </a:prstGeom>
+          <a:noFill/>
+          <a:ln/>
+        </p:spPr>
+        <p:txBody>
+          <a:bodyPr wrap="square" lIns="0" tIns="0" rIns="0" bIns="0" rtlCol="0" anchor="t"/>
+          <a:lstStyle/>
+          <a:p>
+            <a:pPr indent="0" marL="0">
+              <a:lnSpc>
+                <a:spcPct val="95000"/>
+              </a:lnSpc>
+              <a:buNone/>
+            </a:pPr>
+            <a:r>
+              <a:rPr lang="en-US" sz="4000" dirty="0">
+                <a:solidFill>
+                  <a:schemeClr val="tx1"/>
+                </a:solidFill>
+                <a:latin typeface="DM Sans" pitchFamily="34" charset="0"/>
+                <a:ea typeface="DM Sans" pitchFamily="34" charset="-122"/>
+                <a:cs typeface="DM Sans" pitchFamily="34" charset="-120"/>
+              </a:rPr>
+              <a:t>How the year-one fee adds up</a:t>
+            </a:r>
+            <a:endParaRPr lang="en-US" sz="4000" dirty="0"/>
+          </a:p>
+        </p:txBody>
+      </p:sp>
+      <p:sp>
+        <p:nvSpPr>
+          <p:cNvPr id="5" name="text-273"/>
+          <p:cNvSpPr txBox="1"/>
+          <p:nvPr/>
+        </p:nvSpPr>
+        <p:spPr>
+          <a:xfrm>
+            <a:off x="585216" y="2651760"/>
+            <a:ext cx="3291840" cy="274320"/>
+          </a:xfrm>
+          <a:prstGeom prst="rect">
+            <a:avLst/>
+          </a:prstGeom>
+          <a:noFill/>
+          <a:ln/>
+        </p:spPr>
+        <p:txBody>
+          <a:bodyPr wrap="square" lIns="0" tIns="0" rIns="0" bIns="0" rtlCol="0" anchor="t"/>
+          <a:lstStyle/>
+          <a:p>
+            <a:pPr indent="0" marL="0">
               <a:buNone/>
             </a:pPr>
             <a:r>
@@ -12537,7 +13478,7 @@
                 <a:ea typeface="DM Mono" pitchFamily="34" charset="-122"/>
                 <a:cs typeface="DM Mono" pitchFamily="34" charset="-120"/>
               </a:rPr>
-              <a:t>Confidential</a:t>
+              <a:t>Insights</a:t>
             </a:r>
             <a:endParaRPr lang="en-US" sz="1300" dirty="0"/>
           </a:p>
@@ -12545,89 +13486,205 @@
       </p:sp>
       <p:sp>
         <p:nvSpPr>
-          <p:cNvPr id="5" name="text-272"/>
-          <p:cNvSpPr txBox="1"/>
-          <p:nvPr/>
-        </p:nvSpPr>
-        <p:spPr>
-          <a:xfrm>
-            <a:off x="548640" y="2926080"/>
-            <a:ext cx="9326880" cy="3429000"/>
-          </a:xfrm>
-          <a:prstGeom prst="rect">
-            <a:avLst/>
-          </a:prstGeom>
-          <a:noFill/>
-          <a:ln/>
-        </p:spPr>
-        <p:txBody>
-          <a:bodyPr wrap="square" lIns="0" tIns="0" rIns="0" bIns="0" rtlCol="0" anchor="b"/>
-          <a:lstStyle/>
-          <a:p>
-            <a:pPr indent="0" marL="0">
-              <a:lnSpc>
-                <a:spcPct val="86000"/>
-              </a:lnSpc>
-              <a:buNone/>
-            </a:pPr>
-            <a:r>
-              <a:rPr lang="en-US" sz="11200" dirty="0">
-                <a:solidFill>
-                  <a:schemeClr val="tx1"/>
-                </a:solidFill>
-                <a:latin typeface="DM Sans" pitchFamily="34" charset="0"/>
-                <a:ea typeface="DM Sans" pitchFamily="34" charset="-122"/>
-                <a:cs typeface="DM Sans" pitchFamily="34" charset="-120"/>
-              </a:rPr>
-              <a:t>Your</a:t>
-            </a:r>
-            <a:endParaRPr lang="en-US" sz="11200" dirty="0"/>
-          </a:p>
-          <a:p>
-            <a:pPr indent="0" marL="0">
-              <a:lnSpc>
-                <a:spcPct val="86000"/>
-              </a:lnSpc>
-              <a:buNone/>
-            </a:pPr>
-            <a:r>
-              <a:rPr lang="en-US" sz="11200" dirty="0">
-                <a:solidFill>
-                  <a:schemeClr val="tx1"/>
-                </a:solidFill>
-                <a:latin typeface="DM Sans" pitchFamily="34" charset="0"/>
-                <a:ea typeface="DM Sans" pitchFamily="34" charset="-122"/>
-                <a:cs typeface="DM Sans" pitchFamily="34" charset="-120"/>
-              </a:rPr>
-              <a:t>role</a:t>
-            </a:r>
-            <a:endParaRPr lang="en-US" sz="11200" dirty="0"/>
-          </a:p>
-        </p:txBody>
-      </p:sp>
-      <p:sp>
-        <p:nvSpPr>
-          <p:cNvPr id="6" name="arrow-273"/>
+          <p:cNvPr id="6" name="rule-274"/>
           <p:cNvSpPr/>
           <p:nvPr/>
         </p:nvSpPr>
         <p:spPr>
           <a:xfrm>
-            <a:off x="10927080" y="5440680"/>
-            <a:ext cx="658368" cy="658368"/>
+            <a:off x="585216" y="3017520"/>
+            <a:ext cx="3291840" cy="0"/>
           </a:xfrm>
           <a:prstGeom prst="line">
             <a:avLst/>
           </a:prstGeom>
           <a:noFill/>
-          <a:ln w="88900">
+          <a:ln w="9525">
             <a:solidFill>
               <a:schemeClr val="tx1"/>
             </a:solidFill>
             <a:prstDash val="solid"/>
-            <a:tailEnd type="arrow"/>
           </a:ln>
         </p:spPr>
+      </p:sp>
+      <p:sp>
+        <p:nvSpPr>
+          <p:cNvPr id="7" name="text-275"/>
+          <p:cNvSpPr txBox="1"/>
+          <p:nvPr/>
+        </p:nvSpPr>
+        <p:spPr>
+          <a:xfrm>
+            <a:off x="585216" y="3200400"/>
+            <a:ext cx="3291840" cy="2834640"/>
+          </a:xfrm>
+          <a:prstGeom prst="rect">
+            <a:avLst/>
+          </a:prstGeom>
+          <a:noFill/>
+          <a:ln/>
+        </p:spPr>
+        <p:txBody>
+          <a:bodyPr wrap="square" lIns="0" tIns="0" rIns="0" bIns="0" rtlCol="0" anchor="t"/>
+          <a:lstStyle/>
+          <a:p>
+            <a:pPr indent="0" marL="0">
+              <a:buNone/>
+            </a:pPr>
+            <a:r>
+              <a:rPr lang="en-US" sz="1500" dirty="0">
+                <a:solidFill>
+                  <a:schemeClr val="accent5"/>
+                </a:solidFill>
+                <a:latin typeface="DM Sans" pitchFamily="34" charset="0"/>
+                <a:ea typeface="DM Sans" pitchFamily="34" charset="-122"/>
+                <a:cs typeface="DM Sans" pitchFamily="34" charset="-120"/>
+              </a:rPr>
+              <a:t>Months 1–3 cost £3,900 at the founding price, instead of £7,500 at the standard fee.</a:t>
+            </a:r>
+            <a:endParaRPr lang="en-US" sz="1500" dirty="0"/>
+          </a:p>
+          <a:p>
+            <a:pPr indent="0" marL="0">
+              <a:buNone/>
+            </a:pPr>
+            <a:endParaRPr lang="en-US" sz="1500" dirty="0"/>
+          </a:p>
+          <a:p>
+            <a:pPr indent="0" marL="0">
+              <a:buNone/>
+            </a:pPr>
+            <a:r>
+              <a:rPr lang="en-US" sz="1500" dirty="0">
+                <a:solidFill>
+                  <a:schemeClr val="accent5"/>
+                </a:solidFill>
+                <a:latin typeface="DM Sans" pitchFamily="34" charset="0"/>
+                <a:ea typeface="DM Sans" pitchFamily="34" charset="-122"/>
+                <a:cs typeface="DM Sans" pitchFamily="34" charset="-120"/>
+              </a:rPr>
+              <a:t>From month 4 the fee is £2,500 a month, with every tool included.</a:t>
+            </a:r>
+            <a:endParaRPr lang="en-US" sz="1500" dirty="0"/>
+          </a:p>
+          <a:p>
+            <a:pPr indent="0" marL="0">
+              <a:buNone/>
+            </a:pPr>
+            <a:endParaRPr lang="en-US" sz="1500" dirty="0"/>
+          </a:p>
+          <a:p>
+            <a:pPr indent="0" marL="0">
+              <a:buNone/>
+            </a:pPr>
+            <a:r>
+              <a:rPr lang="en-US" sz="1500" dirty="0">
+                <a:solidFill>
+                  <a:schemeClr val="accent5"/>
+                </a:solidFill>
+                <a:latin typeface="DM Sans" pitchFamily="34" charset="0"/>
+                <a:ea typeface="DM Sans" pitchFamily="34" charset="-122"/>
+                <a:cs typeface="DM Sans" pitchFamily="34" charset="-120"/>
+              </a:rPr>
+              <a:t>Year one in total: £26,400.</a:t>
+            </a:r>
+            <a:endParaRPr lang="en-US" sz="1500" dirty="0"/>
+          </a:p>
+        </p:txBody>
+      </p:sp>
+      <p:sp>
+        <p:nvSpPr>
+          <p:cNvPr id="8" name="text-276"/>
+          <p:cNvSpPr txBox="1"/>
+          <p:nvPr/>
+        </p:nvSpPr>
+        <p:spPr>
+          <a:xfrm>
+            <a:off x="4480560" y="2651760"/>
+            <a:ext cx="7132320" cy="274320"/>
+          </a:xfrm>
+          <a:prstGeom prst="rect">
+            <a:avLst/>
+          </a:prstGeom>
+          <a:noFill/>
+          <a:ln/>
+        </p:spPr>
+        <p:txBody>
+          <a:bodyPr wrap="square" lIns="0" tIns="0" rIns="0" bIns="0" rtlCol="0" anchor="t"/>
+          <a:lstStyle/>
+          <a:p>
+            <a:pPr indent="0" marL="0">
+              <a:buNone/>
+            </a:pPr>
+            <a:r>
+              <a:rPr lang="en-US" sz="1300" dirty="0">
+                <a:solidFill>
+                  <a:schemeClr val="tx1"/>
+                </a:solidFill>
+                <a:latin typeface="DM Mono" pitchFamily="34" charset="0"/>
+                <a:ea typeface="DM Mono" pitchFamily="34" charset="-122"/>
+                <a:cs typeface="DM Mono" pitchFamily="34" charset="-120"/>
+              </a:rPr>
+              <a:t>Cumulative fee by month (£ thousand)</a:t>
+            </a:r>
+            <a:endParaRPr lang="en-US" sz="1300" dirty="0"/>
+          </a:p>
+        </p:txBody>
+      </p:sp>
+      <p:graphicFrame>
+        <p:nvGraphicFramePr>
+          <p:cNvPr id="9" name="fee-chart" descr=""/>
+          <p:cNvGraphicFramePr/>
+          <p:nvPr/>
+        </p:nvGraphicFramePr>
+        <p:xfrm>
+          <a:off x="4480560" y="2971800"/>
+          <a:ext cx="7132320" cy="3063240"/>
+        </p:xfrm>
+        <a:graphic xmlns:a="http://schemas.openxmlformats.org/drawingml/2006/main">
+          <a:graphicData uri="http://schemas.openxmlformats.org/drawingml/2006/chart">
+            <c:chart xmlns:c="http://schemas.openxmlformats.org/drawingml/2006/chart" r:id="rId1"/>
+          </a:graphicData>
+        </a:graphic>
+      </p:graphicFrame>
+      <p:sp>
+        <p:nvSpPr>
+          <p:cNvPr id="10" name="text-277"/>
+          <p:cNvSpPr txBox="1"/>
+          <p:nvPr/>
+        </p:nvSpPr>
+        <p:spPr>
+          <a:xfrm>
+            <a:off x="4480560" y="6172200"/>
+            <a:ext cx="7132320" cy="274320"/>
+          </a:xfrm>
+          <a:prstGeom prst="rect">
+            <a:avLst/>
+          </a:prstGeom>
+          <a:noFill/>
+          <a:ln/>
+        </p:spPr>
+        <p:txBody>
+          <a:bodyPr wrap="square" lIns="0" tIns="0" rIns="0" bIns="0" rtlCol="0" anchor="t"/>
+          <a:lstStyle/>
+          <a:p>
+            <a:pPr indent="0" marL="0">
+              <a:buNone/>
+            </a:pPr>
+            <a:r>
+              <a:rPr lang="en-US" sz="1000" dirty="0">
+                <a:solidFill>
+                  <a:schemeClr val="accent2"/>
+                </a:solidFill>
+                <a:latin typeface="DM Mono" pitchFamily="34" charset="0"/>
+                <a:ea typeface="DM Mono" pitchFamily="34" charset="-122"/>
+                <a:cs typeface="DM Mono" pitchFamily="34" charset="-120"/>
+              </a:rPr>
+              <a:t>Founding-client price. Prices exclude VAT</a:t>
+            </a:r>
+            <a:endParaRPr lang="en-US" sz="1000" dirty="0"/>
+          </a:p>
+        </p:txBody>
       </p:sp>
     </p:spTree>
   </p:cSld>
@@ -12656,7 +13713,7 @@
       </p:grpSpPr>
       <p:sp>
         <p:nvSpPr>
-          <p:cNvPr id="3" name="text-274"/>
+          <p:cNvPr id="2" name="text-278"/>
           <p:cNvSpPr txBox="1"/>
           <p:nvPr/>
         </p:nvSpPr>
@@ -12695,7 +13752,7 @@
       </p:sp>
       <p:sp>
         <p:nvSpPr>
-          <p:cNvPr id="4" name="text-275"/>
+          <p:cNvPr id="3" name="text-279"/>
           <p:cNvSpPr txBox="1"/>
           <p:nvPr/>
         </p:nvSpPr>
@@ -12726,7 +13783,7 @@
                 <a:ea typeface="DM Mono" pitchFamily="34" charset="-122"/>
                 <a:cs typeface="DM Mono" pitchFamily="34" charset="-120"/>
               </a:rPr>
-              <a:t>Your role</a:t>
+              <a:t>What we offer</a:t>
             </a:r>
             <a:endParaRPr lang="en-US" sz="1300" dirty="0"/>
           </a:p>
@@ -12734,7 +13791,7 @@
       </p:sp>
       <p:sp>
         <p:nvSpPr>
-          <p:cNvPr id="5" name="text-276"/>
+          <p:cNvPr id="4" name="text-280"/>
           <p:cNvSpPr txBox="1"/>
           <p:nvPr/>
         </p:nvSpPr>
@@ -12768,7 +13825,7 @@
                 <a:ea typeface="DM Sans" pitchFamily="34" charset="-122"/>
                 <a:cs typeface="DM Sans" pitchFamily="34" charset="-120"/>
               </a:rPr>
-              <a:t>Three ways you can help us grow</a:t>
+              <a:t>One client win can pay for the whole year</a:t>
             </a:r>
             <a:endParaRPr lang="en-US" sz="4000" dirty="0"/>
           </a:p>
@@ -12776,14 +13833,53 @@
       </p:sp>
       <p:sp>
         <p:nvSpPr>
-          <p:cNvPr id="6" name="rule-277"/>
+          <p:cNvPr id="5" name="text-281"/>
+          <p:cNvSpPr txBox="1"/>
+          <p:nvPr/>
+        </p:nvSpPr>
+        <p:spPr>
+          <a:xfrm>
+            <a:off x="585216" y="2651760"/>
+            <a:ext cx="3291840" cy="274320"/>
+          </a:xfrm>
+          <a:prstGeom prst="rect">
+            <a:avLst/>
+          </a:prstGeom>
+          <a:noFill/>
+          <a:ln/>
+        </p:spPr>
+        <p:txBody>
+          <a:bodyPr wrap="square" lIns="0" tIns="0" rIns="0" bIns="0" rtlCol="0" anchor="t"/>
+          <a:lstStyle/>
+          <a:p>
+            <a:pPr indent="0" marL="0">
+              <a:buNone/>
+            </a:pPr>
+            <a:r>
+              <a:rPr lang="en-US" sz="1300" dirty="0">
+                <a:solidFill>
+                  <a:schemeClr val="tx1"/>
+                </a:solidFill>
+                <a:latin typeface="DM Mono" pitchFamily="34" charset="0"/>
+                <a:ea typeface="DM Mono" pitchFamily="34" charset="-122"/>
+                <a:cs typeface="DM Mono" pitchFamily="34" charset="-120"/>
+              </a:rPr>
+              <a:t>Insights</a:t>
+            </a:r>
+            <a:endParaRPr lang="en-US" sz="1300" dirty="0"/>
+          </a:p>
+        </p:txBody>
+      </p:sp>
+      <p:sp>
+        <p:nvSpPr>
+          <p:cNvPr id="6" name="rule-282"/>
           <p:cNvSpPr/>
           <p:nvPr/>
         </p:nvSpPr>
         <p:spPr>
           <a:xfrm>
-            <a:off x="585216" y="2743200"/>
-            <a:ext cx="3429000" cy="0"/>
+            <a:off x="585216" y="3017520"/>
+            <a:ext cx="3291840" cy="0"/>
           </a:xfrm>
           <a:prstGeom prst="line">
             <a:avLst/>
@@ -12799,14 +13895,127 @@
       </p:sp>
       <p:sp>
         <p:nvSpPr>
-          <p:cNvPr id="7" name="text-278"/>
-          <p:cNvSpPr txBox="1"/>
-          <p:nvPr/>
-        </p:nvSpPr>
-        <p:spPr>
-          <a:xfrm>
-            <a:off x="585216" y="2926080"/>
-            <a:ext cx="3429000" cy="274320"/>
+          <p:cNvPr id="7" name="text-283"/>
+          <p:cNvSpPr txBox="1"/>
+          <p:nvPr/>
+        </p:nvSpPr>
+        <p:spPr>
+          <a:xfrm>
+            <a:off x="585216" y="3200400"/>
+            <a:ext cx="3291840" cy="2834640"/>
+          </a:xfrm>
+          <a:prstGeom prst="rect">
+            <a:avLst/>
+          </a:prstGeom>
+          <a:noFill/>
+          <a:ln/>
+        </p:spPr>
+        <p:txBody>
+          <a:bodyPr wrap="square" lIns="0" tIns="0" rIns="0" bIns="0" rtlCol="0" anchor="t"/>
+          <a:lstStyle/>
+          <a:p>
+            <a:pPr indent="0" marL="0">
+              <a:buNone/>
+            </a:pPr>
+            <a:r>
+              <a:rPr lang="en-US" sz="1500" dirty="0">
+                <a:solidFill>
+                  <a:schemeClr val="accent5"/>
+                </a:solidFill>
+                <a:latin typeface="DM Sans" pitchFamily="34" charset="0"/>
+                <a:ea typeface="DM Sans" pitchFamily="34" charset="-122"/>
+                <a:cs typeface="DM Sans" pitchFamily="34" charset="-120"/>
+              </a:rPr>
+              <a:t>Year-one fee: £26,400.</a:t>
+            </a:r>
+            <a:endParaRPr lang="en-US" sz="1500" dirty="0"/>
+          </a:p>
+          <a:p>
+            <a:pPr indent="0" marL="0">
+              <a:buNone/>
+            </a:pPr>
+            <a:endParaRPr lang="en-US" sz="1500" dirty="0"/>
+          </a:p>
+          <a:p>
+            <a:pPr indent="0" marL="0">
+              <a:buNone/>
+            </a:pPr>
+            <a:r>
+              <a:rPr lang="en-US" sz="1500" dirty="0">
+                <a:solidFill>
+                  <a:schemeClr val="accent5"/>
+                </a:solidFill>
+                <a:latin typeface="DM Sans" pitchFamily="34" charset="0"/>
+                <a:ea typeface="DM Sans" pitchFamily="34" charset="-122"/>
+                <a:cs typeface="DM Sans" pitchFamily="34" charset="-120"/>
+              </a:rPr>
+              <a:t>Return on the fee, on profit at a 50% margin:</a:t>
+            </a:r>
+            <a:endParaRPr lang="en-US" sz="1500" dirty="0"/>
+          </a:p>
+          <a:p>
+            <a:pPr indent="0" marL="0">
+              <a:buNone/>
+            </a:pPr>
+            <a:r>
+              <a:rPr lang="en-US" sz="1500" dirty="0">
+                <a:solidFill>
+                  <a:schemeClr val="accent5"/>
+                </a:solidFill>
+                <a:latin typeface="DM Sans" pitchFamily="34" charset="0"/>
+                <a:ea typeface="DM Sans" pitchFamily="34" charset="-122"/>
+                <a:cs typeface="DM Sans" pitchFamily="34" charset="-120"/>
+              </a:rPr>
+              <a:t>0.9× one small piece</a:t>
+            </a:r>
+            <a:endParaRPr lang="en-US" sz="1500" dirty="0"/>
+          </a:p>
+          <a:p>
+            <a:pPr indent="0" marL="0">
+              <a:buNone/>
+            </a:pPr>
+            <a:r>
+              <a:rPr lang="en-US" sz="1500" dirty="0">
+                <a:solidFill>
+                  <a:schemeClr val="accent5"/>
+                </a:solidFill>
+                <a:latin typeface="DM Sans" pitchFamily="34" charset="0"/>
+                <a:ea typeface="DM Sans" pitchFamily="34" charset="-122"/>
+                <a:cs typeface="DM Sans" pitchFamily="34" charset="-120"/>
+              </a:rPr>
+              <a:t>2.8× one mid-size engagement</a:t>
+            </a:r>
+            <a:endParaRPr lang="en-US" sz="1500" dirty="0"/>
+          </a:p>
+          <a:p>
+            <a:pPr indent="0" marL="0">
+              <a:buNone/>
+            </a:pPr>
+            <a:r>
+              <a:rPr lang="en-US" sz="1500" dirty="0">
+                <a:solidFill>
+                  <a:schemeClr val="accent5"/>
+                </a:solidFill>
+                <a:latin typeface="DM Sans" pitchFamily="34" charset="0"/>
+                <a:ea typeface="DM Sans" pitchFamily="34" charset="-122"/>
+                <a:cs typeface="DM Sans" pitchFamily="34" charset="-120"/>
+              </a:rPr>
+              <a:t>9.5× two engagements</a:t>
+            </a:r>
+            <a:endParaRPr lang="en-US" sz="1500" dirty="0"/>
+          </a:p>
+        </p:txBody>
+      </p:sp>
+      <p:sp>
+        <p:nvSpPr>
+          <p:cNvPr id="8" name="text-284"/>
+          <p:cNvSpPr txBox="1"/>
+          <p:nvPr/>
+        </p:nvSpPr>
+        <p:spPr>
+          <a:xfrm>
+            <a:off x="4480560" y="2651760"/>
+            <a:ext cx="7132320" cy="274320"/>
           </a:xfrm>
           <a:prstGeom prst="rect">
             <a:avLst/>
@@ -12830,367 +14039,64 @@
                 <a:ea typeface="DM Mono" pitchFamily="34" charset="-122"/>
                 <a:cs typeface="DM Mono" pitchFamily="34" charset="-120"/>
               </a:rPr>
-              <a:t>#1</a:t>
+              <a:t>Year-one fee vs. value of a client win (£)</a:t>
             </a:r>
             <a:endParaRPr lang="en-US" sz="1300" dirty="0"/>
           </a:p>
         </p:txBody>
       </p:sp>
-      <p:sp>
-        <p:nvSpPr>
-          <p:cNvPr id="8" name="text-279"/>
-          <p:cNvSpPr txBox="1"/>
-          <p:nvPr/>
-        </p:nvSpPr>
-        <p:spPr>
-          <a:xfrm>
-            <a:off x="585216" y="3337560"/>
-            <a:ext cx="3429000" cy="822960"/>
-          </a:xfrm>
-          <a:prstGeom prst="rect">
-            <a:avLst/>
-          </a:prstGeom>
-          <a:noFill/>
-          <a:ln/>
-        </p:spPr>
-        <p:txBody>
-          <a:bodyPr wrap="square" lIns="0" tIns="0" rIns="0" bIns="0" rtlCol="0" anchor="t"/>
-          <a:lstStyle/>
-          <a:p>
-            <a:pPr indent="0" marL="0">
-              <a:buNone/>
-            </a:pPr>
-            <a:r>
-              <a:rPr lang="en-US" sz="2400" dirty="0">
-                <a:solidFill>
-                  <a:schemeClr val="tx1"/>
-                </a:solidFill>
-                <a:latin typeface="DM Sans" pitchFamily="34" charset="0"/>
-                <a:ea typeface="DM Sans" pitchFamily="34" charset="-122"/>
-                <a:cs typeface="DM Sans" pitchFamily="34" charset="-120"/>
-              </a:rPr>
-              <a:t>Advise</a:t>
-            </a:r>
-            <a:endParaRPr lang="en-US" sz="2400" dirty="0"/>
-          </a:p>
-        </p:txBody>
-      </p:sp>
-      <p:sp>
-        <p:nvSpPr>
-          <p:cNvPr id="9" name="text-280"/>
-          <p:cNvSpPr txBox="1"/>
-          <p:nvPr/>
-        </p:nvSpPr>
-        <p:spPr>
-          <a:xfrm>
-            <a:off x="585216" y="4160520"/>
-            <a:ext cx="3429000" cy="1280160"/>
-          </a:xfrm>
-          <a:prstGeom prst="rect">
-            <a:avLst/>
-          </a:prstGeom>
-          <a:noFill/>
-          <a:ln/>
-        </p:spPr>
-        <p:txBody>
-          <a:bodyPr wrap="square" lIns="0" tIns="0" rIns="0" bIns="0" rtlCol="0" anchor="t"/>
-          <a:lstStyle/>
-          <a:p>
-            <a:pPr indent="0" marL="0">
-              <a:buNone/>
-            </a:pPr>
-            <a:r>
-              <a:rPr lang="en-US" sz="1500" dirty="0">
-                <a:solidFill>
-                  <a:schemeClr val="accent5"/>
-                </a:solidFill>
-                <a:latin typeface="DM Sans" pitchFamily="34" charset="0"/>
-                <a:ea typeface="DM Sans" pitchFamily="34" charset="-122"/>
-                <a:cs typeface="DM Sans" pitchFamily="34" charset="-120"/>
-              </a:rPr>
-              <a:t>Sharpen our offer, pricing and pitch. Sit in on key pitches and debrief us.</a:t>
-            </a:r>
-            <a:endParaRPr lang="en-US" sz="1500" dirty="0"/>
-          </a:p>
-        </p:txBody>
-      </p:sp>
-      <p:sp>
-        <p:nvSpPr>
-          <p:cNvPr id="10" name="rule-281"/>
-          <p:cNvSpPr/>
-          <p:nvPr/>
-        </p:nvSpPr>
-        <p:spPr>
-          <a:xfrm>
-            <a:off x="4379976" y="2743200"/>
-            <a:ext cx="3429000" cy="0"/>
-          </a:xfrm>
-          <a:prstGeom prst="line">
-            <a:avLst/>
-          </a:prstGeom>
-          <a:noFill/>
-          <a:ln w="9525">
-            <a:solidFill>
-              <a:schemeClr val="tx1"/>
-            </a:solidFill>
-            <a:prstDash val="solid"/>
-          </a:ln>
-        </p:spPr>
-      </p:sp>
-      <p:sp>
-        <p:nvSpPr>
-          <p:cNvPr id="11" name="text-282"/>
-          <p:cNvSpPr txBox="1"/>
-          <p:nvPr/>
-        </p:nvSpPr>
-        <p:spPr>
-          <a:xfrm>
-            <a:off x="4379976" y="2926080"/>
-            <a:ext cx="3429000" cy="274320"/>
-          </a:xfrm>
-          <a:prstGeom prst="rect">
-            <a:avLst/>
-          </a:prstGeom>
-          <a:noFill/>
-          <a:ln/>
-        </p:spPr>
-        <p:txBody>
-          <a:bodyPr wrap="square" lIns="0" tIns="0" rIns="0" bIns="0" rtlCol="0" anchor="t"/>
-          <a:lstStyle/>
-          <a:p>
-            <a:pPr indent="0" marL="0">
-              <a:buNone/>
-            </a:pPr>
-            <a:r>
-              <a:rPr lang="en-US" sz="1300" dirty="0">
-                <a:solidFill>
-                  <a:schemeClr val="tx1"/>
+      <p:graphicFrame>
+        <p:nvGraphicFramePr>
+          <p:cNvPr id="9" name="payback-chart" descr=""/>
+          <p:cNvGraphicFramePr/>
+          <p:nvPr/>
+        </p:nvGraphicFramePr>
+        <p:xfrm>
+          <a:off x="4480560" y="2971800"/>
+          <a:ext cx="7132320" cy="3063240"/>
+        </p:xfrm>
+        <a:graphic xmlns:a="http://schemas.openxmlformats.org/drawingml/2006/main">
+          <a:graphicData uri="http://schemas.openxmlformats.org/drawingml/2006/chart">
+            <c:chart xmlns:c="http://schemas.openxmlformats.org/drawingml/2006/chart" r:id="rId1"/>
+          </a:graphicData>
+        </a:graphic>
+      </p:graphicFrame>
+      <p:sp>
+        <p:nvSpPr>
+          <p:cNvPr id="10" name="text-285"/>
+          <p:cNvSpPr txBox="1"/>
+          <p:nvPr/>
+        </p:nvSpPr>
+        <p:spPr>
+          <a:xfrm>
+            <a:off x="4480560" y="6172200"/>
+            <a:ext cx="7132320" cy="274320"/>
+          </a:xfrm>
+          <a:prstGeom prst="rect">
+            <a:avLst/>
+          </a:prstGeom>
+          <a:noFill/>
+          <a:ln/>
+        </p:spPr>
+        <p:txBody>
+          <a:bodyPr wrap="square" lIns="0" tIns="0" rIns="0" bIns="0" rtlCol="0" anchor="t"/>
+          <a:lstStyle/>
+          <a:p>
+            <a:pPr indent="0" marL="0">
+              <a:buNone/>
+            </a:pPr>
+            <a:r>
+              <a:rPr lang="en-US" sz="1000" dirty="0">
+                <a:solidFill>
+                  <a:schemeClr val="accent2"/>
                 </a:solidFill>
                 <a:latin typeface="DM Mono" pitchFamily="34" charset="0"/>
                 <a:ea typeface="DM Mono" pitchFamily="34" charset="-122"/>
                 <a:cs typeface="DM Mono" pitchFamily="34" charset="-120"/>
               </a:rPr>
-              <a:t>#2</a:t>
-            </a:r>
-            <a:endParaRPr lang="en-US" sz="1300" dirty="0"/>
-          </a:p>
-        </p:txBody>
-      </p:sp>
-      <p:sp>
-        <p:nvSpPr>
-          <p:cNvPr id="12" name="text-283"/>
-          <p:cNvSpPr txBox="1"/>
-          <p:nvPr/>
-        </p:nvSpPr>
-        <p:spPr>
-          <a:xfrm>
-            <a:off x="4379976" y="3337560"/>
-            <a:ext cx="3429000" cy="822960"/>
-          </a:xfrm>
-          <a:prstGeom prst="rect">
-            <a:avLst/>
-          </a:prstGeom>
-          <a:noFill/>
-          <a:ln/>
-        </p:spPr>
-        <p:txBody>
-          <a:bodyPr wrap="square" lIns="0" tIns="0" rIns="0" bIns="0" rtlCol="0" anchor="t"/>
-          <a:lstStyle/>
-          <a:p>
-            <a:pPr indent="0" marL="0">
-              <a:buNone/>
-            </a:pPr>
-            <a:r>
-              <a:rPr lang="en-US" sz="2400" dirty="0">
-                <a:solidFill>
-                  <a:schemeClr val="tx1"/>
-                </a:solidFill>
-                <a:latin typeface="DM Sans" pitchFamily="34" charset="0"/>
-                <a:ea typeface="DM Sans" pitchFamily="34" charset="-122"/>
-                <a:cs typeface="DM Sans" pitchFamily="34" charset="-120"/>
-              </a:rPr>
-              <a:t>Guide</a:t>
-            </a:r>
-            <a:endParaRPr lang="en-US" sz="2400" dirty="0"/>
-          </a:p>
-        </p:txBody>
-      </p:sp>
-      <p:sp>
-        <p:nvSpPr>
-          <p:cNvPr id="13" name="text-284"/>
-          <p:cNvSpPr txBox="1"/>
-          <p:nvPr/>
-        </p:nvSpPr>
-        <p:spPr>
-          <a:xfrm>
-            <a:off x="4379976" y="4160520"/>
-            <a:ext cx="3429000" cy="1280160"/>
-          </a:xfrm>
-          <a:prstGeom prst="rect">
-            <a:avLst/>
-          </a:prstGeom>
-          <a:noFill/>
-          <a:ln/>
-        </p:spPr>
-        <p:txBody>
-          <a:bodyPr wrap="square" lIns="0" tIns="0" rIns="0" bIns="0" rtlCol="0" anchor="t"/>
-          <a:lstStyle/>
-          <a:p>
-            <a:pPr indent="0" marL="0">
-              <a:buNone/>
-            </a:pPr>
-            <a:r>
-              <a:rPr lang="en-US" sz="1500" dirty="0">
-                <a:solidFill>
-                  <a:schemeClr val="accent5"/>
-                </a:solidFill>
-                <a:latin typeface="DM Sans" pitchFamily="34" charset="0"/>
-                <a:ea typeface="DM Sans" pitchFamily="34" charset="-122"/>
-                <a:cs typeface="DM Sans" pitchFamily="34" charset="-120"/>
-              </a:rPr>
-              <a:t>Help us choose the one market to own first, and tell us which proof your network trusts.</a:t>
-            </a:r>
-            <a:endParaRPr lang="en-US" sz="1500" dirty="0"/>
-          </a:p>
-        </p:txBody>
-      </p:sp>
-      <p:sp>
-        <p:nvSpPr>
-          <p:cNvPr id="14" name="rule-285"/>
-          <p:cNvSpPr/>
-          <p:nvPr/>
-        </p:nvSpPr>
-        <p:spPr>
-          <a:xfrm>
-            <a:off x="8174736" y="2743200"/>
-            <a:ext cx="3429000" cy="0"/>
-          </a:xfrm>
-          <a:prstGeom prst="line">
-            <a:avLst/>
-          </a:prstGeom>
-          <a:noFill/>
-          <a:ln w="9525">
-            <a:solidFill>
-              <a:schemeClr val="tx1"/>
-            </a:solidFill>
-            <a:prstDash val="solid"/>
-          </a:ln>
-        </p:spPr>
-      </p:sp>
-      <p:sp>
-        <p:nvSpPr>
-          <p:cNvPr id="15" name="text-286"/>
-          <p:cNvSpPr txBox="1"/>
-          <p:nvPr/>
-        </p:nvSpPr>
-        <p:spPr>
-          <a:xfrm>
-            <a:off x="8174736" y="2926080"/>
-            <a:ext cx="3429000" cy="274320"/>
-          </a:xfrm>
-          <a:prstGeom prst="rect">
-            <a:avLst/>
-          </a:prstGeom>
-          <a:noFill/>
-          <a:ln/>
-        </p:spPr>
-        <p:txBody>
-          <a:bodyPr wrap="square" lIns="0" tIns="0" rIns="0" bIns="0" rtlCol="0" anchor="t"/>
-          <a:lstStyle/>
-          <a:p>
-            <a:pPr indent="0" marL="0">
-              <a:buNone/>
-            </a:pPr>
-            <a:r>
-              <a:rPr lang="en-US" sz="1300" dirty="0">
-                <a:solidFill>
-                  <a:schemeClr val="tx1"/>
-                </a:solidFill>
-                <a:latin typeface="DM Mono" pitchFamily="34" charset="0"/>
-                <a:ea typeface="DM Mono" pitchFamily="34" charset="-122"/>
-                <a:cs typeface="DM Mono" pitchFamily="34" charset="-120"/>
-              </a:rPr>
-              <a:t>#3</a:t>
-            </a:r>
-            <a:endParaRPr lang="en-US" sz="1300" dirty="0"/>
-          </a:p>
-        </p:txBody>
-      </p:sp>
-      <p:sp>
-        <p:nvSpPr>
-          <p:cNvPr id="16" name="text-287"/>
-          <p:cNvSpPr txBox="1"/>
-          <p:nvPr/>
-        </p:nvSpPr>
-        <p:spPr>
-          <a:xfrm>
-            <a:off x="8174736" y="3337560"/>
-            <a:ext cx="3429000" cy="822960"/>
-          </a:xfrm>
-          <a:prstGeom prst="rect">
-            <a:avLst/>
-          </a:prstGeom>
-          <a:noFill/>
-          <a:ln/>
-        </p:spPr>
-        <p:txBody>
-          <a:bodyPr wrap="square" lIns="0" tIns="0" rIns="0" bIns="0" rtlCol="0" anchor="t"/>
-          <a:lstStyle/>
-          <a:p>
-            <a:pPr indent="0" marL="0">
-              <a:buNone/>
-            </a:pPr>
-            <a:r>
-              <a:rPr lang="en-US" sz="2400" dirty="0">
-                <a:solidFill>
-                  <a:schemeClr val="tx1"/>
-                </a:solidFill>
-                <a:latin typeface="DM Sans" pitchFamily="34" charset="0"/>
-                <a:ea typeface="DM Sans" pitchFamily="34" charset="-122"/>
-                <a:cs typeface="DM Sans" pitchFamily="34" charset="-120"/>
-              </a:rPr>
-              <a:t>Introduce</a:t>
-            </a:r>
-            <a:endParaRPr lang="en-US" sz="2400" dirty="0"/>
-          </a:p>
-        </p:txBody>
-      </p:sp>
-      <p:sp>
-        <p:nvSpPr>
-          <p:cNvPr id="17" name="text-288"/>
-          <p:cNvSpPr txBox="1"/>
-          <p:nvPr/>
-        </p:nvSpPr>
-        <p:spPr>
-          <a:xfrm>
-            <a:off x="8174736" y="4160520"/>
-            <a:ext cx="3429000" cy="1280160"/>
-          </a:xfrm>
-          <a:prstGeom prst="rect">
-            <a:avLst/>
-          </a:prstGeom>
-          <a:noFill/>
-          <a:ln/>
-        </p:spPr>
-        <p:txBody>
-          <a:bodyPr wrap="square" lIns="0" tIns="0" rIns="0" bIns="0" rtlCol="0" anchor="t"/>
-          <a:lstStyle/>
-          <a:p>
-            <a:pPr indent="0" marL="0">
-              <a:buNone/>
-            </a:pPr>
-            <a:r>
-              <a:rPr lang="en-US" sz="1500" dirty="0">
-                <a:solidFill>
-                  <a:schemeClr val="accent5"/>
-                </a:solidFill>
-                <a:latin typeface="DM Sans" pitchFamily="34" charset="0"/>
-                <a:ea typeface="DM Sans" pitchFamily="34" charset="-122"/>
-                <a:cs typeface="DM Sans" pitchFamily="34" charset="-120"/>
-              </a:rPr>
-              <a:t>Connect us with experts and firms who need us, and join first calls where your name helps.</a:t>
-            </a:r>
-            <a:endParaRPr lang="en-US" sz="1500" dirty="0"/>
+              <a:t>Illustrative figures from the consultancy plan, not results</a:t>
+            </a:r>
+            <a:endParaRPr lang="en-US" sz="1000" dirty="0"/>
           </a:p>
         </p:txBody>
       </p:sp>
@@ -13221,7 +14127,7 @@
       </p:grpSpPr>
       <p:sp>
         <p:nvSpPr>
-          <p:cNvPr id="3" name="text-289"/>
+          <p:cNvPr id="2" name="text-286"/>
           <p:cNvSpPr txBox="1"/>
           <p:nvPr/>
         </p:nvSpPr>
@@ -13260,26 +14166,26 @@
       </p:sp>
       <p:sp>
         <p:nvSpPr>
-          <p:cNvPr id="4" name="text-290"/>
-          <p:cNvSpPr txBox="1"/>
-          <p:nvPr/>
-        </p:nvSpPr>
-        <p:spPr>
-          <a:xfrm>
-            <a:off x="6117336" y="658368"/>
-            <a:ext cx="5486400" cy="274320"/>
-          </a:xfrm>
-          <a:prstGeom prst="rect">
-            <a:avLst/>
-          </a:prstGeom>
-          <a:noFill/>
-          <a:ln/>
-        </p:spPr>
-        <p:txBody>
-          <a:bodyPr wrap="square" lIns="0" tIns="0" rIns="0" bIns="0" rtlCol="0" anchor="t"/>
-          <a:lstStyle/>
-          <a:p>
-            <a:pPr algn="r" indent="0" marL="0">
+          <p:cNvPr id="3" name="text-287"/>
+          <p:cNvSpPr txBox="1"/>
+          <p:nvPr/>
+        </p:nvSpPr>
+        <p:spPr>
+          <a:xfrm>
+            <a:off x="7406640" y="658368"/>
+            <a:ext cx="2286000" cy="274320"/>
+          </a:xfrm>
+          <a:prstGeom prst="rect">
+            <a:avLst/>
+          </a:prstGeom>
+          <a:noFill/>
+          <a:ln/>
+        </p:spPr>
+        <p:txBody>
+          <a:bodyPr wrap="square" lIns="0" tIns="0" rIns="0" bIns="0" rtlCol="0" anchor="t"/>
+          <a:lstStyle/>
+          <a:p>
+            <a:pPr indent="0" marL="0">
               <a:buNone/>
             </a:pPr>
             <a:r>
@@ -13291,7 +14197,7 @@
                 <a:ea typeface="DM Mono" pitchFamily="34" charset="-122"/>
                 <a:cs typeface="DM Mono" pitchFamily="34" charset="-120"/>
               </a:rPr>
-              <a:t>Your role</a:t>
+              <a:t>October 2026</a:t>
             </a:r>
             <a:endParaRPr lang="en-US" sz="1300" dirty="0"/>
           </a:p>
@@ -13299,33 +14205,72 @@
       </p:sp>
       <p:sp>
         <p:nvSpPr>
-          <p:cNvPr id="5" name="text-291"/>
-          <p:cNvSpPr txBox="1"/>
-          <p:nvPr/>
-        </p:nvSpPr>
-        <p:spPr>
-          <a:xfrm>
-            <a:off x="566928" y="1097280"/>
-            <a:ext cx="11018520" cy="1188720"/>
-          </a:xfrm>
-          <a:prstGeom prst="rect">
-            <a:avLst/>
-          </a:prstGeom>
-          <a:noFill/>
-          <a:ln/>
-        </p:spPr>
-        <p:txBody>
-          <a:bodyPr wrap="square" lIns="0" tIns="0" rIns="0" bIns="0" rtlCol="0" anchor="t"/>
+          <p:cNvPr id="4" name="text-288"/>
+          <p:cNvSpPr txBox="1"/>
+          <p:nvPr/>
+        </p:nvSpPr>
+        <p:spPr>
+          <a:xfrm>
+            <a:off x="9317736" y="658368"/>
+            <a:ext cx="2286000" cy="274320"/>
+          </a:xfrm>
+          <a:prstGeom prst="rect">
+            <a:avLst/>
+          </a:prstGeom>
+          <a:noFill/>
+          <a:ln/>
+        </p:spPr>
+        <p:txBody>
+          <a:bodyPr wrap="square" lIns="0" tIns="0" rIns="0" bIns="0" rtlCol="0" anchor="t"/>
+          <a:lstStyle/>
+          <a:p>
+            <a:pPr algn="r" indent="0" marL="0">
+              <a:buNone/>
+            </a:pPr>
+            <a:r>
+              <a:rPr lang="en-US" sz="1300" dirty="0">
+                <a:solidFill>
+                  <a:schemeClr val="tx1"/>
+                </a:solidFill>
+                <a:latin typeface="DM Mono" pitchFamily="34" charset="0"/>
+                <a:ea typeface="DM Mono" pitchFamily="34" charset="-122"/>
+                <a:cs typeface="DM Mono" pitchFamily="34" charset="-120"/>
+              </a:rPr>
+              <a:t>Confidential</a:t>
+            </a:r>
+            <a:endParaRPr lang="en-US" sz="1300" dirty="0"/>
+          </a:p>
+        </p:txBody>
+      </p:sp>
+      <p:sp>
+        <p:nvSpPr>
+          <p:cNvPr id="5" name="text-289"/>
+          <p:cNvSpPr txBox="1"/>
+          <p:nvPr/>
+        </p:nvSpPr>
+        <p:spPr>
+          <a:xfrm>
+            <a:off x="548640" y="2926080"/>
+            <a:ext cx="9326880" cy="3429000"/>
+          </a:xfrm>
+          <a:prstGeom prst="rect">
+            <a:avLst/>
+          </a:prstGeom>
+          <a:noFill/>
+          <a:ln/>
+        </p:spPr>
+        <p:txBody>
+          <a:bodyPr wrap="square" lIns="0" tIns="0" rIns="0" bIns="0" rtlCol="0" anchor="b"/>
           <a:lstStyle/>
           <a:p>
             <a:pPr indent="0" marL="0">
               <a:lnSpc>
-                <a:spcPct val="95000"/>
+                <a:spcPct val="86000"/>
               </a:lnSpc>
               <a:buNone/>
             </a:pPr>
             <a:r>
-              <a:rPr lang="en-US" sz="4000" dirty="0">
+              <a:rPr lang="en-US" sz="11200" dirty="0">
                 <a:solidFill>
                   <a:schemeClr val="tx1"/>
                 </a:solidFill>
@@ -13333,571 +14278,55 @@
                 <a:ea typeface="DM Sans" pitchFamily="34" charset="-122"/>
                 <a:cs typeface="DM Sans" pitchFamily="34" charset="-120"/>
               </a:rPr>
-              <a:t>Where your experience matters most</a:t>
-            </a:r>
-            <a:endParaRPr lang="en-US" sz="4000" dirty="0"/>
-          </a:p>
-        </p:txBody>
-      </p:sp>
-      <p:sp>
-        <p:nvSpPr>
-          <p:cNvPr id="6" name="rule-292"/>
+              <a:t>Your</a:t>
+            </a:r>
+            <a:endParaRPr lang="en-US" sz="11200" dirty="0"/>
+          </a:p>
+          <a:p>
+            <a:pPr indent="0" marL="0">
+              <a:lnSpc>
+                <a:spcPct val="86000"/>
+              </a:lnSpc>
+              <a:buNone/>
+            </a:pPr>
+            <a:r>
+              <a:rPr lang="en-US" sz="11200" dirty="0">
+                <a:solidFill>
+                  <a:schemeClr val="tx1"/>
+                </a:solidFill>
+                <a:latin typeface="DM Sans" pitchFamily="34" charset="0"/>
+                <a:ea typeface="DM Sans" pitchFamily="34" charset="-122"/>
+                <a:cs typeface="DM Sans" pitchFamily="34" charset="-120"/>
+              </a:rPr>
+              <a:t>role</a:t>
+            </a:r>
+            <a:endParaRPr lang="en-US" sz="11200" dirty="0"/>
+          </a:p>
+        </p:txBody>
+      </p:sp>
+      <p:sp>
+        <p:nvSpPr>
+          <p:cNvPr id="6" name="arrow-290"/>
           <p:cNvSpPr/>
           <p:nvPr/>
         </p:nvSpPr>
         <p:spPr>
           <a:xfrm>
-            <a:off x="585216" y="2606040"/>
-            <a:ext cx="5303520" cy="0"/>
+            <a:off x="10927080" y="5440680"/>
+            <a:ext cx="658368" cy="658368"/>
           </a:xfrm>
           <a:prstGeom prst="line">
             <a:avLst/>
           </a:prstGeom>
           <a:noFill/>
-          <a:ln w="9525">
+          <a:ln w="88900">
             <a:solidFill>
               <a:schemeClr val="tx1"/>
             </a:solidFill>
             <a:prstDash val="solid"/>
+            <a:tailEnd type="arrow"/>
           </a:ln>
         </p:spPr>
-      </p:sp>
-      <p:sp>
-        <p:nvSpPr>
-          <p:cNvPr id="7" name="text-293"/>
-          <p:cNvSpPr txBox="1"/>
-          <p:nvPr/>
-        </p:nvSpPr>
-        <p:spPr>
-          <a:xfrm>
-            <a:off x="585216" y="2770632"/>
-            <a:ext cx="5303520" cy="411480"/>
-          </a:xfrm>
-          <a:prstGeom prst="rect">
-            <a:avLst/>
-          </a:prstGeom>
-          <a:noFill/>
-          <a:ln/>
-        </p:spPr>
-        <p:txBody>
-          <a:bodyPr wrap="square" lIns="0" tIns="0" rIns="0" bIns="0" rtlCol="0" anchor="t"/>
-          <a:lstStyle/>
-          <a:p>
-            <a:pPr indent="0" marL="0">
-              <a:buNone/>
-            </a:pPr>
-            <a:r>
-              <a:rPr lang="en-US" sz="2200" dirty="0">
-                <a:solidFill>
-                  <a:schemeClr val="tx1"/>
-                </a:solidFill>
-                <a:latin typeface="DM Sans" pitchFamily="34" charset="0"/>
-                <a:ea typeface="DM Sans" pitchFamily="34" charset="-122"/>
-                <a:cs typeface="DM Sans" pitchFamily="34" charset="-120"/>
-              </a:rPr>
-              <a:t>Proof</a:t>
-            </a:r>
-            <a:endParaRPr lang="en-US" sz="2200" dirty="0"/>
-          </a:p>
-        </p:txBody>
-      </p:sp>
-      <p:sp>
-        <p:nvSpPr>
-          <p:cNvPr id="8" name="text-294"/>
-          <p:cNvSpPr txBox="1"/>
-          <p:nvPr/>
-        </p:nvSpPr>
-        <p:spPr>
-          <a:xfrm>
-            <a:off x="585216" y="3264408"/>
-            <a:ext cx="5303520" cy="365760"/>
-          </a:xfrm>
-          <a:prstGeom prst="rect">
-            <a:avLst/>
-          </a:prstGeom>
-          <a:noFill/>
-          <a:ln/>
-        </p:spPr>
-        <p:txBody>
-          <a:bodyPr wrap="square" lIns="0" tIns="0" rIns="0" bIns="0" rtlCol="0" anchor="t"/>
-          <a:lstStyle/>
-          <a:p>
-            <a:pPr indent="0" marL="0">
-              <a:buNone/>
-            </a:pPr>
-            <a:r>
-              <a:rPr lang="en-US" sz="1500" dirty="0">
-                <a:solidFill>
-                  <a:schemeClr val="accent5"/>
-                </a:solidFill>
-                <a:latin typeface="DM Sans" pitchFamily="34" charset="0"/>
-                <a:ea typeface="DM Sans" pitchFamily="34" charset="-122"/>
-                <a:cs typeface="DM Sans" pitchFamily="34" charset="-120"/>
-              </a:rPr>
-              <a:t>No case study with hard numbers yet.</a:t>
-            </a:r>
-            <a:endParaRPr lang="en-US" sz="1500" dirty="0"/>
-          </a:p>
-        </p:txBody>
-      </p:sp>
-      <p:sp>
-        <p:nvSpPr>
-          <p:cNvPr id="9" name="text-295"/>
-          <p:cNvSpPr txBox="1"/>
-          <p:nvPr/>
-        </p:nvSpPr>
-        <p:spPr>
-          <a:xfrm>
-            <a:off x="585216" y="3675888"/>
-            <a:ext cx="5303520" cy="320040"/>
-          </a:xfrm>
-          <a:prstGeom prst="rect">
-            <a:avLst/>
-          </a:prstGeom>
-          <a:noFill/>
-          <a:ln/>
-        </p:spPr>
-        <p:txBody>
-          <a:bodyPr wrap="square" lIns="0" tIns="0" rIns="0" bIns="0" rtlCol="0" anchor="t"/>
-          <a:lstStyle/>
-          <a:p>
-            <a:pPr indent="0" marL="0">
-              <a:buNone/>
-            </a:pPr>
-            <a:r>
-              <a:rPr lang="en-US" sz="1300" dirty="0">
-                <a:solidFill>
-                  <a:schemeClr val="tx1"/>
-                </a:solidFill>
-                <a:latin typeface="DM Mono" pitchFamily="34" charset="0"/>
-                <a:ea typeface="DM Mono" pitchFamily="34" charset="-122"/>
-                <a:cs typeface="DM Mono" pitchFamily="34" charset="-120"/>
-              </a:rPr>
-              <a:t>What proof would your network trust?</a:t>
-            </a:r>
-            <a:endParaRPr lang="en-US" sz="1300" dirty="0"/>
-          </a:p>
-        </p:txBody>
-      </p:sp>
-      <p:sp>
-        <p:nvSpPr>
-          <p:cNvPr id="10" name="rule-296"/>
-          <p:cNvSpPr/>
-          <p:nvPr/>
-        </p:nvSpPr>
-        <p:spPr>
-          <a:xfrm>
-            <a:off x="6300216" y="2606040"/>
-            <a:ext cx="5303520" cy="0"/>
-          </a:xfrm>
-          <a:prstGeom prst="line">
-            <a:avLst/>
-          </a:prstGeom>
-          <a:noFill/>
-          <a:ln w="9525">
-            <a:solidFill>
-              <a:schemeClr val="tx1"/>
-            </a:solidFill>
-            <a:prstDash val="solid"/>
-          </a:ln>
-        </p:spPr>
-      </p:sp>
-      <p:sp>
-        <p:nvSpPr>
-          <p:cNvPr id="11" name="text-297"/>
-          <p:cNvSpPr txBox="1"/>
-          <p:nvPr/>
-        </p:nvSpPr>
-        <p:spPr>
-          <a:xfrm>
-            <a:off x="6300216" y="2770632"/>
-            <a:ext cx="5303520" cy="411480"/>
-          </a:xfrm>
-          <a:prstGeom prst="rect">
-            <a:avLst/>
-          </a:prstGeom>
-          <a:noFill/>
-          <a:ln/>
-        </p:spPr>
-        <p:txBody>
-          <a:bodyPr wrap="square" lIns="0" tIns="0" rIns="0" bIns="0" rtlCol="0" anchor="t"/>
-          <a:lstStyle/>
-          <a:p>
-            <a:pPr indent="0" marL="0">
-              <a:buNone/>
-            </a:pPr>
-            <a:r>
-              <a:rPr lang="en-US" sz="2200" dirty="0">
-                <a:solidFill>
-                  <a:schemeClr val="tx1"/>
-                </a:solidFill>
-                <a:latin typeface="DM Sans" pitchFamily="34" charset="0"/>
-                <a:ea typeface="DM Sans" pitchFamily="34" charset="-122"/>
-                <a:cs typeface="DM Sans" pitchFamily="34" charset="-120"/>
-              </a:rPr>
-              <a:t>Focus</a:t>
-            </a:r>
-            <a:endParaRPr lang="en-US" sz="2200" dirty="0"/>
-          </a:p>
-        </p:txBody>
-      </p:sp>
-      <p:sp>
-        <p:nvSpPr>
-          <p:cNvPr id="12" name="text-298"/>
-          <p:cNvSpPr txBox="1"/>
-          <p:nvPr/>
-        </p:nvSpPr>
-        <p:spPr>
-          <a:xfrm>
-            <a:off x="6300216" y="3264408"/>
-            <a:ext cx="5303520" cy="365760"/>
-          </a:xfrm>
-          <a:prstGeom prst="rect">
-            <a:avLst/>
-          </a:prstGeom>
-          <a:noFill/>
-          <a:ln/>
-        </p:spPr>
-        <p:txBody>
-          <a:bodyPr wrap="square" lIns="0" tIns="0" rIns="0" bIns="0" rtlCol="0" anchor="t"/>
-          <a:lstStyle/>
-          <a:p>
-            <a:pPr indent="0" marL="0">
-              <a:buNone/>
-            </a:pPr>
-            <a:r>
-              <a:rPr lang="en-US" sz="1500" dirty="0">
-                <a:solidFill>
-                  <a:schemeClr val="accent5"/>
-                </a:solidFill>
-                <a:latin typeface="DM Sans" pitchFamily="34" charset="0"/>
-                <a:ea typeface="DM Sans" pitchFamily="34" charset="-122"/>
-                <a:cs typeface="DM Sans" pitchFamily="34" charset="-120"/>
-              </a:rPr>
-              <a:t>We work in three very different markets.</a:t>
-            </a:r>
-            <a:endParaRPr lang="en-US" sz="1500" dirty="0"/>
-          </a:p>
-        </p:txBody>
-      </p:sp>
-      <p:sp>
-        <p:nvSpPr>
-          <p:cNvPr id="13" name="text-299"/>
-          <p:cNvSpPr txBox="1"/>
-          <p:nvPr/>
-        </p:nvSpPr>
-        <p:spPr>
-          <a:xfrm>
-            <a:off x="6300216" y="3675888"/>
-            <a:ext cx="5303520" cy="320040"/>
-          </a:xfrm>
-          <a:prstGeom prst="rect">
-            <a:avLst/>
-          </a:prstGeom>
-          <a:noFill/>
-          <a:ln/>
-        </p:spPr>
-        <p:txBody>
-          <a:bodyPr wrap="square" lIns="0" tIns="0" rIns="0" bIns="0" rtlCol="0" anchor="t"/>
-          <a:lstStyle/>
-          <a:p>
-            <a:pPr indent="0" marL="0">
-              <a:buNone/>
-            </a:pPr>
-            <a:r>
-              <a:rPr lang="en-US" sz="1300" dirty="0">
-                <a:solidFill>
-                  <a:schemeClr val="tx1"/>
-                </a:solidFill>
-                <a:latin typeface="DM Mono" pitchFamily="34" charset="0"/>
-                <a:ea typeface="DM Mono" pitchFamily="34" charset="-122"/>
-                <a:cs typeface="DM Mono" pitchFamily="34" charset="-120"/>
-              </a:rPr>
-              <a:t>Which one should we own?</a:t>
-            </a:r>
-            <a:endParaRPr lang="en-US" sz="1300" dirty="0"/>
-          </a:p>
-        </p:txBody>
-      </p:sp>
-      <p:sp>
-        <p:nvSpPr>
-          <p:cNvPr id="14" name="rule-300"/>
-          <p:cNvSpPr/>
-          <p:nvPr/>
-        </p:nvSpPr>
-        <p:spPr>
-          <a:xfrm>
-            <a:off x="585216" y="4389120"/>
-            <a:ext cx="5303520" cy="0"/>
-          </a:xfrm>
-          <a:prstGeom prst="line">
-            <a:avLst/>
-          </a:prstGeom>
-          <a:noFill/>
-          <a:ln w="9525">
-            <a:solidFill>
-              <a:schemeClr val="tx1"/>
-            </a:solidFill>
-            <a:prstDash val="solid"/>
-          </a:ln>
-        </p:spPr>
-      </p:sp>
-      <p:sp>
-        <p:nvSpPr>
-          <p:cNvPr id="15" name="text-301"/>
-          <p:cNvSpPr txBox="1"/>
-          <p:nvPr/>
-        </p:nvSpPr>
-        <p:spPr>
-          <a:xfrm>
-            <a:off x="585216" y="4553712"/>
-            <a:ext cx="5303520" cy="411480"/>
-          </a:xfrm>
-          <a:prstGeom prst="rect">
-            <a:avLst/>
-          </a:prstGeom>
-          <a:noFill/>
-          <a:ln/>
-        </p:spPr>
-        <p:txBody>
-          <a:bodyPr wrap="square" lIns="0" tIns="0" rIns="0" bIns="0" rtlCol="0" anchor="t"/>
-          <a:lstStyle/>
-          <a:p>
-            <a:pPr indent="0" marL="0">
-              <a:buNone/>
-            </a:pPr>
-            <a:r>
-              <a:rPr lang="en-US" sz="2200" dirty="0">
-                <a:solidFill>
-                  <a:schemeClr val="tx1"/>
-                </a:solidFill>
-                <a:latin typeface="DM Sans" pitchFamily="34" charset="0"/>
-                <a:ea typeface="DM Sans" pitchFamily="34" charset="-122"/>
-                <a:cs typeface="DM Sans" pitchFamily="34" charset="-120"/>
-              </a:rPr>
-              <a:t>Pricing</a:t>
-            </a:r>
-            <a:endParaRPr lang="en-US" sz="2200" dirty="0"/>
-          </a:p>
-        </p:txBody>
-      </p:sp>
-      <p:sp>
-        <p:nvSpPr>
-          <p:cNvPr id="16" name="text-302"/>
-          <p:cNvSpPr txBox="1"/>
-          <p:nvPr/>
-        </p:nvSpPr>
-        <p:spPr>
-          <a:xfrm>
-            <a:off x="585216" y="5047488"/>
-            <a:ext cx="5303520" cy="365760"/>
-          </a:xfrm>
-          <a:prstGeom prst="rect">
-            <a:avLst/>
-          </a:prstGeom>
-          <a:noFill/>
-          <a:ln/>
-        </p:spPr>
-        <p:txBody>
-          <a:bodyPr wrap="square" lIns="0" tIns="0" rIns="0" bIns="0" rtlCol="0" anchor="t"/>
-          <a:lstStyle/>
-          <a:p>
-            <a:pPr indent="0" marL="0">
-              <a:buNone/>
-            </a:pPr>
-            <a:r>
-              <a:rPr lang="en-US" sz="1500" dirty="0">
-                <a:solidFill>
-                  <a:schemeClr val="accent5"/>
-                </a:solidFill>
-                <a:latin typeface="DM Sans" pitchFamily="34" charset="0"/>
-                <a:ea typeface="DM Sans" pitchFamily="34" charset="-122"/>
-                <a:cs typeface="DM Sans" pitchFamily="34" charset="-120"/>
-              </a:rPr>
-              <a:t>Our price is tested with only one client.</a:t>
-            </a:r>
-            <a:endParaRPr lang="en-US" sz="1500" dirty="0"/>
-          </a:p>
-        </p:txBody>
-      </p:sp>
-      <p:sp>
-        <p:nvSpPr>
-          <p:cNvPr id="17" name="text-303"/>
-          <p:cNvSpPr txBox="1"/>
-          <p:nvPr/>
-        </p:nvSpPr>
-        <p:spPr>
-          <a:xfrm>
-            <a:off x="585216" y="5458968"/>
-            <a:ext cx="5303520" cy="320040"/>
-          </a:xfrm>
-          <a:prstGeom prst="rect">
-            <a:avLst/>
-          </a:prstGeom>
-          <a:noFill/>
-          <a:ln/>
-        </p:spPr>
-        <p:txBody>
-          <a:bodyPr wrap="square" lIns="0" tIns="0" rIns="0" bIns="0" rtlCol="0" anchor="t"/>
-          <a:lstStyle/>
-          <a:p>
-            <a:pPr indent="0" marL="0">
-              <a:buNone/>
-            </a:pPr>
-            <a:r>
-              <a:rPr lang="en-US" sz="1300" dirty="0">
-                <a:solidFill>
-                  <a:schemeClr val="tx1"/>
-                </a:solidFill>
-                <a:latin typeface="DM Mono" pitchFamily="34" charset="0"/>
-                <a:ea typeface="DM Mono" pitchFamily="34" charset="-122"/>
-                <a:cs typeface="DM Mono" pitchFamily="34" charset="-120"/>
-              </a:rPr>
-              <a:t>Is it right for the value?</a:t>
-            </a:r>
-            <a:endParaRPr lang="en-US" sz="1300" dirty="0"/>
-          </a:p>
-        </p:txBody>
-      </p:sp>
-      <p:sp>
-        <p:nvSpPr>
-          <p:cNvPr id="18" name="rule-304"/>
-          <p:cNvSpPr/>
-          <p:nvPr/>
-        </p:nvSpPr>
-        <p:spPr>
-          <a:xfrm>
-            <a:off x="6300216" y="4389120"/>
-            <a:ext cx="5303520" cy="0"/>
-          </a:xfrm>
-          <a:prstGeom prst="line">
-            <a:avLst/>
-          </a:prstGeom>
-          <a:noFill/>
-          <a:ln w="9525">
-            <a:solidFill>
-              <a:schemeClr val="tx1"/>
-            </a:solidFill>
-            <a:prstDash val="solid"/>
-          </a:ln>
-        </p:spPr>
-      </p:sp>
-      <p:sp>
-        <p:nvSpPr>
-          <p:cNvPr id="19" name="text-305"/>
-          <p:cNvSpPr txBox="1"/>
-          <p:nvPr/>
-        </p:nvSpPr>
-        <p:spPr>
-          <a:xfrm>
-            <a:off x="6300216" y="4553712"/>
-            <a:ext cx="5303520" cy="411480"/>
-          </a:xfrm>
-          <a:prstGeom prst="rect">
-            <a:avLst/>
-          </a:prstGeom>
-          <a:noFill/>
-          <a:ln/>
-        </p:spPr>
-        <p:txBody>
-          <a:bodyPr wrap="square" lIns="0" tIns="0" rIns="0" bIns="0" rtlCol="0" anchor="t"/>
-          <a:lstStyle/>
-          <a:p>
-            <a:pPr indent="0" marL="0">
-              <a:buNone/>
-            </a:pPr>
-            <a:r>
-              <a:rPr lang="en-US" sz="2200" dirty="0">
-                <a:solidFill>
-                  <a:schemeClr val="tx1"/>
-                </a:solidFill>
-                <a:latin typeface="DM Sans" pitchFamily="34" charset="0"/>
-                <a:ea typeface="DM Sans" pitchFamily="34" charset="-122"/>
-                <a:cs typeface="DM Sans" pitchFamily="34" charset="-120"/>
-              </a:rPr>
-              <a:t>Growth</a:t>
-            </a:r>
-            <a:endParaRPr lang="en-US" sz="2200" dirty="0"/>
-          </a:p>
-        </p:txBody>
-      </p:sp>
-      <p:sp>
-        <p:nvSpPr>
-          <p:cNvPr id="20" name="text-306"/>
-          <p:cNvSpPr txBox="1"/>
-          <p:nvPr/>
-        </p:nvSpPr>
-        <p:spPr>
-          <a:xfrm>
-            <a:off x="6300216" y="5047488"/>
-            <a:ext cx="5303520" cy="365760"/>
-          </a:xfrm>
-          <a:prstGeom prst="rect">
-            <a:avLst/>
-          </a:prstGeom>
-          <a:noFill/>
-          <a:ln/>
-        </p:spPr>
-        <p:txBody>
-          <a:bodyPr wrap="square" lIns="0" tIns="0" rIns="0" bIns="0" rtlCol="0" anchor="t"/>
-          <a:lstStyle/>
-          <a:p>
-            <a:pPr indent="0" marL="0">
-              <a:buNone/>
-            </a:pPr>
-            <a:r>
-              <a:rPr lang="en-US" sz="1500" dirty="0">
-                <a:solidFill>
-                  <a:schemeClr val="accent5"/>
-                </a:solidFill>
-                <a:latin typeface="DM Sans" pitchFamily="34" charset="0"/>
-                <a:ea typeface="DM Sans" pitchFamily="34" charset="-122"/>
-                <a:cs typeface="DM Sans" pitchFamily="34" charset="-120"/>
-              </a:rPr>
-              <a:t>Two founders do sales and delivery.</a:t>
-            </a:r>
-            <a:endParaRPr lang="en-US" sz="1500" dirty="0"/>
-          </a:p>
-        </p:txBody>
-      </p:sp>
-      <p:sp>
-        <p:nvSpPr>
-          <p:cNvPr id="21" name="text-307"/>
-          <p:cNvSpPr txBox="1"/>
-          <p:nvPr/>
-        </p:nvSpPr>
-        <p:spPr>
-          <a:xfrm>
-            <a:off x="6300216" y="5458968"/>
-            <a:ext cx="5303520" cy="320040"/>
-          </a:xfrm>
-          <a:prstGeom prst="rect">
-            <a:avLst/>
-          </a:prstGeom>
-          <a:noFill/>
-          <a:ln/>
-        </p:spPr>
-        <p:txBody>
-          <a:bodyPr wrap="square" lIns="0" tIns="0" rIns="0" bIns="0" rtlCol="0" anchor="t"/>
-          <a:lstStyle/>
-          <a:p>
-            <a:pPr indent="0" marL="0">
-              <a:buNone/>
-            </a:pPr>
-            <a:r>
-              <a:rPr lang="en-US" sz="1300" dirty="0">
-                <a:solidFill>
-                  <a:schemeClr val="tx1"/>
-                </a:solidFill>
-                <a:latin typeface="DM Mono" pitchFamily="34" charset="0"/>
-                <a:ea typeface="DM Mono" pitchFamily="34" charset="-122"/>
-                <a:cs typeface="DM Mono" pitchFamily="34" charset="-120"/>
-              </a:rPr>
-              <a:t>When should we hire, and who?</a:t>
-            </a:r>
-            <a:endParaRPr lang="en-US" sz="1300" dirty="0"/>
-          </a:p>
-        </p:txBody>
       </p:sp>
     </p:spTree>
   </p:cSld>
@@ -13926,7 +14355,7 @@
       </p:grpSpPr>
       <p:sp>
         <p:nvSpPr>
-          <p:cNvPr id="3" name="text-308"/>
+          <p:cNvPr id="3" name="text-291"/>
           <p:cNvSpPr txBox="1"/>
           <p:nvPr/>
         </p:nvSpPr>
@@ -13965,7 +14394,7 @@
       </p:sp>
       <p:sp>
         <p:nvSpPr>
-          <p:cNvPr id="4" name="text-309"/>
+          <p:cNvPr id="4" name="text-292"/>
           <p:cNvSpPr txBox="1"/>
           <p:nvPr/>
         </p:nvSpPr>
@@ -14004,7 +14433,7 @@
       </p:sp>
       <p:sp>
         <p:nvSpPr>
-          <p:cNvPr id="5" name="text-310"/>
+          <p:cNvPr id="5" name="text-293"/>
           <p:cNvSpPr txBox="1"/>
           <p:nvPr/>
         </p:nvSpPr>
@@ -14038,6 +14467,1276 @@
                 <a:ea typeface="DM Sans" pitchFamily="34" charset="-122"/>
                 <a:cs typeface="DM Sans" pitchFamily="34" charset="-120"/>
               </a:rPr>
+              <a:t>Three ways you can help us grow</a:t>
+            </a:r>
+            <a:endParaRPr lang="en-US" sz="4000" dirty="0"/>
+          </a:p>
+        </p:txBody>
+      </p:sp>
+      <p:sp>
+        <p:nvSpPr>
+          <p:cNvPr id="6" name="rule-294"/>
+          <p:cNvSpPr/>
+          <p:nvPr/>
+        </p:nvSpPr>
+        <p:spPr>
+          <a:xfrm>
+            <a:off x="585216" y="2743200"/>
+            <a:ext cx="3429000" cy="0"/>
+          </a:xfrm>
+          <a:prstGeom prst="line">
+            <a:avLst/>
+          </a:prstGeom>
+          <a:noFill/>
+          <a:ln w="9525">
+            <a:solidFill>
+              <a:schemeClr val="tx1"/>
+            </a:solidFill>
+            <a:prstDash val="solid"/>
+          </a:ln>
+        </p:spPr>
+      </p:sp>
+      <p:sp>
+        <p:nvSpPr>
+          <p:cNvPr id="7" name="text-295"/>
+          <p:cNvSpPr txBox="1"/>
+          <p:nvPr/>
+        </p:nvSpPr>
+        <p:spPr>
+          <a:xfrm>
+            <a:off x="585216" y="2926080"/>
+            <a:ext cx="3429000" cy="274320"/>
+          </a:xfrm>
+          <a:prstGeom prst="rect">
+            <a:avLst/>
+          </a:prstGeom>
+          <a:noFill/>
+          <a:ln/>
+        </p:spPr>
+        <p:txBody>
+          <a:bodyPr wrap="square" lIns="0" tIns="0" rIns="0" bIns="0" rtlCol="0" anchor="t"/>
+          <a:lstStyle/>
+          <a:p>
+            <a:pPr indent="0" marL="0">
+              <a:buNone/>
+            </a:pPr>
+            <a:r>
+              <a:rPr lang="en-US" sz="1300" dirty="0">
+                <a:solidFill>
+                  <a:schemeClr val="tx1"/>
+                </a:solidFill>
+                <a:latin typeface="DM Mono" pitchFamily="34" charset="0"/>
+                <a:ea typeface="DM Mono" pitchFamily="34" charset="-122"/>
+                <a:cs typeface="DM Mono" pitchFamily="34" charset="-120"/>
+              </a:rPr>
+              <a:t>#1</a:t>
+            </a:r>
+            <a:endParaRPr lang="en-US" sz="1300" dirty="0"/>
+          </a:p>
+        </p:txBody>
+      </p:sp>
+      <p:sp>
+        <p:nvSpPr>
+          <p:cNvPr id="8" name="text-296"/>
+          <p:cNvSpPr txBox="1"/>
+          <p:nvPr/>
+        </p:nvSpPr>
+        <p:spPr>
+          <a:xfrm>
+            <a:off x="585216" y="3337560"/>
+            <a:ext cx="3429000" cy="822960"/>
+          </a:xfrm>
+          <a:prstGeom prst="rect">
+            <a:avLst/>
+          </a:prstGeom>
+          <a:noFill/>
+          <a:ln/>
+        </p:spPr>
+        <p:txBody>
+          <a:bodyPr wrap="square" lIns="0" tIns="0" rIns="0" bIns="0" rtlCol="0" anchor="t"/>
+          <a:lstStyle/>
+          <a:p>
+            <a:pPr indent="0" marL="0">
+              <a:buNone/>
+            </a:pPr>
+            <a:r>
+              <a:rPr lang="en-US" sz="2400" dirty="0">
+                <a:solidFill>
+                  <a:schemeClr val="tx1"/>
+                </a:solidFill>
+                <a:latin typeface="DM Sans" pitchFamily="34" charset="0"/>
+                <a:ea typeface="DM Sans" pitchFamily="34" charset="-122"/>
+                <a:cs typeface="DM Sans" pitchFamily="34" charset="-120"/>
+              </a:rPr>
+              <a:t>Advise</a:t>
+            </a:r>
+            <a:endParaRPr lang="en-US" sz="2400" dirty="0"/>
+          </a:p>
+        </p:txBody>
+      </p:sp>
+      <p:sp>
+        <p:nvSpPr>
+          <p:cNvPr id="9" name="text-297"/>
+          <p:cNvSpPr txBox="1"/>
+          <p:nvPr/>
+        </p:nvSpPr>
+        <p:spPr>
+          <a:xfrm>
+            <a:off x="585216" y="4160520"/>
+            <a:ext cx="3429000" cy="1280160"/>
+          </a:xfrm>
+          <a:prstGeom prst="rect">
+            <a:avLst/>
+          </a:prstGeom>
+          <a:noFill/>
+          <a:ln/>
+        </p:spPr>
+        <p:txBody>
+          <a:bodyPr wrap="square" lIns="0" tIns="0" rIns="0" bIns="0" rtlCol="0" anchor="t"/>
+          <a:lstStyle/>
+          <a:p>
+            <a:pPr indent="0" marL="0">
+              <a:buNone/>
+            </a:pPr>
+            <a:r>
+              <a:rPr lang="en-US" sz="1500" dirty="0">
+                <a:solidFill>
+                  <a:schemeClr val="accent5"/>
+                </a:solidFill>
+                <a:latin typeface="DM Sans" pitchFamily="34" charset="0"/>
+                <a:ea typeface="DM Sans" pitchFamily="34" charset="-122"/>
+                <a:cs typeface="DM Sans" pitchFamily="34" charset="-120"/>
+              </a:rPr>
+              <a:t>Sharpen our offer, pricing and pitch. Sit in on key pitches and debrief us.</a:t>
+            </a:r>
+            <a:endParaRPr lang="en-US" sz="1500" dirty="0"/>
+          </a:p>
+        </p:txBody>
+      </p:sp>
+      <p:sp>
+        <p:nvSpPr>
+          <p:cNvPr id="10" name="rule-298"/>
+          <p:cNvSpPr/>
+          <p:nvPr/>
+        </p:nvSpPr>
+        <p:spPr>
+          <a:xfrm>
+            <a:off x="4379976" y="2743200"/>
+            <a:ext cx="3429000" cy="0"/>
+          </a:xfrm>
+          <a:prstGeom prst="line">
+            <a:avLst/>
+          </a:prstGeom>
+          <a:noFill/>
+          <a:ln w="9525">
+            <a:solidFill>
+              <a:schemeClr val="tx1"/>
+            </a:solidFill>
+            <a:prstDash val="solid"/>
+          </a:ln>
+        </p:spPr>
+      </p:sp>
+      <p:sp>
+        <p:nvSpPr>
+          <p:cNvPr id="11" name="text-299"/>
+          <p:cNvSpPr txBox="1"/>
+          <p:nvPr/>
+        </p:nvSpPr>
+        <p:spPr>
+          <a:xfrm>
+            <a:off x="4379976" y="2926080"/>
+            <a:ext cx="3429000" cy="274320"/>
+          </a:xfrm>
+          <a:prstGeom prst="rect">
+            <a:avLst/>
+          </a:prstGeom>
+          <a:noFill/>
+          <a:ln/>
+        </p:spPr>
+        <p:txBody>
+          <a:bodyPr wrap="square" lIns="0" tIns="0" rIns="0" bIns="0" rtlCol="0" anchor="t"/>
+          <a:lstStyle/>
+          <a:p>
+            <a:pPr indent="0" marL="0">
+              <a:buNone/>
+            </a:pPr>
+            <a:r>
+              <a:rPr lang="en-US" sz="1300" dirty="0">
+                <a:solidFill>
+                  <a:schemeClr val="tx1"/>
+                </a:solidFill>
+                <a:latin typeface="DM Mono" pitchFamily="34" charset="0"/>
+                <a:ea typeface="DM Mono" pitchFamily="34" charset="-122"/>
+                <a:cs typeface="DM Mono" pitchFamily="34" charset="-120"/>
+              </a:rPr>
+              <a:t>#2</a:t>
+            </a:r>
+            <a:endParaRPr lang="en-US" sz="1300" dirty="0"/>
+          </a:p>
+        </p:txBody>
+      </p:sp>
+      <p:sp>
+        <p:nvSpPr>
+          <p:cNvPr id="12" name="text-300"/>
+          <p:cNvSpPr txBox="1"/>
+          <p:nvPr/>
+        </p:nvSpPr>
+        <p:spPr>
+          <a:xfrm>
+            <a:off x="4379976" y="3337560"/>
+            <a:ext cx="3429000" cy="822960"/>
+          </a:xfrm>
+          <a:prstGeom prst="rect">
+            <a:avLst/>
+          </a:prstGeom>
+          <a:noFill/>
+          <a:ln/>
+        </p:spPr>
+        <p:txBody>
+          <a:bodyPr wrap="square" lIns="0" tIns="0" rIns="0" bIns="0" rtlCol="0" anchor="t"/>
+          <a:lstStyle/>
+          <a:p>
+            <a:pPr indent="0" marL="0">
+              <a:buNone/>
+            </a:pPr>
+            <a:r>
+              <a:rPr lang="en-US" sz="2400" dirty="0">
+                <a:solidFill>
+                  <a:schemeClr val="tx1"/>
+                </a:solidFill>
+                <a:latin typeface="DM Sans" pitchFamily="34" charset="0"/>
+                <a:ea typeface="DM Sans" pitchFamily="34" charset="-122"/>
+                <a:cs typeface="DM Sans" pitchFamily="34" charset="-120"/>
+              </a:rPr>
+              <a:t>Guide</a:t>
+            </a:r>
+            <a:endParaRPr lang="en-US" sz="2400" dirty="0"/>
+          </a:p>
+        </p:txBody>
+      </p:sp>
+      <p:sp>
+        <p:nvSpPr>
+          <p:cNvPr id="13" name="text-301"/>
+          <p:cNvSpPr txBox="1"/>
+          <p:nvPr/>
+        </p:nvSpPr>
+        <p:spPr>
+          <a:xfrm>
+            <a:off x="4379976" y="4160520"/>
+            <a:ext cx="3429000" cy="1280160"/>
+          </a:xfrm>
+          <a:prstGeom prst="rect">
+            <a:avLst/>
+          </a:prstGeom>
+          <a:noFill/>
+          <a:ln/>
+        </p:spPr>
+        <p:txBody>
+          <a:bodyPr wrap="square" lIns="0" tIns="0" rIns="0" bIns="0" rtlCol="0" anchor="t"/>
+          <a:lstStyle/>
+          <a:p>
+            <a:pPr indent="0" marL="0">
+              <a:buNone/>
+            </a:pPr>
+            <a:r>
+              <a:rPr lang="en-US" sz="1500" dirty="0">
+                <a:solidFill>
+                  <a:schemeClr val="accent5"/>
+                </a:solidFill>
+                <a:latin typeface="DM Sans" pitchFamily="34" charset="0"/>
+                <a:ea typeface="DM Sans" pitchFamily="34" charset="-122"/>
+                <a:cs typeface="DM Sans" pitchFamily="34" charset="-120"/>
+              </a:rPr>
+              <a:t>Help us choose the one market to own first, and tell us which proof your network trusts.</a:t>
+            </a:r>
+            <a:endParaRPr lang="en-US" sz="1500" dirty="0"/>
+          </a:p>
+        </p:txBody>
+      </p:sp>
+      <p:sp>
+        <p:nvSpPr>
+          <p:cNvPr id="14" name="rule-302"/>
+          <p:cNvSpPr/>
+          <p:nvPr/>
+        </p:nvSpPr>
+        <p:spPr>
+          <a:xfrm>
+            <a:off x="8174736" y="2743200"/>
+            <a:ext cx="3429000" cy="0"/>
+          </a:xfrm>
+          <a:prstGeom prst="line">
+            <a:avLst/>
+          </a:prstGeom>
+          <a:noFill/>
+          <a:ln w="9525">
+            <a:solidFill>
+              <a:schemeClr val="tx1"/>
+            </a:solidFill>
+            <a:prstDash val="solid"/>
+          </a:ln>
+        </p:spPr>
+      </p:sp>
+      <p:sp>
+        <p:nvSpPr>
+          <p:cNvPr id="15" name="text-303"/>
+          <p:cNvSpPr txBox="1"/>
+          <p:nvPr/>
+        </p:nvSpPr>
+        <p:spPr>
+          <a:xfrm>
+            <a:off x="8174736" y="2926080"/>
+            <a:ext cx="3429000" cy="274320"/>
+          </a:xfrm>
+          <a:prstGeom prst="rect">
+            <a:avLst/>
+          </a:prstGeom>
+          <a:noFill/>
+          <a:ln/>
+        </p:spPr>
+        <p:txBody>
+          <a:bodyPr wrap="square" lIns="0" tIns="0" rIns="0" bIns="0" rtlCol="0" anchor="t"/>
+          <a:lstStyle/>
+          <a:p>
+            <a:pPr indent="0" marL="0">
+              <a:buNone/>
+            </a:pPr>
+            <a:r>
+              <a:rPr lang="en-US" sz="1300" dirty="0">
+                <a:solidFill>
+                  <a:schemeClr val="tx1"/>
+                </a:solidFill>
+                <a:latin typeface="DM Mono" pitchFamily="34" charset="0"/>
+                <a:ea typeface="DM Mono" pitchFamily="34" charset="-122"/>
+                <a:cs typeface="DM Mono" pitchFamily="34" charset="-120"/>
+              </a:rPr>
+              <a:t>#3</a:t>
+            </a:r>
+            <a:endParaRPr lang="en-US" sz="1300" dirty="0"/>
+          </a:p>
+        </p:txBody>
+      </p:sp>
+      <p:sp>
+        <p:nvSpPr>
+          <p:cNvPr id="16" name="text-304"/>
+          <p:cNvSpPr txBox="1"/>
+          <p:nvPr/>
+        </p:nvSpPr>
+        <p:spPr>
+          <a:xfrm>
+            <a:off x="8174736" y="3337560"/>
+            <a:ext cx="3429000" cy="822960"/>
+          </a:xfrm>
+          <a:prstGeom prst="rect">
+            <a:avLst/>
+          </a:prstGeom>
+          <a:noFill/>
+          <a:ln/>
+        </p:spPr>
+        <p:txBody>
+          <a:bodyPr wrap="square" lIns="0" tIns="0" rIns="0" bIns="0" rtlCol="0" anchor="t"/>
+          <a:lstStyle/>
+          <a:p>
+            <a:pPr indent="0" marL="0">
+              <a:buNone/>
+            </a:pPr>
+            <a:r>
+              <a:rPr lang="en-US" sz="2400" dirty="0">
+                <a:solidFill>
+                  <a:schemeClr val="tx1"/>
+                </a:solidFill>
+                <a:latin typeface="DM Sans" pitchFamily="34" charset="0"/>
+                <a:ea typeface="DM Sans" pitchFamily="34" charset="-122"/>
+                <a:cs typeface="DM Sans" pitchFamily="34" charset="-120"/>
+              </a:rPr>
+              <a:t>Introduce</a:t>
+            </a:r>
+            <a:endParaRPr lang="en-US" sz="2400" dirty="0"/>
+          </a:p>
+        </p:txBody>
+      </p:sp>
+      <p:sp>
+        <p:nvSpPr>
+          <p:cNvPr id="17" name="text-305"/>
+          <p:cNvSpPr txBox="1"/>
+          <p:nvPr/>
+        </p:nvSpPr>
+        <p:spPr>
+          <a:xfrm>
+            <a:off x="8174736" y="4160520"/>
+            <a:ext cx="3429000" cy="1280160"/>
+          </a:xfrm>
+          <a:prstGeom prst="rect">
+            <a:avLst/>
+          </a:prstGeom>
+          <a:noFill/>
+          <a:ln/>
+        </p:spPr>
+        <p:txBody>
+          <a:bodyPr wrap="square" lIns="0" tIns="0" rIns="0" bIns="0" rtlCol="0" anchor="t"/>
+          <a:lstStyle/>
+          <a:p>
+            <a:pPr indent="0" marL="0">
+              <a:buNone/>
+            </a:pPr>
+            <a:r>
+              <a:rPr lang="en-US" sz="1500" dirty="0">
+                <a:solidFill>
+                  <a:schemeClr val="accent5"/>
+                </a:solidFill>
+                <a:latin typeface="DM Sans" pitchFamily="34" charset="0"/>
+                <a:ea typeface="DM Sans" pitchFamily="34" charset="-122"/>
+                <a:cs typeface="DM Sans" pitchFamily="34" charset="-120"/>
+              </a:rPr>
+              <a:t>Connect us with experts and firms who need us, and join first calls where your name helps.</a:t>
+            </a:r>
+            <a:endParaRPr lang="en-US" sz="1500" dirty="0"/>
+          </a:p>
+        </p:txBody>
+      </p:sp>
+    </p:spTree>
+  </p:cSld>
+  <p:clrMapOvr>
+    <a:masterClrMapping/>
+  </p:clrMapOvr>
+</p:sld>
+</file>
+
+<file path=ppt/slides/slide26.xml><?xml version="1.0" encoding="utf-8"?>
+<p:sld xmlns:a="http://schemas.openxmlformats.org/drawingml/2006/main" xmlns:r="http://schemas.openxmlformats.org/officeDocument/2006/relationships" xmlns:p="http://schemas.openxmlformats.org/presentationml/2006/main">
+  <p:cSld name="Slide 26">
+    <p:spTree>
+      <p:nvGrpSpPr>
+        <p:cNvPr id="1" name=""/>
+        <p:cNvGrpSpPr/>
+        <p:nvPr/>
+      </p:nvGrpSpPr>
+      <p:grpSpPr>
+        <a:xfrm>
+          <a:off x="0" y="0"/>
+          <a:ext cx="0" cy="0"/>
+          <a:chOff x="0" y="0"/>
+          <a:chExt cx="0" cy="0"/>
+        </a:xfrm>
+      </p:grpSpPr>
+      <p:sp>
+        <p:nvSpPr>
+          <p:cNvPr id="3" name="text-306"/>
+          <p:cNvSpPr txBox="1"/>
+          <p:nvPr/>
+        </p:nvSpPr>
+        <p:spPr>
+          <a:xfrm>
+            <a:off x="585216" y="658368"/>
+            <a:ext cx="3657600" cy="274320"/>
+          </a:xfrm>
+          <a:prstGeom prst="rect">
+            <a:avLst/>
+          </a:prstGeom>
+          <a:noFill/>
+          <a:ln/>
+        </p:spPr>
+        <p:txBody>
+          <a:bodyPr wrap="square" lIns="0" tIns="0" rIns="0" bIns="0" rtlCol="0" anchor="t"/>
+          <a:lstStyle/>
+          <a:p>
+            <a:pPr indent="0" marL="0">
+              <a:buNone/>
+            </a:pPr>
+            <a:r>
+              <a:rPr lang="en-US" sz="1300" dirty="0">
+                <a:solidFill>
+                  <a:schemeClr val="tx1"/>
+                </a:solidFill>
+                <a:latin typeface="DM Mono" pitchFamily="34" charset="0"/>
+                <a:ea typeface="DM Mono" pitchFamily="34" charset="-122"/>
+                <a:cs typeface="DM Mono" pitchFamily="34" charset="-120"/>
+              </a:rPr>
+              <a:t>Extol Affiliates</a:t>
+            </a:r>
+            <a:endParaRPr lang="en-US" sz="1300" dirty="0"/>
+          </a:p>
+        </p:txBody>
+      </p:sp>
+      <p:sp>
+        <p:nvSpPr>
+          <p:cNvPr id="4" name="text-307"/>
+          <p:cNvSpPr txBox="1"/>
+          <p:nvPr/>
+        </p:nvSpPr>
+        <p:spPr>
+          <a:xfrm>
+            <a:off x="6117336" y="658368"/>
+            <a:ext cx="5486400" cy="274320"/>
+          </a:xfrm>
+          <a:prstGeom prst="rect">
+            <a:avLst/>
+          </a:prstGeom>
+          <a:noFill/>
+          <a:ln/>
+        </p:spPr>
+        <p:txBody>
+          <a:bodyPr wrap="square" lIns="0" tIns="0" rIns="0" bIns="0" rtlCol="0" anchor="t"/>
+          <a:lstStyle/>
+          <a:p>
+            <a:pPr algn="r" indent="0" marL="0">
+              <a:buNone/>
+            </a:pPr>
+            <a:r>
+              <a:rPr lang="en-US" sz="1300" dirty="0">
+                <a:solidFill>
+                  <a:schemeClr val="tx1"/>
+                </a:solidFill>
+                <a:latin typeface="DM Mono" pitchFamily="34" charset="0"/>
+                <a:ea typeface="DM Mono" pitchFamily="34" charset="-122"/>
+                <a:cs typeface="DM Mono" pitchFamily="34" charset="-120"/>
+              </a:rPr>
+              <a:t>Your role</a:t>
+            </a:r>
+            <a:endParaRPr lang="en-US" sz="1300" dirty="0"/>
+          </a:p>
+        </p:txBody>
+      </p:sp>
+      <p:sp>
+        <p:nvSpPr>
+          <p:cNvPr id="5" name="text-308"/>
+          <p:cNvSpPr txBox="1"/>
+          <p:nvPr/>
+        </p:nvSpPr>
+        <p:spPr>
+          <a:xfrm>
+            <a:off x="566928" y="1097280"/>
+            <a:ext cx="11018520" cy="1188720"/>
+          </a:xfrm>
+          <a:prstGeom prst="rect">
+            <a:avLst/>
+          </a:prstGeom>
+          <a:noFill/>
+          <a:ln/>
+        </p:spPr>
+        <p:txBody>
+          <a:bodyPr wrap="square" lIns="0" tIns="0" rIns="0" bIns="0" rtlCol="0" anchor="t"/>
+          <a:lstStyle/>
+          <a:p>
+            <a:pPr indent="0" marL="0">
+              <a:lnSpc>
+                <a:spcPct val="95000"/>
+              </a:lnSpc>
+              <a:buNone/>
+            </a:pPr>
+            <a:r>
+              <a:rPr lang="en-US" sz="4000" dirty="0">
+                <a:solidFill>
+                  <a:schemeClr val="tx1"/>
+                </a:solidFill>
+                <a:latin typeface="DM Sans" pitchFamily="34" charset="0"/>
+                <a:ea typeface="DM Sans" pitchFamily="34" charset="-122"/>
+                <a:cs typeface="DM Sans" pitchFamily="34" charset="-120"/>
+              </a:rPr>
+              <a:t>Where your experience matters most</a:t>
+            </a:r>
+            <a:endParaRPr lang="en-US" sz="4000" dirty="0"/>
+          </a:p>
+        </p:txBody>
+      </p:sp>
+      <p:sp>
+        <p:nvSpPr>
+          <p:cNvPr id="6" name="rule-309"/>
+          <p:cNvSpPr/>
+          <p:nvPr/>
+        </p:nvSpPr>
+        <p:spPr>
+          <a:xfrm>
+            <a:off x="585216" y="2606040"/>
+            <a:ext cx="5303520" cy="0"/>
+          </a:xfrm>
+          <a:prstGeom prst="line">
+            <a:avLst/>
+          </a:prstGeom>
+          <a:noFill/>
+          <a:ln w="9525">
+            <a:solidFill>
+              <a:schemeClr val="tx1"/>
+            </a:solidFill>
+            <a:prstDash val="solid"/>
+          </a:ln>
+        </p:spPr>
+      </p:sp>
+      <p:sp>
+        <p:nvSpPr>
+          <p:cNvPr id="7" name="text-310"/>
+          <p:cNvSpPr txBox="1"/>
+          <p:nvPr/>
+        </p:nvSpPr>
+        <p:spPr>
+          <a:xfrm>
+            <a:off x="585216" y="2770632"/>
+            <a:ext cx="5303520" cy="411480"/>
+          </a:xfrm>
+          <a:prstGeom prst="rect">
+            <a:avLst/>
+          </a:prstGeom>
+          <a:noFill/>
+          <a:ln/>
+        </p:spPr>
+        <p:txBody>
+          <a:bodyPr wrap="square" lIns="0" tIns="0" rIns="0" bIns="0" rtlCol="0" anchor="t"/>
+          <a:lstStyle/>
+          <a:p>
+            <a:pPr indent="0" marL="0">
+              <a:buNone/>
+            </a:pPr>
+            <a:r>
+              <a:rPr lang="en-US" sz="2200" dirty="0">
+                <a:solidFill>
+                  <a:schemeClr val="tx1"/>
+                </a:solidFill>
+                <a:latin typeface="DM Sans" pitchFamily="34" charset="0"/>
+                <a:ea typeface="DM Sans" pitchFamily="34" charset="-122"/>
+                <a:cs typeface="DM Sans" pitchFamily="34" charset="-120"/>
+              </a:rPr>
+              <a:t>Proof</a:t>
+            </a:r>
+            <a:endParaRPr lang="en-US" sz="2200" dirty="0"/>
+          </a:p>
+        </p:txBody>
+      </p:sp>
+      <p:sp>
+        <p:nvSpPr>
+          <p:cNvPr id="8" name="text-311"/>
+          <p:cNvSpPr txBox="1"/>
+          <p:nvPr/>
+        </p:nvSpPr>
+        <p:spPr>
+          <a:xfrm>
+            <a:off x="585216" y="3264408"/>
+            <a:ext cx="5303520" cy="365760"/>
+          </a:xfrm>
+          <a:prstGeom prst="rect">
+            <a:avLst/>
+          </a:prstGeom>
+          <a:noFill/>
+          <a:ln/>
+        </p:spPr>
+        <p:txBody>
+          <a:bodyPr wrap="square" lIns="0" tIns="0" rIns="0" bIns="0" rtlCol="0" anchor="t"/>
+          <a:lstStyle/>
+          <a:p>
+            <a:pPr indent="0" marL="0">
+              <a:buNone/>
+            </a:pPr>
+            <a:r>
+              <a:rPr lang="en-US" sz="1500" dirty="0">
+                <a:solidFill>
+                  <a:schemeClr val="accent5"/>
+                </a:solidFill>
+                <a:latin typeface="DM Sans" pitchFamily="34" charset="0"/>
+                <a:ea typeface="DM Sans" pitchFamily="34" charset="-122"/>
+                <a:cs typeface="DM Sans" pitchFamily="34" charset="-120"/>
+              </a:rPr>
+              <a:t>No case study with hard numbers yet.</a:t>
+            </a:r>
+            <a:endParaRPr lang="en-US" sz="1500" dirty="0"/>
+          </a:p>
+        </p:txBody>
+      </p:sp>
+      <p:sp>
+        <p:nvSpPr>
+          <p:cNvPr id="9" name="text-312"/>
+          <p:cNvSpPr txBox="1"/>
+          <p:nvPr/>
+        </p:nvSpPr>
+        <p:spPr>
+          <a:xfrm>
+            <a:off x="585216" y="3675888"/>
+            <a:ext cx="5303520" cy="320040"/>
+          </a:xfrm>
+          <a:prstGeom prst="rect">
+            <a:avLst/>
+          </a:prstGeom>
+          <a:noFill/>
+          <a:ln/>
+        </p:spPr>
+        <p:txBody>
+          <a:bodyPr wrap="square" lIns="0" tIns="0" rIns="0" bIns="0" rtlCol="0" anchor="t"/>
+          <a:lstStyle/>
+          <a:p>
+            <a:pPr indent="0" marL="0">
+              <a:buNone/>
+            </a:pPr>
+            <a:r>
+              <a:rPr lang="en-US" sz="1300" dirty="0">
+                <a:solidFill>
+                  <a:schemeClr val="tx1"/>
+                </a:solidFill>
+                <a:latin typeface="DM Mono" pitchFamily="34" charset="0"/>
+                <a:ea typeface="DM Mono" pitchFamily="34" charset="-122"/>
+                <a:cs typeface="DM Mono" pitchFamily="34" charset="-120"/>
+              </a:rPr>
+              <a:t>What proof would your network trust?</a:t>
+            </a:r>
+            <a:endParaRPr lang="en-US" sz="1300" dirty="0"/>
+          </a:p>
+        </p:txBody>
+      </p:sp>
+      <p:sp>
+        <p:nvSpPr>
+          <p:cNvPr id="10" name="rule-313"/>
+          <p:cNvSpPr/>
+          <p:nvPr/>
+        </p:nvSpPr>
+        <p:spPr>
+          <a:xfrm>
+            <a:off x="6300216" y="2606040"/>
+            <a:ext cx="5303520" cy="0"/>
+          </a:xfrm>
+          <a:prstGeom prst="line">
+            <a:avLst/>
+          </a:prstGeom>
+          <a:noFill/>
+          <a:ln w="9525">
+            <a:solidFill>
+              <a:schemeClr val="tx1"/>
+            </a:solidFill>
+            <a:prstDash val="solid"/>
+          </a:ln>
+        </p:spPr>
+      </p:sp>
+      <p:sp>
+        <p:nvSpPr>
+          <p:cNvPr id="11" name="text-314"/>
+          <p:cNvSpPr txBox="1"/>
+          <p:nvPr/>
+        </p:nvSpPr>
+        <p:spPr>
+          <a:xfrm>
+            <a:off x="6300216" y="2770632"/>
+            <a:ext cx="5303520" cy="411480"/>
+          </a:xfrm>
+          <a:prstGeom prst="rect">
+            <a:avLst/>
+          </a:prstGeom>
+          <a:noFill/>
+          <a:ln/>
+        </p:spPr>
+        <p:txBody>
+          <a:bodyPr wrap="square" lIns="0" tIns="0" rIns="0" bIns="0" rtlCol="0" anchor="t"/>
+          <a:lstStyle/>
+          <a:p>
+            <a:pPr indent="0" marL="0">
+              <a:buNone/>
+            </a:pPr>
+            <a:r>
+              <a:rPr lang="en-US" sz="2200" dirty="0">
+                <a:solidFill>
+                  <a:schemeClr val="tx1"/>
+                </a:solidFill>
+                <a:latin typeface="DM Sans" pitchFamily="34" charset="0"/>
+                <a:ea typeface="DM Sans" pitchFamily="34" charset="-122"/>
+                <a:cs typeface="DM Sans" pitchFamily="34" charset="-120"/>
+              </a:rPr>
+              <a:t>Focus</a:t>
+            </a:r>
+            <a:endParaRPr lang="en-US" sz="2200" dirty="0"/>
+          </a:p>
+        </p:txBody>
+      </p:sp>
+      <p:sp>
+        <p:nvSpPr>
+          <p:cNvPr id="12" name="text-315"/>
+          <p:cNvSpPr txBox="1"/>
+          <p:nvPr/>
+        </p:nvSpPr>
+        <p:spPr>
+          <a:xfrm>
+            <a:off x="6300216" y="3264408"/>
+            <a:ext cx="5303520" cy="365760"/>
+          </a:xfrm>
+          <a:prstGeom prst="rect">
+            <a:avLst/>
+          </a:prstGeom>
+          <a:noFill/>
+          <a:ln/>
+        </p:spPr>
+        <p:txBody>
+          <a:bodyPr wrap="square" lIns="0" tIns="0" rIns="0" bIns="0" rtlCol="0" anchor="t"/>
+          <a:lstStyle/>
+          <a:p>
+            <a:pPr indent="0" marL="0">
+              <a:buNone/>
+            </a:pPr>
+            <a:r>
+              <a:rPr lang="en-US" sz="1500" dirty="0">
+                <a:solidFill>
+                  <a:schemeClr val="accent5"/>
+                </a:solidFill>
+                <a:latin typeface="DM Sans" pitchFamily="34" charset="0"/>
+                <a:ea typeface="DM Sans" pitchFamily="34" charset="-122"/>
+                <a:cs typeface="DM Sans" pitchFamily="34" charset="-120"/>
+              </a:rPr>
+              <a:t>We work in three very different markets.</a:t>
+            </a:r>
+            <a:endParaRPr lang="en-US" sz="1500" dirty="0"/>
+          </a:p>
+        </p:txBody>
+      </p:sp>
+      <p:sp>
+        <p:nvSpPr>
+          <p:cNvPr id="13" name="text-316"/>
+          <p:cNvSpPr txBox="1"/>
+          <p:nvPr/>
+        </p:nvSpPr>
+        <p:spPr>
+          <a:xfrm>
+            <a:off x="6300216" y="3675888"/>
+            <a:ext cx="5303520" cy="320040"/>
+          </a:xfrm>
+          <a:prstGeom prst="rect">
+            <a:avLst/>
+          </a:prstGeom>
+          <a:noFill/>
+          <a:ln/>
+        </p:spPr>
+        <p:txBody>
+          <a:bodyPr wrap="square" lIns="0" tIns="0" rIns="0" bIns="0" rtlCol="0" anchor="t"/>
+          <a:lstStyle/>
+          <a:p>
+            <a:pPr indent="0" marL="0">
+              <a:buNone/>
+            </a:pPr>
+            <a:r>
+              <a:rPr lang="en-US" sz="1300" dirty="0">
+                <a:solidFill>
+                  <a:schemeClr val="tx1"/>
+                </a:solidFill>
+                <a:latin typeface="DM Mono" pitchFamily="34" charset="0"/>
+                <a:ea typeface="DM Mono" pitchFamily="34" charset="-122"/>
+                <a:cs typeface="DM Mono" pitchFamily="34" charset="-120"/>
+              </a:rPr>
+              <a:t>Which one should we own?</a:t>
+            </a:r>
+            <a:endParaRPr lang="en-US" sz="1300" dirty="0"/>
+          </a:p>
+        </p:txBody>
+      </p:sp>
+      <p:sp>
+        <p:nvSpPr>
+          <p:cNvPr id="14" name="rule-317"/>
+          <p:cNvSpPr/>
+          <p:nvPr/>
+        </p:nvSpPr>
+        <p:spPr>
+          <a:xfrm>
+            <a:off x="585216" y="4389120"/>
+            <a:ext cx="5303520" cy="0"/>
+          </a:xfrm>
+          <a:prstGeom prst="line">
+            <a:avLst/>
+          </a:prstGeom>
+          <a:noFill/>
+          <a:ln w="9525">
+            <a:solidFill>
+              <a:schemeClr val="tx1"/>
+            </a:solidFill>
+            <a:prstDash val="solid"/>
+          </a:ln>
+        </p:spPr>
+      </p:sp>
+      <p:sp>
+        <p:nvSpPr>
+          <p:cNvPr id="15" name="text-318"/>
+          <p:cNvSpPr txBox="1"/>
+          <p:nvPr/>
+        </p:nvSpPr>
+        <p:spPr>
+          <a:xfrm>
+            <a:off x="585216" y="4553712"/>
+            <a:ext cx="5303520" cy="411480"/>
+          </a:xfrm>
+          <a:prstGeom prst="rect">
+            <a:avLst/>
+          </a:prstGeom>
+          <a:noFill/>
+          <a:ln/>
+        </p:spPr>
+        <p:txBody>
+          <a:bodyPr wrap="square" lIns="0" tIns="0" rIns="0" bIns="0" rtlCol="0" anchor="t"/>
+          <a:lstStyle/>
+          <a:p>
+            <a:pPr indent="0" marL="0">
+              <a:buNone/>
+            </a:pPr>
+            <a:r>
+              <a:rPr lang="en-US" sz="2200" dirty="0">
+                <a:solidFill>
+                  <a:schemeClr val="tx1"/>
+                </a:solidFill>
+                <a:latin typeface="DM Sans" pitchFamily="34" charset="0"/>
+                <a:ea typeface="DM Sans" pitchFamily="34" charset="-122"/>
+                <a:cs typeface="DM Sans" pitchFamily="34" charset="-120"/>
+              </a:rPr>
+              <a:t>Pricing</a:t>
+            </a:r>
+            <a:endParaRPr lang="en-US" sz="2200" dirty="0"/>
+          </a:p>
+        </p:txBody>
+      </p:sp>
+      <p:sp>
+        <p:nvSpPr>
+          <p:cNvPr id="16" name="text-319"/>
+          <p:cNvSpPr txBox="1"/>
+          <p:nvPr/>
+        </p:nvSpPr>
+        <p:spPr>
+          <a:xfrm>
+            <a:off x="585216" y="5047488"/>
+            <a:ext cx="5303520" cy="365760"/>
+          </a:xfrm>
+          <a:prstGeom prst="rect">
+            <a:avLst/>
+          </a:prstGeom>
+          <a:noFill/>
+          <a:ln/>
+        </p:spPr>
+        <p:txBody>
+          <a:bodyPr wrap="square" lIns="0" tIns="0" rIns="0" bIns="0" rtlCol="0" anchor="t"/>
+          <a:lstStyle/>
+          <a:p>
+            <a:pPr indent="0" marL="0">
+              <a:buNone/>
+            </a:pPr>
+            <a:r>
+              <a:rPr lang="en-US" sz="1500" dirty="0">
+                <a:solidFill>
+                  <a:schemeClr val="accent5"/>
+                </a:solidFill>
+                <a:latin typeface="DM Sans" pitchFamily="34" charset="0"/>
+                <a:ea typeface="DM Sans" pitchFamily="34" charset="-122"/>
+                <a:cs typeface="DM Sans" pitchFamily="34" charset="-120"/>
+              </a:rPr>
+              <a:t>Our price is tested with only one client.</a:t>
+            </a:r>
+            <a:endParaRPr lang="en-US" sz="1500" dirty="0"/>
+          </a:p>
+        </p:txBody>
+      </p:sp>
+      <p:sp>
+        <p:nvSpPr>
+          <p:cNvPr id="17" name="text-320"/>
+          <p:cNvSpPr txBox="1"/>
+          <p:nvPr/>
+        </p:nvSpPr>
+        <p:spPr>
+          <a:xfrm>
+            <a:off x="585216" y="5458968"/>
+            <a:ext cx="5303520" cy="320040"/>
+          </a:xfrm>
+          <a:prstGeom prst="rect">
+            <a:avLst/>
+          </a:prstGeom>
+          <a:noFill/>
+          <a:ln/>
+        </p:spPr>
+        <p:txBody>
+          <a:bodyPr wrap="square" lIns="0" tIns="0" rIns="0" bIns="0" rtlCol="0" anchor="t"/>
+          <a:lstStyle/>
+          <a:p>
+            <a:pPr indent="0" marL="0">
+              <a:buNone/>
+            </a:pPr>
+            <a:r>
+              <a:rPr lang="en-US" sz="1300" dirty="0">
+                <a:solidFill>
+                  <a:schemeClr val="tx1"/>
+                </a:solidFill>
+                <a:latin typeface="DM Mono" pitchFamily="34" charset="0"/>
+                <a:ea typeface="DM Mono" pitchFamily="34" charset="-122"/>
+                <a:cs typeface="DM Mono" pitchFamily="34" charset="-120"/>
+              </a:rPr>
+              <a:t>Is it right for the value?</a:t>
+            </a:r>
+            <a:endParaRPr lang="en-US" sz="1300" dirty="0"/>
+          </a:p>
+        </p:txBody>
+      </p:sp>
+      <p:sp>
+        <p:nvSpPr>
+          <p:cNvPr id="18" name="rule-321"/>
+          <p:cNvSpPr/>
+          <p:nvPr/>
+        </p:nvSpPr>
+        <p:spPr>
+          <a:xfrm>
+            <a:off x="6300216" y="4389120"/>
+            <a:ext cx="5303520" cy="0"/>
+          </a:xfrm>
+          <a:prstGeom prst="line">
+            <a:avLst/>
+          </a:prstGeom>
+          <a:noFill/>
+          <a:ln w="9525">
+            <a:solidFill>
+              <a:schemeClr val="tx1"/>
+            </a:solidFill>
+            <a:prstDash val="solid"/>
+          </a:ln>
+        </p:spPr>
+      </p:sp>
+      <p:sp>
+        <p:nvSpPr>
+          <p:cNvPr id="19" name="text-322"/>
+          <p:cNvSpPr txBox="1"/>
+          <p:nvPr/>
+        </p:nvSpPr>
+        <p:spPr>
+          <a:xfrm>
+            <a:off x="6300216" y="4553712"/>
+            <a:ext cx="5303520" cy="411480"/>
+          </a:xfrm>
+          <a:prstGeom prst="rect">
+            <a:avLst/>
+          </a:prstGeom>
+          <a:noFill/>
+          <a:ln/>
+        </p:spPr>
+        <p:txBody>
+          <a:bodyPr wrap="square" lIns="0" tIns="0" rIns="0" bIns="0" rtlCol="0" anchor="t"/>
+          <a:lstStyle/>
+          <a:p>
+            <a:pPr indent="0" marL="0">
+              <a:buNone/>
+            </a:pPr>
+            <a:r>
+              <a:rPr lang="en-US" sz="2200" dirty="0">
+                <a:solidFill>
+                  <a:schemeClr val="tx1"/>
+                </a:solidFill>
+                <a:latin typeface="DM Sans" pitchFamily="34" charset="0"/>
+                <a:ea typeface="DM Sans" pitchFamily="34" charset="-122"/>
+                <a:cs typeface="DM Sans" pitchFamily="34" charset="-120"/>
+              </a:rPr>
+              <a:t>Growth</a:t>
+            </a:r>
+            <a:endParaRPr lang="en-US" sz="2200" dirty="0"/>
+          </a:p>
+        </p:txBody>
+      </p:sp>
+      <p:sp>
+        <p:nvSpPr>
+          <p:cNvPr id="20" name="text-323"/>
+          <p:cNvSpPr txBox="1"/>
+          <p:nvPr/>
+        </p:nvSpPr>
+        <p:spPr>
+          <a:xfrm>
+            <a:off x="6300216" y="5047488"/>
+            <a:ext cx="5303520" cy="365760"/>
+          </a:xfrm>
+          <a:prstGeom prst="rect">
+            <a:avLst/>
+          </a:prstGeom>
+          <a:noFill/>
+          <a:ln/>
+        </p:spPr>
+        <p:txBody>
+          <a:bodyPr wrap="square" lIns="0" tIns="0" rIns="0" bIns="0" rtlCol="0" anchor="t"/>
+          <a:lstStyle/>
+          <a:p>
+            <a:pPr indent="0" marL="0">
+              <a:buNone/>
+            </a:pPr>
+            <a:r>
+              <a:rPr lang="en-US" sz="1500" dirty="0">
+                <a:solidFill>
+                  <a:schemeClr val="accent5"/>
+                </a:solidFill>
+                <a:latin typeface="DM Sans" pitchFamily="34" charset="0"/>
+                <a:ea typeface="DM Sans" pitchFamily="34" charset="-122"/>
+                <a:cs typeface="DM Sans" pitchFamily="34" charset="-120"/>
+              </a:rPr>
+              <a:t>Two founders do sales and delivery.</a:t>
+            </a:r>
+            <a:endParaRPr lang="en-US" sz="1500" dirty="0"/>
+          </a:p>
+        </p:txBody>
+      </p:sp>
+      <p:sp>
+        <p:nvSpPr>
+          <p:cNvPr id="21" name="text-324"/>
+          <p:cNvSpPr txBox="1"/>
+          <p:nvPr/>
+        </p:nvSpPr>
+        <p:spPr>
+          <a:xfrm>
+            <a:off x="6300216" y="5458968"/>
+            <a:ext cx="5303520" cy="320040"/>
+          </a:xfrm>
+          <a:prstGeom prst="rect">
+            <a:avLst/>
+          </a:prstGeom>
+          <a:noFill/>
+          <a:ln/>
+        </p:spPr>
+        <p:txBody>
+          <a:bodyPr wrap="square" lIns="0" tIns="0" rIns="0" bIns="0" rtlCol="0" anchor="t"/>
+          <a:lstStyle/>
+          <a:p>
+            <a:pPr indent="0" marL="0">
+              <a:buNone/>
+            </a:pPr>
+            <a:r>
+              <a:rPr lang="en-US" sz="1300" dirty="0">
+                <a:solidFill>
+                  <a:schemeClr val="tx1"/>
+                </a:solidFill>
+                <a:latin typeface="DM Mono" pitchFamily="34" charset="0"/>
+                <a:ea typeface="DM Mono" pitchFamily="34" charset="-122"/>
+                <a:cs typeface="DM Mono" pitchFamily="34" charset="-120"/>
+              </a:rPr>
+              <a:t>When should we hire, and who?</a:t>
+            </a:r>
+            <a:endParaRPr lang="en-US" sz="1300" dirty="0"/>
+          </a:p>
+        </p:txBody>
+      </p:sp>
+    </p:spTree>
+  </p:cSld>
+  <p:clrMapOvr>
+    <a:masterClrMapping/>
+  </p:clrMapOvr>
+</p:sld>
+</file>
+
+<file path=ppt/slides/slide27.xml><?xml version="1.0" encoding="utf-8"?>
+<p:sld xmlns:a="http://schemas.openxmlformats.org/drawingml/2006/main" xmlns:r="http://schemas.openxmlformats.org/officeDocument/2006/relationships" xmlns:p="http://schemas.openxmlformats.org/presentationml/2006/main">
+  <p:cSld name="Slide 27">
+    <p:spTree>
+      <p:nvGrpSpPr>
+        <p:cNvPr id="1" name=""/>
+        <p:cNvGrpSpPr/>
+        <p:nvPr/>
+      </p:nvGrpSpPr>
+      <p:grpSpPr>
+        <a:xfrm>
+          <a:off x="0" y="0"/>
+          <a:ext cx="0" cy="0"/>
+          <a:chOff x="0" y="0"/>
+          <a:chExt cx="0" cy="0"/>
+        </a:xfrm>
+      </p:grpSpPr>
+      <p:sp>
+        <p:nvSpPr>
+          <p:cNvPr id="3" name="text-325"/>
+          <p:cNvSpPr txBox="1"/>
+          <p:nvPr/>
+        </p:nvSpPr>
+        <p:spPr>
+          <a:xfrm>
+            <a:off x="585216" y="658368"/>
+            <a:ext cx="3657600" cy="274320"/>
+          </a:xfrm>
+          <a:prstGeom prst="rect">
+            <a:avLst/>
+          </a:prstGeom>
+          <a:noFill/>
+          <a:ln/>
+        </p:spPr>
+        <p:txBody>
+          <a:bodyPr wrap="square" lIns="0" tIns="0" rIns="0" bIns="0" rtlCol="0" anchor="t"/>
+          <a:lstStyle/>
+          <a:p>
+            <a:pPr indent="0" marL="0">
+              <a:buNone/>
+            </a:pPr>
+            <a:r>
+              <a:rPr lang="en-US" sz="1300" dirty="0">
+                <a:solidFill>
+                  <a:schemeClr val="tx1"/>
+                </a:solidFill>
+                <a:latin typeface="DM Mono" pitchFamily="34" charset="0"/>
+                <a:ea typeface="DM Mono" pitchFamily="34" charset="-122"/>
+                <a:cs typeface="DM Mono" pitchFamily="34" charset="-120"/>
+              </a:rPr>
+              <a:t>Extol Affiliates</a:t>
+            </a:r>
+            <a:endParaRPr lang="en-US" sz="1300" dirty="0"/>
+          </a:p>
+        </p:txBody>
+      </p:sp>
+      <p:sp>
+        <p:nvSpPr>
+          <p:cNvPr id="4" name="text-326"/>
+          <p:cNvSpPr txBox="1"/>
+          <p:nvPr/>
+        </p:nvSpPr>
+        <p:spPr>
+          <a:xfrm>
+            <a:off x="6117336" y="658368"/>
+            <a:ext cx="5486400" cy="274320"/>
+          </a:xfrm>
+          <a:prstGeom prst="rect">
+            <a:avLst/>
+          </a:prstGeom>
+          <a:noFill/>
+          <a:ln/>
+        </p:spPr>
+        <p:txBody>
+          <a:bodyPr wrap="square" lIns="0" tIns="0" rIns="0" bIns="0" rtlCol="0" anchor="t"/>
+          <a:lstStyle/>
+          <a:p>
+            <a:pPr algn="r" indent="0" marL="0">
+              <a:buNone/>
+            </a:pPr>
+            <a:r>
+              <a:rPr lang="en-US" sz="1300" dirty="0">
+                <a:solidFill>
+                  <a:schemeClr val="tx1"/>
+                </a:solidFill>
+                <a:latin typeface="DM Mono" pitchFamily="34" charset="0"/>
+                <a:ea typeface="DM Mono" pitchFamily="34" charset="-122"/>
+                <a:cs typeface="DM Mono" pitchFamily="34" charset="-120"/>
+              </a:rPr>
+              <a:t>Your role</a:t>
+            </a:r>
+            <a:endParaRPr lang="en-US" sz="1300" dirty="0"/>
+          </a:p>
+        </p:txBody>
+      </p:sp>
+      <p:sp>
+        <p:nvSpPr>
+          <p:cNvPr id="5" name="text-327"/>
+          <p:cNvSpPr txBox="1"/>
+          <p:nvPr/>
+        </p:nvSpPr>
+        <p:spPr>
+          <a:xfrm>
+            <a:off x="566928" y="1097280"/>
+            <a:ext cx="11018520" cy="1188720"/>
+          </a:xfrm>
+          <a:prstGeom prst="rect">
+            <a:avLst/>
+          </a:prstGeom>
+          <a:noFill/>
+          <a:ln/>
+        </p:spPr>
+        <p:txBody>
+          <a:bodyPr wrap="square" lIns="0" tIns="0" rIns="0" bIns="0" rtlCol="0" anchor="t"/>
+          <a:lstStyle/>
+          <a:p>
+            <a:pPr indent="0" marL="0">
+              <a:lnSpc>
+                <a:spcPct val="95000"/>
+              </a:lnSpc>
+              <a:buNone/>
+            </a:pPr>
+            <a:r>
+              <a:rPr lang="en-US" sz="4000" dirty="0">
+                <a:solidFill>
+                  <a:schemeClr val="tx1"/>
+                </a:solidFill>
+                <a:latin typeface="DM Sans" pitchFamily="34" charset="0"/>
+                <a:ea typeface="DM Sans" pitchFamily="34" charset="-122"/>
+                <a:cs typeface="DM Sans" pitchFamily="34" charset="-120"/>
+              </a:rPr>
               <a:t>How we could work together: three options</a:t>
             </a:r>
             <a:endParaRPr lang="en-US" sz="4000" dirty="0"/>
@@ -14046,7 +15745,7 @@
       </p:sp>
       <p:graphicFrame>
         <p:nvGraphicFramePr>
-          <p:cNvPr id="26" name="table-311"/>
+          <p:cNvPr id="28" name="table-328"/>
           <p:cNvGraphicFramePr>
             <a:graphicFrameLocks noGrp="1"/>
           </p:cNvGraphicFramePr>
@@ -14649,7 +16348,7 @@
       </p:graphicFrame>
       <p:sp>
         <p:nvSpPr>
-          <p:cNvPr id="7" name="text-312"/>
+          <p:cNvPr id="7" name="text-329"/>
           <p:cNvSpPr txBox="1"/>
           <p:nvPr/>
         </p:nvSpPr>
@@ -14694,9 +16393,9 @@
 </p:sld>
 </file>
 
-<file path=ppt/slides/slide26.xml><?xml version="1.0" encoding="utf-8"?>
+<file path=ppt/slides/slide28.xml><?xml version="1.0" encoding="utf-8"?>
 <p:sld xmlns:a="http://schemas.openxmlformats.org/drawingml/2006/main" xmlns:r="http://schemas.openxmlformats.org/officeDocument/2006/relationships" xmlns:p="http://schemas.openxmlformats.org/presentationml/2006/main">
-  <p:cSld name="Slide 26">
+  <p:cSld name="Slide 28">
     <p:spTree>
       <p:nvGrpSpPr>
         <p:cNvPr id="1" name=""/>
@@ -14713,7 +16412,7 @@
       </p:grpSpPr>
       <p:sp>
         <p:nvSpPr>
-          <p:cNvPr id="3" name="text-313"/>
+          <p:cNvPr id="3" name="text-330"/>
           <p:cNvSpPr txBox="1"/>
           <p:nvPr/>
         </p:nvSpPr>
@@ -14752,7 +16451,7 @@
       </p:sp>
       <p:sp>
         <p:nvSpPr>
-          <p:cNvPr id="4" name="text-314"/>
+          <p:cNvPr id="4" name="text-331"/>
           <p:cNvSpPr txBox="1"/>
           <p:nvPr/>
         </p:nvSpPr>
@@ -14791,7 +16490,7 @@
       </p:sp>
       <p:sp>
         <p:nvSpPr>
-          <p:cNvPr id="5" name="text-315"/>
+          <p:cNvPr id="5" name="text-332"/>
           <p:cNvSpPr txBox="1"/>
           <p:nvPr/>
         </p:nvSpPr>
@@ -14833,7 +16532,7 @@
       </p:sp>
       <p:sp>
         <p:nvSpPr>
-          <p:cNvPr id="6" name="rule-316"/>
+          <p:cNvPr id="6" name="rule-333"/>
           <p:cNvSpPr/>
           <p:nvPr/>
         </p:nvSpPr>
@@ -14856,7 +16555,7 @@
       </p:sp>
       <p:sp>
         <p:nvSpPr>
-          <p:cNvPr id="7" name="text-317"/>
+          <p:cNvPr id="7" name="text-334"/>
           <p:cNvSpPr txBox="1"/>
           <p:nvPr/>
         </p:nvSpPr>
@@ -14895,7 +16594,7 @@
       </p:sp>
       <p:sp>
         <p:nvSpPr>
-          <p:cNvPr id="8" name="text-318"/>
+          <p:cNvPr id="8" name="text-335"/>
           <p:cNvSpPr txBox="1"/>
           <p:nvPr/>
         </p:nvSpPr>
@@ -14934,7 +16633,7 @@
       </p:sp>
       <p:sp>
         <p:nvSpPr>
-          <p:cNvPr id="9" name="text-319"/>
+          <p:cNvPr id="9" name="text-336"/>
           <p:cNvSpPr txBox="1"/>
           <p:nvPr/>
         </p:nvSpPr>
@@ -14973,7 +16672,7 @@
       </p:sp>
       <p:sp>
         <p:nvSpPr>
-          <p:cNvPr id="10" name="rule-320"/>
+          <p:cNvPr id="10" name="rule-337"/>
           <p:cNvSpPr/>
           <p:nvPr/>
         </p:nvSpPr>
@@ -14996,7 +16695,7 @@
       </p:sp>
       <p:sp>
         <p:nvSpPr>
-          <p:cNvPr id="11" name="text-321"/>
+          <p:cNvPr id="11" name="text-338"/>
           <p:cNvSpPr txBox="1"/>
           <p:nvPr/>
         </p:nvSpPr>
@@ -15035,7 +16734,7 @@
       </p:sp>
       <p:sp>
         <p:nvSpPr>
-          <p:cNvPr id="12" name="text-322"/>
+          <p:cNvPr id="12" name="text-339"/>
           <p:cNvSpPr txBox="1"/>
           <p:nvPr/>
         </p:nvSpPr>
@@ -15074,7 +16773,7 @@
       </p:sp>
       <p:sp>
         <p:nvSpPr>
-          <p:cNvPr id="13" name="text-323"/>
+          <p:cNvPr id="13" name="text-340"/>
           <p:cNvSpPr txBox="1"/>
           <p:nvPr/>
         </p:nvSpPr>
@@ -15113,7 +16812,7 @@
       </p:sp>
       <p:sp>
         <p:nvSpPr>
-          <p:cNvPr id="14" name="rule-324"/>
+          <p:cNvPr id="14" name="rule-341"/>
           <p:cNvSpPr/>
           <p:nvPr/>
         </p:nvSpPr>
@@ -15136,7 +16835,7 @@
       </p:sp>
       <p:sp>
         <p:nvSpPr>
-          <p:cNvPr id="15" name="text-325"/>
+          <p:cNvPr id="15" name="text-342"/>
           <p:cNvSpPr txBox="1"/>
           <p:nvPr/>
         </p:nvSpPr>
@@ -15175,7 +16874,7 @@
       </p:sp>
       <p:sp>
         <p:nvSpPr>
-          <p:cNvPr id="16" name="text-326"/>
+          <p:cNvPr id="16" name="text-343"/>
           <p:cNvSpPr txBox="1"/>
           <p:nvPr/>
         </p:nvSpPr>
@@ -15214,7 +16913,7 @@
       </p:sp>
       <p:sp>
         <p:nvSpPr>
-          <p:cNvPr id="17" name="text-327"/>
+          <p:cNvPr id="17" name="text-344"/>
           <p:cNvSpPr txBox="1"/>
           <p:nvPr/>
         </p:nvSpPr>
@@ -15253,7 +16952,7 @@
       </p:sp>
       <p:sp>
         <p:nvSpPr>
-          <p:cNvPr id="18" name="rule-328"/>
+          <p:cNvPr id="18" name="rule-345"/>
           <p:cNvSpPr/>
           <p:nvPr/>
         </p:nvSpPr>
@@ -15276,7 +16975,7 @@
       </p:sp>
       <p:sp>
         <p:nvSpPr>
-          <p:cNvPr id="19" name="text-329"/>
+          <p:cNvPr id="19" name="text-346"/>
           <p:cNvSpPr txBox="1"/>
           <p:nvPr/>
         </p:nvSpPr>
@@ -15315,7 +17014,7 @@
       </p:sp>
       <p:sp>
         <p:nvSpPr>
-          <p:cNvPr id="20" name="text-330"/>
+          <p:cNvPr id="20" name="text-347"/>
           <p:cNvSpPr txBox="1"/>
           <p:nvPr/>
         </p:nvSpPr>
@@ -15354,7 +17053,7 @@
       </p:sp>
       <p:sp>
         <p:nvSpPr>
-          <p:cNvPr id="21" name="text-331"/>
+          <p:cNvPr id="21" name="text-348"/>
           <p:cNvSpPr txBox="1"/>
           <p:nvPr/>
         </p:nvSpPr>
@@ -15393,7 +17092,7 @@
       </p:sp>
       <p:sp>
         <p:nvSpPr>
-          <p:cNvPr id="22" name="text-332"/>
+          <p:cNvPr id="22" name="text-349"/>
           <p:cNvSpPr txBox="1"/>
           <p:nvPr/>
         </p:nvSpPr>
@@ -15438,9 +17137,9 @@
 </p:sld>
 </file>
 
-<file path=ppt/slides/slide27.xml><?xml version="1.0" encoding="utf-8"?>
+<file path=ppt/slides/slide29.xml><?xml version="1.0" encoding="utf-8"?>
 <p:sld xmlns:a="http://schemas.openxmlformats.org/drawingml/2006/main" xmlns:r="http://schemas.openxmlformats.org/officeDocument/2006/relationships" xmlns:p="http://schemas.openxmlformats.org/presentationml/2006/main">
-  <p:cSld name="Slide 27">
+  <p:cSld name="Slide 29">
     <p:spTree>
       <p:nvGrpSpPr>
         <p:cNvPr id="1" name=""/>
@@ -15457,7 +17156,7 @@
       </p:grpSpPr>
       <p:sp>
         <p:nvSpPr>
-          <p:cNvPr id="2" name="text-333"/>
+          <p:cNvPr id="2" name="text-350"/>
           <p:cNvSpPr txBox="1"/>
           <p:nvPr/>
         </p:nvSpPr>
@@ -15496,7 +17195,7 @@
       </p:sp>
       <p:sp>
         <p:nvSpPr>
-          <p:cNvPr id="3" name="text-334"/>
+          <p:cNvPr id="3" name="text-351"/>
           <p:cNvSpPr txBox="1"/>
           <p:nvPr/>
         </p:nvSpPr>
@@ -15535,7 +17234,7 @@
       </p:sp>
       <p:sp>
         <p:nvSpPr>
-          <p:cNvPr id="4" name="text-335"/>
+          <p:cNvPr id="4" name="text-352"/>
           <p:cNvSpPr txBox="1"/>
           <p:nvPr/>
         </p:nvSpPr>
@@ -15591,7 +17290,7 @@
       </p:sp>
       <p:sp>
         <p:nvSpPr>
-          <p:cNvPr id="5" name="text-336"/>
+          <p:cNvPr id="5" name="text-353"/>
           <p:cNvSpPr txBox="1"/>
           <p:nvPr/>
         </p:nvSpPr>
@@ -15647,7 +17346,7 @@
       </p:sp>
       <p:sp>
         <p:nvSpPr>
-          <p:cNvPr id="6" name="text-337"/>
+          <p:cNvPr id="6" name="text-354"/>
           <p:cNvSpPr txBox="1"/>
           <p:nvPr/>
         </p:nvSpPr>
@@ -17594,7 +19293,7 @@
         </p:nvGraphicFramePr>
         <p:xfrm>
           <a:off x="4480560" y="2971800"/>
-          <a:ext cx="7132320" cy="3063240"/>
+          <a:ext cx="4114800" cy="3063240"/>
         </p:xfrm>
         <a:graphic xmlns:a="http://schemas.openxmlformats.org/drawingml/2006/main">
           <a:graphicData uri="http://schemas.openxmlformats.org/drawingml/2006/chart">
@@ -17641,6 +19340,61 @@
           </a:p>
         </p:txBody>
       </p:sp>
+      <p:sp>
+        <p:nvSpPr>
+          <p:cNvPr id="11" name="text-54"/>
+          <p:cNvSpPr txBox="1"/>
+          <p:nvPr/>
+        </p:nvSpPr>
+        <p:spPr>
+          <a:xfrm>
+            <a:off x="8915400" y="2651760"/>
+            <a:ext cx="2697480" cy="274320"/>
+          </a:xfrm>
+          <a:prstGeom prst="rect">
+            <a:avLst/>
+          </a:prstGeom>
+          <a:noFill/>
+          <a:ln/>
+        </p:spPr>
+        <p:txBody>
+          <a:bodyPr wrap="square" lIns="0" tIns="0" rIns="0" bIns="0" rtlCol="0" anchor="t"/>
+          <a:lstStyle/>
+          <a:p>
+            <a:pPr indent="0" marL="0">
+              <a:buNone/>
+            </a:pPr>
+            <a:r>
+              <a:rPr lang="en-US" sz="1300" dirty="0">
+                <a:solidFill>
+                  <a:schemeClr val="tx1"/>
+                </a:solidFill>
+                <a:latin typeface="DM Mono" pitchFamily="34" charset="0"/>
+                <a:ea typeface="DM Mono" pitchFamily="34" charset="-122"/>
+                <a:cs typeface="DM Mono" pitchFamily="34" charset="-120"/>
+              </a:rPr>
+              <a:t>What their comments said</a:t>
+            </a:r>
+            <a:endParaRPr lang="en-US" sz="1300" dirty="0"/>
+          </a:p>
+        </p:txBody>
+      </p:sp>
+      <p:graphicFrame>
+        <p:nvGraphicFramePr>
+          <p:cNvPr id="12" name="comments-chart" descr=""/>
+          <p:cNvGraphicFramePr/>
+          <p:nvPr/>
+        </p:nvGraphicFramePr>
+        <p:xfrm>
+          <a:off x="8778240" y="2971800"/>
+          <a:ext cx="2834640" cy="3063240"/>
+        </p:xfrm>
+        <a:graphic xmlns:a="http://schemas.openxmlformats.org/drawingml/2006/main">
+          <a:graphicData uri="http://schemas.openxmlformats.org/drawingml/2006/chart">
+            <c:chart xmlns:c="http://schemas.openxmlformats.org/drawingml/2006/chart" r:id="rId2"/>
+          </a:graphicData>
+        </a:graphic>
+      </p:graphicFrame>
     </p:spTree>
   </p:cSld>
   <p:clrMapOvr>
@@ -17668,7 +19422,7 @@
       </p:grpSpPr>
       <p:sp>
         <p:nvSpPr>
-          <p:cNvPr id="2" name="text-54"/>
+          <p:cNvPr id="2" name="text-55"/>
           <p:cNvSpPr txBox="1"/>
           <p:nvPr/>
         </p:nvSpPr>
@@ -17707,7 +19461,7 @@
       </p:sp>
       <p:sp>
         <p:nvSpPr>
-          <p:cNvPr id="3" name="text-55"/>
+          <p:cNvPr id="3" name="text-56"/>
           <p:cNvSpPr txBox="1"/>
           <p:nvPr/>
         </p:nvSpPr>
@@ -17746,7 +19500,7 @@
       </p:sp>
       <p:sp>
         <p:nvSpPr>
-          <p:cNvPr id="4" name="text-56"/>
+          <p:cNvPr id="4" name="text-57"/>
           <p:cNvSpPr txBox="1"/>
           <p:nvPr/>
         </p:nvSpPr>
@@ -17785,7 +19539,7 @@
       </p:sp>
       <p:sp>
         <p:nvSpPr>
-          <p:cNvPr id="5" name="text-57"/>
+          <p:cNvPr id="5" name="text-58"/>
           <p:cNvSpPr txBox="1"/>
           <p:nvPr/>
         </p:nvSpPr>
@@ -17847,7 +19601,7 @@
       </p:sp>
       <p:sp>
         <p:nvSpPr>
-          <p:cNvPr id="6" name="arrow-58"/>
+          <p:cNvPr id="6" name="arrow-59"/>
           <p:cNvSpPr/>
           <p:nvPr/>
         </p:nvSpPr>
@@ -17896,7 +19650,7 @@
       </p:grpSpPr>
       <p:sp>
         <p:nvSpPr>
-          <p:cNvPr id="3" name="text-59"/>
+          <p:cNvPr id="3" name="text-60"/>
           <p:cNvSpPr txBox="1"/>
           <p:nvPr/>
         </p:nvSpPr>
@@ -17935,7 +19689,7 @@
       </p:sp>
       <p:sp>
         <p:nvSpPr>
-          <p:cNvPr id="4" name="text-60"/>
+          <p:cNvPr id="4" name="text-61"/>
           <p:cNvSpPr txBox="1"/>
           <p:nvPr/>
         </p:nvSpPr>
@@ -17974,7 +19728,7 @@
       </p:sp>
       <p:sp>
         <p:nvSpPr>
-          <p:cNvPr id="5" name="text-61"/>
+          <p:cNvPr id="5" name="text-62"/>
           <p:cNvSpPr txBox="1"/>
           <p:nvPr/>
         </p:nvSpPr>
@@ -18016,7 +19770,7 @@
       </p:sp>
       <p:graphicFrame>
         <p:nvGraphicFramePr>
-          <p:cNvPr id="10" name="table-62"/>
+          <p:cNvPr id="10" name="table-63"/>
           <p:cNvGraphicFramePr>
             <a:graphicFrameLocks noGrp="1"/>
           </p:cNvGraphicFramePr>
@@ -18619,7 +20373,7 @@
       </p:graphicFrame>
       <p:sp>
         <p:nvSpPr>
-          <p:cNvPr id="7" name="rule-63"/>
+          <p:cNvPr id="7" name="rule-64"/>
           <p:cNvSpPr/>
           <p:nvPr/>
         </p:nvSpPr>
@@ -18642,7 +20396,7 @@
       </p:sp>
       <p:sp>
         <p:nvSpPr>
-          <p:cNvPr id="8" name="text-64"/>
+          <p:cNvPr id="8" name="text-65"/>
           <p:cNvSpPr txBox="1"/>
           <p:nvPr/>
         </p:nvSpPr>
